--- a/Module 1/class_1.3/deep_learning_course_class_1.3.pptx
+++ b/Module 1/class_1.3/deep_learning_course_class_1.3.pptx
@@ -25,6 +25,9 @@
     <p:sldId id="270" r:id="rId20"/>
     <p:sldId id="271" r:id="rId21"/>
     <p:sldId id="272" r:id="rId22"/>
+    <p:sldId id="273" r:id="rId23"/>
+    <p:sldId id="274" r:id="rId24"/>
+    <p:sldId id="275" r:id="rId25"/>
   </p:sldIdLst>
   <p:sldSz cy="5143500" cx="9144000"/>
   <p:notesSz cx="6858000" cy="9144000"/>
@@ -806,7 +809,7 @@
   <p:cSld>
     <p:spTree>
       <p:nvGrpSpPr>
-        <p:cNvPr id="143" name="Shape 143"/>
+        <p:cNvPr id="123" name="Shape 123"/>
         <p:cNvGrpSpPr/>
         <p:nvPr/>
       </p:nvGrpSpPr>
@@ -820,7 +823,7 @@
       </p:grpSpPr>
       <p:sp>
         <p:nvSpPr>
-          <p:cNvPr id="144" name="Google Shape;144;g368ba380d96_0_67:notes"/>
+          <p:cNvPr id="124" name="Google Shape;124;g385a649fa49_0_0:notes"/>
           <p:cNvSpPr/>
           <p:nvPr>
             <p:ph idx="2" type="sldImg"/>
@@ -855,7 +858,7 @@
       </p:sp>
       <p:sp>
         <p:nvSpPr>
-          <p:cNvPr id="145" name="Google Shape;145;g368ba380d96_0_67:notes"/>
+          <p:cNvPr id="125" name="Google Shape;125;g385a649fa49_0_0:notes"/>
           <p:cNvSpPr txBox="1"/>
           <p:nvPr>
             <p:ph idx="1" type="body"/>
@@ -905,7 +908,7 @@
   <p:cSld>
     <p:spTree>
       <p:nvGrpSpPr>
-        <p:cNvPr id="150" name="Shape 150"/>
+        <p:cNvPr id="131" name="Shape 131"/>
         <p:cNvGrpSpPr/>
         <p:nvPr/>
       </p:nvGrpSpPr>
@@ -919,7 +922,7 @@
       </p:grpSpPr>
       <p:sp>
         <p:nvSpPr>
-          <p:cNvPr id="151" name="Google Shape;151;g368ba380d96_0_73:notes"/>
+          <p:cNvPr id="132" name="Google Shape;132;g385a649fa49_0_15:notes"/>
           <p:cNvSpPr/>
           <p:nvPr>
             <p:ph idx="2" type="sldImg"/>
@@ -954,7 +957,7 @@
       </p:sp>
       <p:sp>
         <p:nvSpPr>
-          <p:cNvPr id="152" name="Google Shape;152;g368ba380d96_0_73:notes"/>
+          <p:cNvPr id="133" name="Google Shape;133;g385a649fa49_0_15:notes"/>
           <p:cNvSpPr txBox="1"/>
           <p:nvPr>
             <p:ph idx="1" type="body"/>
@@ -1004,7 +1007,7 @@
   <p:cSld>
     <p:spTree>
       <p:nvGrpSpPr>
-        <p:cNvPr id="178" name="Shape 178"/>
+        <p:cNvPr id="140" name="Shape 140"/>
         <p:cNvGrpSpPr/>
         <p:nvPr/>
       </p:nvGrpSpPr>
@@ -1018,7 +1021,7 @@
       </p:grpSpPr>
       <p:sp>
         <p:nvSpPr>
-          <p:cNvPr id="179" name="Google Shape;179;g368ba380d96_0_37:notes"/>
+          <p:cNvPr id="141" name="Google Shape;141;g368ba380d96_0_6:notes"/>
           <p:cNvSpPr/>
           <p:nvPr>
             <p:ph idx="2" type="sldImg"/>
@@ -1053,7 +1056,7 @@
       </p:sp>
       <p:sp>
         <p:nvSpPr>
-          <p:cNvPr id="180" name="Google Shape;180;g368ba380d96_0_37:notes"/>
+          <p:cNvPr id="142" name="Google Shape;142;g368ba380d96_0_6:notes"/>
           <p:cNvSpPr txBox="1"/>
           <p:nvPr>
             <p:ph idx="1" type="body"/>
@@ -1103,7 +1106,7 @@
   <p:cSld>
     <p:spTree>
       <p:nvGrpSpPr>
-        <p:cNvPr id="204" name="Shape 204"/>
+        <p:cNvPr id="170" name="Shape 170"/>
         <p:cNvGrpSpPr/>
         <p:nvPr/>
       </p:nvGrpSpPr>
@@ -1117,7 +1120,7 @@
       </p:grpSpPr>
       <p:sp>
         <p:nvSpPr>
-          <p:cNvPr id="205" name="Google Shape;205;g38417863650_0_28:notes"/>
+          <p:cNvPr id="171" name="Google Shape;171;g368ba380d96_0_67:notes"/>
           <p:cNvSpPr/>
           <p:nvPr>
             <p:ph idx="2" type="sldImg"/>
@@ -1152,7 +1155,7 @@
       </p:sp>
       <p:sp>
         <p:nvSpPr>
-          <p:cNvPr id="206" name="Google Shape;206;g38417863650_0_28:notes"/>
+          <p:cNvPr id="172" name="Google Shape;172;g368ba380d96_0_67:notes"/>
           <p:cNvSpPr txBox="1"/>
           <p:nvPr>
             <p:ph idx="1" type="body"/>
@@ -1202,7 +1205,7 @@
   <p:cSld>
     <p:spTree>
       <p:nvGrpSpPr>
-        <p:cNvPr id="210" name="Shape 210"/>
+        <p:cNvPr id="195" name="Shape 195"/>
         <p:cNvGrpSpPr/>
         <p:nvPr/>
       </p:nvGrpSpPr>
@@ -1216,7 +1219,7 @@
       </p:grpSpPr>
       <p:sp>
         <p:nvSpPr>
-          <p:cNvPr id="211" name="Google Shape;211;g38417863650_0_53:notes"/>
+          <p:cNvPr id="196" name="Google Shape;196;g368ba380d96_0_73:notes"/>
           <p:cNvSpPr/>
           <p:nvPr>
             <p:ph idx="2" type="sldImg"/>
@@ -1251,7 +1254,7 @@
       </p:sp>
       <p:sp>
         <p:nvSpPr>
-          <p:cNvPr id="212" name="Google Shape;212;g38417863650_0_53:notes"/>
+          <p:cNvPr id="197" name="Google Shape;197;g368ba380d96_0_73:notes"/>
           <p:cNvSpPr txBox="1"/>
           <p:nvPr>
             <p:ph idx="1" type="body"/>
@@ -1301,7 +1304,7 @@
   <p:cSld>
     <p:spTree>
       <p:nvGrpSpPr>
-        <p:cNvPr id="217" name="Shape 217"/>
+        <p:cNvPr id="223" name="Shape 223"/>
         <p:cNvGrpSpPr/>
         <p:nvPr/>
       </p:nvGrpSpPr>
@@ -1315,7 +1318,7 @@
       </p:grpSpPr>
       <p:sp>
         <p:nvSpPr>
-          <p:cNvPr id="218" name="Google Shape;218;g38417863650_0_34:notes"/>
+          <p:cNvPr id="224" name="Google Shape;224;g368ba380d96_0_37:notes"/>
           <p:cNvSpPr/>
           <p:nvPr>
             <p:ph idx="2" type="sldImg"/>
@@ -1350,7 +1353,7 @@
       </p:sp>
       <p:sp>
         <p:nvSpPr>
-          <p:cNvPr id="219" name="Google Shape;219;g38417863650_0_34:notes"/>
+          <p:cNvPr id="225" name="Google Shape;225;g368ba380d96_0_37:notes"/>
           <p:cNvSpPr txBox="1"/>
           <p:nvPr>
             <p:ph idx="1" type="body"/>
@@ -1400,7 +1403,7 @@
   <p:cSld>
     <p:spTree>
       <p:nvGrpSpPr>
-        <p:cNvPr id="226" name="Shape 226"/>
+        <p:cNvPr id="250" name="Shape 250"/>
         <p:cNvGrpSpPr/>
         <p:nvPr/>
       </p:nvGrpSpPr>
@@ -1414,7 +1417,7 @@
       </p:grpSpPr>
       <p:sp>
         <p:nvSpPr>
-          <p:cNvPr id="227" name="Google Shape;227;g38417863650_0_42:notes"/>
+          <p:cNvPr id="251" name="Google Shape;251;g38417863650_0_28:notes"/>
           <p:cNvSpPr/>
           <p:nvPr>
             <p:ph idx="2" type="sldImg"/>
@@ -1449,7 +1452,7 @@
       </p:sp>
       <p:sp>
         <p:nvSpPr>
-          <p:cNvPr id="228" name="Google Shape;228;g38417863650_0_42:notes"/>
+          <p:cNvPr id="252" name="Google Shape;252;g38417863650_0_28:notes"/>
           <p:cNvSpPr txBox="1"/>
           <p:nvPr>
             <p:ph idx="1" type="body"/>
@@ -1499,7 +1502,7 @@
   <p:cSld>
     <p:spTree>
       <p:nvGrpSpPr>
-        <p:cNvPr id="238" name="Shape 238"/>
+        <p:cNvPr id="275" name="Shape 275"/>
         <p:cNvGrpSpPr/>
         <p:nvPr/>
       </p:nvGrpSpPr>
@@ -1513,7 +1516,7 @@
       </p:grpSpPr>
       <p:sp>
         <p:nvSpPr>
-          <p:cNvPr id="239" name="Google Shape;239;g3640bf93304_0_18:notes"/>
+          <p:cNvPr id="276" name="Google Shape;276;g38417863650_0_53:notes"/>
           <p:cNvSpPr/>
           <p:nvPr>
             <p:ph idx="2" type="sldImg"/>
@@ -1548,7 +1551,205 @@
       </p:sp>
       <p:sp>
         <p:nvSpPr>
-          <p:cNvPr id="240" name="Google Shape;240;g3640bf93304_0_18:notes"/>
+          <p:cNvPr id="277" name="Google Shape;277;g38417863650_0_53:notes"/>
+          <p:cNvSpPr txBox="1"/>
+          <p:nvPr>
+            <p:ph idx="1" type="body"/>
+          </p:nvPr>
+        </p:nvSpPr>
+        <p:spPr>
+          <a:xfrm>
+            <a:off x="685800" y="4343400"/>
+            <a:ext cx="5486400" cy="4114800"/>
+          </a:xfrm>
+          <a:prstGeom prst="rect">
+            <a:avLst/>
+          </a:prstGeom>
+        </p:spPr>
+        <p:txBody>
+          <a:bodyPr anchorCtr="0" anchor="t" bIns="91425" lIns="91425" spcFirstLastPara="1" rIns="91425" wrap="square" tIns="91425">
+            <a:noAutofit/>
+          </a:bodyPr>
+          <a:lstStyle/>
+          <a:p>
+            <a:pPr indent="0" lvl="0" marL="0" rtl="0" algn="l">
+              <a:spcBef>
+                <a:spcPts val="0"/>
+              </a:spcBef>
+              <a:spcAft>
+                <a:spcPts val="0"/>
+              </a:spcAft>
+              <a:buNone/>
+            </a:pPr>
+            <a:r>
+              <a:t/>
+            </a:r>
+            <a:endParaRPr/>
+          </a:p>
+        </p:txBody>
+      </p:sp>
+    </p:spTree>
+  </p:cSld>
+  <p:clrMapOvr>
+    <a:masterClrMapping/>
+  </p:clrMapOvr>
+</p:notes>
+</file>
+
+<file path=ppt/notesSlides/notesSlide18.xml><?xml version="1.0" encoding="utf-8"?>
+<p:notes xmlns:a="http://schemas.openxmlformats.org/drawingml/2006/main" xmlns:r="http://schemas.openxmlformats.org/officeDocument/2006/relationships" xmlns:mc="http://schemas.openxmlformats.org/markup-compatibility/2006" xmlns:mv="urn:schemas-microsoft-com:mac:vml" xmlns:p="http://schemas.openxmlformats.org/presentationml/2006/main" xmlns:c="http://schemas.openxmlformats.org/drawingml/2006/chart" xmlns:dgm="http://schemas.openxmlformats.org/drawingml/2006/diagram" xmlns:o="urn:schemas-microsoft-com:office:office" xmlns:v="urn:schemas-microsoft-com:vml" xmlns:pvml="urn:schemas-microsoft-com:office:powerpoint" xmlns:com="http://schemas.openxmlformats.org/drawingml/2006/compatibility" xmlns:p14="http://schemas.microsoft.com/office/powerpoint/2010/main" xmlns:p15="http://schemas.microsoft.com/office/powerpoint/2012/main" xmlns:ahyp="http://schemas.microsoft.com/office/drawing/2018/hyperlinkcolor" showMasterPhAnim="0" showMasterSp="0">
+  <p:cSld>
+    <p:spTree>
+      <p:nvGrpSpPr>
+        <p:cNvPr id="282" name="Shape 282"/>
+        <p:cNvGrpSpPr/>
+        <p:nvPr/>
+      </p:nvGrpSpPr>
+      <p:grpSpPr>
+        <a:xfrm>
+          <a:off x="0" y="0"/>
+          <a:ext cx="0" cy="0"/>
+          <a:chOff x="0" y="0"/>
+          <a:chExt cx="0" cy="0"/>
+        </a:xfrm>
+      </p:grpSpPr>
+      <p:sp>
+        <p:nvSpPr>
+          <p:cNvPr id="283" name="Google Shape;283;g38417863650_0_34:notes"/>
+          <p:cNvSpPr/>
+          <p:nvPr>
+            <p:ph idx="2" type="sldImg"/>
+          </p:nvPr>
+        </p:nvSpPr>
+        <p:spPr>
+          <a:xfrm>
+            <a:off x="381300" y="685800"/>
+            <a:ext cx="6096000" cy="3429000"/>
+          </a:xfrm>
+          <a:custGeom>
+            <a:rect b="b" l="l" r="r" t="t"/>
+            <a:pathLst>
+              <a:path extrusionOk="0" h="120000" w="120000">
+                <a:moveTo>
+                  <a:pt x="0" y="0"/>
+                </a:moveTo>
+                <a:lnTo>
+                  <a:pt x="120000" y="0"/>
+                </a:lnTo>
+                <a:lnTo>
+                  <a:pt x="120000" y="120000"/>
+                </a:lnTo>
+                <a:lnTo>
+                  <a:pt x="0" y="120000"/>
+                </a:lnTo>
+                <a:close/>
+              </a:path>
+            </a:pathLst>
+          </a:custGeom>
+        </p:spPr>
+      </p:sp>
+      <p:sp>
+        <p:nvSpPr>
+          <p:cNvPr id="284" name="Google Shape;284;g38417863650_0_34:notes"/>
+          <p:cNvSpPr txBox="1"/>
+          <p:nvPr>
+            <p:ph idx="1" type="body"/>
+          </p:nvPr>
+        </p:nvSpPr>
+        <p:spPr>
+          <a:xfrm>
+            <a:off x="685800" y="4343400"/>
+            <a:ext cx="5486400" cy="4114800"/>
+          </a:xfrm>
+          <a:prstGeom prst="rect">
+            <a:avLst/>
+          </a:prstGeom>
+        </p:spPr>
+        <p:txBody>
+          <a:bodyPr anchorCtr="0" anchor="t" bIns="91425" lIns="91425" spcFirstLastPara="1" rIns="91425" wrap="square" tIns="91425">
+            <a:noAutofit/>
+          </a:bodyPr>
+          <a:lstStyle/>
+          <a:p>
+            <a:pPr indent="0" lvl="0" marL="0" rtl="0" algn="l">
+              <a:spcBef>
+                <a:spcPts val="0"/>
+              </a:spcBef>
+              <a:spcAft>
+                <a:spcPts val="0"/>
+              </a:spcAft>
+              <a:buNone/>
+            </a:pPr>
+            <a:r>
+              <a:t/>
+            </a:r>
+            <a:endParaRPr/>
+          </a:p>
+        </p:txBody>
+      </p:sp>
+    </p:spTree>
+  </p:cSld>
+  <p:clrMapOvr>
+    <a:masterClrMapping/>
+  </p:clrMapOvr>
+</p:notes>
+</file>
+
+<file path=ppt/notesSlides/notesSlide19.xml><?xml version="1.0" encoding="utf-8"?>
+<p:notes xmlns:a="http://schemas.openxmlformats.org/drawingml/2006/main" xmlns:r="http://schemas.openxmlformats.org/officeDocument/2006/relationships" xmlns:mc="http://schemas.openxmlformats.org/markup-compatibility/2006" xmlns:mv="urn:schemas-microsoft-com:mac:vml" xmlns:p="http://schemas.openxmlformats.org/presentationml/2006/main" xmlns:c="http://schemas.openxmlformats.org/drawingml/2006/chart" xmlns:dgm="http://schemas.openxmlformats.org/drawingml/2006/diagram" xmlns:o="urn:schemas-microsoft-com:office:office" xmlns:v="urn:schemas-microsoft-com:vml" xmlns:pvml="urn:schemas-microsoft-com:office:powerpoint" xmlns:com="http://schemas.openxmlformats.org/drawingml/2006/compatibility" xmlns:p14="http://schemas.microsoft.com/office/powerpoint/2010/main" xmlns:p15="http://schemas.microsoft.com/office/powerpoint/2012/main" xmlns:ahyp="http://schemas.microsoft.com/office/drawing/2018/hyperlinkcolor" showMasterPhAnim="0" showMasterSp="0">
+  <p:cSld>
+    <p:spTree>
+      <p:nvGrpSpPr>
+        <p:cNvPr id="291" name="Shape 291"/>
+        <p:cNvGrpSpPr/>
+        <p:nvPr/>
+      </p:nvGrpSpPr>
+      <p:grpSpPr>
+        <a:xfrm>
+          <a:off x="0" y="0"/>
+          <a:ext cx="0" cy="0"/>
+          <a:chOff x="0" y="0"/>
+          <a:chExt cx="0" cy="0"/>
+        </a:xfrm>
+      </p:grpSpPr>
+      <p:sp>
+        <p:nvSpPr>
+          <p:cNvPr id="292" name="Google Shape;292;g38417863650_0_42:notes"/>
+          <p:cNvSpPr/>
+          <p:nvPr>
+            <p:ph idx="2" type="sldImg"/>
+          </p:nvPr>
+        </p:nvSpPr>
+        <p:spPr>
+          <a:xfrm>
+            <a:off x="381300" y="685800"/>
+            <a:ext cx="6096000" cy="3429000"/>
+          </a:xfrm>
+          <a:custGeom>
+            <a:rect b="b" l="l" r="r" t="t"/>
+            <a:pathLst>
+              <a:path extrusionOk="0" h="120000" w="120000">
+                <a:moveTo>
+                  <a:pt x="0" y="0"/>
+                </a:moveTo>
+                <a:lnTo>
+                  <a:pt x="120000" y="0"/>
+                </a:lnTo>
+                <a:lnTo>
+                  <a:pt x="120000" y="120000"/>
+                </a:lnTo>
+                <a:lnTo>
+                  <a:pt x="0" y="120000"/>
+                </a:lnTo>
+                <a:close/>
+              </a:path>
+            </a:pathLst>
+          </a:custGeom>
+        </p:spPr>
+      </p:sp>
+      <p:sp>
+        <p:nvSpPr>
+          <p:cNvPr id="293" name="Google Shape;293;g38417863650_0_42:notes"/>
           <p:cNvSpPr txBox="1"/>
           <p:nvPr>
             <p:ph idx="1" type="body"/>
@@ -1692,6 +1893,105 @@
 </p:notes>
 </file>
 
+<file path=ppt/notesSlides/notesSlide20.xml><?xml version="1.0" encoding="utf-8"?>
+<p:notes xmlns:a="http://schemas.openxmlformats.org/drawingml/2006/main" xmlns:r="http://schemas.openxmlformats.org/officeDocument/2006/relationships" xmlns:mc="http://schemas.openxmlformats.org/markup-compatibility/2006" xmlns:mv="urn:schemas-microsoft-com:mac:vml" xmlns:p="http://schemas.openxmlformats.org/presentationml/2006/main" xmlns:c="http://schemas.openxmlformats.org/drawingml/2006/chart" xmlns:dgm="http://schemas.openxmlformats.org/drawingml/2006/diagram" xmlns:o="urn:schemas-microsoft-com:office:office" xmlns:v="urn:schemas-microsoft-com:vml" xmlns:pvml="urn:schemas-microsoft-com:office:powerpoint" xmlns:com="http://schemas.openxmlformats.org/drawingml/2006/compatibility" xmlns:p14="http://schemas.microsoft.com/office/powerpoint/2010/main" xmlns:p15="http://schemas.microsoft.com/office/powerpoint/2012/main" xmlns:ahyp="http://schemas.microsoft.com/office/drawing/2018/hyperlinkcolor" showMasterPhAnim="0" showMasterSp="0">
+  <p:cSld>
+    <p:spTree>
+      <p:nvGrpSpPr>
+        <p:cNvPr id="303" name="Shape 303"/>
+        <p:cNvGrpSpPr/>
+        <p:nvPr/>
+      </p:nvGrpSpPr>
+      <p:grpSpPr>
+        <a:xfrm>
+          <a:off x="0" y="0"/>
+          <a:ext cx="0" cy="0"/>
+          <a:chOff x="0" y="0"/>
+          <a:chExt cx="0" cy="0"/>
+        </a:xfrm>
+      </p:grpSpPr>
+      <p:sp>
+        <p:nvSpPr>
+          <p:cNvPr id="304" name="Google Shape;304;g3640bf93304_0_18:notes"/>
+          <p:cNvSpPr/>
+          <p:nvPr>
+            <p:ph idx="2" type="sldImg"/>
+          </p:nvPr>
+        </p:nvSpPr>
+        <p:spPr>
+          <a:xfrm>
+            <a:off x="381300" y="685800"/>
+            <a:ext cx="6096000" cy="3429000"/>
+          </a:xfrm>
+          <a:custGeom>
+            <a:rect b="b" l="l" r="r" t="t"/>
+            <a:pathLst>
+              <a:path extrusionOk="0" h="120000" w="120000">
+                <a:moveTo>
+                  <a:pt x="0" y="0"/>
+                </a:moveTo>
+                <a:lnTo>
+                  <a:pt x="120000" y="0"/>
+                </a:lnTo>
+                <a:lnTo>
+                  <a:pt x="120000" y="120000"/>
+                </a:lnTo>
+                <a:lnTo>
+                  <a:pt x="0" y="120000"/>
+                </a:lnTo>
+                <a:close/>
+              </a:path>
+            </a:pathLst>
+          </a:custGeom>
+        </p:spPr>
+      </p:sp>
+      <p:sp>
+        <p:nvSpPr>
+          <p:cNvPr id="305" name="Google Shape;305;g3640bf93304_0_18:notes"/>
+          <p:cNvSpPr txBox="1"/>
+          <p:nvPr>
+            <p:ph idx="1" type="body"/>
+          </p:nvPr>
+        </p:nvSpPr>
+        <p:spPr>
+          <a:xfrm>
+            <a:off x="685800" y="4343400"/>
+            <a:ext cx="5486400" cy="4114800"/>
+          </a:xfrm>
+          <a:prstGeom prst="rect">
+            <a:avLst/>
+          </a:prstGeom>
+        </p:spPr>
+        <p:txBody>
+          <a:bodyPr anchorCtr="0" anchor="t" bIns="91425" lIns="91425" spcFirstLastPara="1" rIns="91425" wrap="square" tIns="91425">
+            <a:noAutofit/>
+          </a:bodyPr>
+          <a:lstStyle/>
+          <a:p>
+            <a:pPr indent="0" lvl="0" marL="0" rtl="0" algn="l">
+              <a:spcBef>
+                <a:spcPts val="0"/>
+              </a:spcBef>
+              <a:spcAft>
+                <a:spcPts val="0"/>
+              </a:spcAft>
+              <a:buNone/>
+            </a:pPr>
+            <a:r>
+              <a:t/>
+            </a:r>
+            <a:endParaRPr/>
+          </a:p>
+        </p:txBody>
+      </p:sp>
+    </p:spTree>
+  </p:cSld>
+  <p:clrMapOvr>
+    <a:masterClrMapping/>
+  </p:clrMapOvr>
+</p:notes>
+</file>
+
 <file path=ppt/notesSlides/notesSlide3.xml><?xml version="1.0" encoding="utf-8"?>
 <p:notes xmlns:a="http://schemas.openxmlformats.org/drawingml/2006/main" xmlns:r="http://schemas.openxmlformats.org/officeDocument/2006/relationships" xmlns:mc="http://schemas.openxmlformats.org/markup-compatibility/2006" xmlns:mv="urn:schemas-microsoft-com:mac:vml" xmlns:p="http://schemas.openxmlformats.org/presentationml/2006/main" xmlns:c="http://schemas.openxmlformats.org/drawingml/2006/chart" xmlns:dgm="http://schemas.openxmlformats.org/drawingml/2006/diagram" xmlns:o="urn:schemas-microsoft-com:office:office" xmlns:v="urn:schemas-microsoft-com:vml" xmlns:pvml="urn:schemas-microsoft-com:office:powerpoint" xmlns:com="http://schemas.openxmlformats.org/drawingml/2006/compatibility" xmlns:p14="http://schemas.microsoft.com/office/powerpoint/2010/main" xmlns:p15="http://schemas.microsoft.com/office/powerpoint/2012/main" xmlns:ahyp="http://schemas.microsoft.com/office/drawing/2018/hyperlinkcolor" showMasterPhAnim="0" showMasterSp="0">
   <p:cSld>
@@ -2291,7 +2591,7 @@
   <p:cSld>
     <p:spTree>
       <p:nvGrpSpPr>
-        <p:cNvPr id="113" name="Shape 113"/>
+        <p:cNvPr id="114" name="Shape 114"/>
         <p:cNvGrpSpPr/>
         <p:nvPr/>
       </p:nvGrpSpPr>
@@ -2305,7 +2605,7 @@
       </p:grpSpPr>
       <p:sp>
         <p:nvSpPr>
-          <p:cNvPr id="114" name="Google Shape;114;g368ba380d96_0_6:notes"/>
+          <p:cNvPr id="115" name="Google Shape;115;g385a649fa49_0_7:notes"/>
           <p:cNvSpPr/>
           <p:nvPr>
             <p:ph idx="2" type="sldImg"/>
@@ -2340,7 +2640,7 @@
       </p:sp>
       <p:sp>
         <p:nvSpPr>
-          <p:cNvPr id="115" name="Google Shape;115;g368ba380d96_0_6:notes"/>
+          <p:cNvPr id="116" name="Google Shape;116;g385a649fa49_0_7:notes"/>
           <p:cNvSpPr txBox="1"/>
           <p:nvPr>
             <p:ph idx="1" type="body"/>
@@ -7164,7 +7464,7 @@
   <p:cSld>
     <p:spTree>
       <p:nvGrpSpPr>
-        <p:cNvPr id="146" name="Shape 146"/>
+        <p:cNvPr id="126" name="Shape 126"/>
         <p:cNvGrpSpPr/>
         <p:nvPr/>
       </p:nvGrpSpPr>
@@ -7178,7 +7478,7 @@
       </p:grpSpPr>
       <p:sp>
         <p:nvSpPr>
-          <p:cNvPr id="147" name="Google Shape;147;p22"/>
+          <p:cNvPr id="127" name="Google Shape;127;p22"/>
           <p:cNvSpPr txBox="1"/>
           <p:nvPr>
             <p:ph idx="4294967295" type="title"/>
@@ -7187,7 +7487,7 @@
         <p:spPr>
           <a:xfrm>
             <a:off x="311700" y="445025"/>
-            <a:ext cx="8520600" cy="572700"/>
+            <a:ext cx="6865200" cy="572700"/>
           </a:xfrm>
           <a:prstGeom prst="rect">
             <a:avLst/>
@@ -7210,7 +7510,7 @@
             </a:pPr>
             <a:r>
               <a:rPr lang="en"/>
-              <a:t>Partial Derivatives: Chain Rule</a:t>
+              <a:t>Critical points for multivariate functions</a:t>
             </a:r>
             <a:endParaRPr/>
           </a:p>
@@ -7218,7 +7518,7 @@
       </p:sp>
       <p:sp>
         <p:nvSpPr>
-          <p:cNvPr id="148" name="Google Shape;148;p22"/>
+          <p:cNvPr id="128" name="Google Shape;128;p22"/>
           <p:cNvSpPr txBox="1"/>
           <p:nvPr/>
         </p:nvSpPr>
@@ -7280,9 +7580,59 @@
           </a:p>
         </p:txBody>
       </p:sp>
+      <p:sp>
+        <p:nvSpPr>
+          <p:cNvPr id="129" name="Google Shape;129;p22"/>
+          <p:cNvSpPr txBox="1"/>
+          <p:nvPr/>
+        </p:nvSpPr>
+        <p:spPr>
+          <a:xfrm>
+            <a:off x="418875" y="1128425"/>
+            <a:ext cx="7388700" cy="785100"/>
+          </a:xfrm>
+          <a:prstGeom prst="rect">
+            <a:avLst/>
+          </a:prstGeom>
+          <a:noFill/>
+          <a:ln>
+            <a:noFill/>
+          </a:ln>
+        </p:spPr>
+        <p:txBody>
+          <a:bodyPr anchorCtr="0" anchor="t" bIns="91425" lIns="91425" spcFirstLastPara="1" rIns="91425" wrap="square" tIns="91425">
+            <a:spAutoFit/>
+          </a:bodyPr>
+          <a:lstStyle/>
+          <a:p>
+            <a:pPr indent="0" lvl="0" marL="0" rtl="0" algn="l">
+              <a:spcBef>
+                <a:spcPts val="0"/>
+              </a:spcBef>
+              <a:spcAft>
+                <a:spcPts val="0"/>
+              </a:spcAft>
+              <a:buNone/>
+            </a:pPr>
+            <a:r>
+              <a:rPr lang="en" sz="1300">
+                <a:solidFill>
+                  <a:schemeClr val="dk2"/>
+                </a:solidFill>
+              </a:rPr>
+              <a:t>To find a critical point (local minimum/maximum) for a univariate function, we set the derivative to 0 and use the second derivative test to determine whether the critical point is a minimum or maximum. What’s the counterpart of this in higher dimensions? </a:t>
+            </a:r>
+            <a:endParaRPr sz="1300">
+              <a:solidFill>
+                <a:schemeClr val="dk2"/>
+              </a:solidFill>
+            </a:endParaRPr>
+          </a:p>
+        </p:txBody>
+      </p:sp>
       <p:pic>
         <p:nvPicPr>
-          <p:cNvPr descr="{&quot;code&quot;:&quot;\\begin{lalign*}\n&amp;{\\text{In}\\;\\text{the}\\;\\text{below,}\\;\\text{we'll}\\;\\text{refer}\\;\\text{to}\\;\\text{h(x),}\\;\\text{g(x),}\\;\\text{f(x)}\\;\\text{as}\\;h,g,f\\,\\text{respectively}}\\\\\n&amp;{\\text{Example}\\;\\text{1:}}\\\\\n&amp;{h=g+f}\\\\\n&amp;{h_{g}:=\\pdf{h}{g}=1\\,\\text{:=}\\;\\text{means}\\;\\text{\&quot;defined}\\;\\text{as\&quot;}}\\\\\n&amp;{h_{f}:=\\pdf{h}{f}=1}\\\\\n&amp;{\\text{Example}\\;\\text{2:}}\\\\\n&amp;{h=g\\times f}\\\\\n&amp;{h_{g}=f}\\\\\n&amp;{h_{f}=g}\\\\\n&amp;{\\text{Eg.,}\\;h\\left(x\\right)=\\sin\\left(x\\right)\\cos\\left(x\\right)}\\\\\n&amp;{f\\left(x\\right)=\\sin\\left(x\\right),\\,g\\left(x\\right)=\\cos\\left(x\\right)}\\\\\n&amp;{h_{x}=f\\left(x\\right)g_{x}\\left(x\\right)+g\\left(x\\right)f_{x}\\left(x\\right)=-\\sin \\left(x\\right)\\sin\\left(x\\right)+\\cos\\left(x\\right)\\cos\\left(x\\right)}\t\n\\end{lalign*}&quot;,&quot;id&quot;:&quot;6&quot;,&quot;backgroundColor&quot;:&quot;#FFFFFF&quot;,&quot;type&quot;:&quot;lalign*&quot;,&quot;aid&quot;:null,&quot;font&quot;:{&quot;color&quot;:&quot;#000000&quot;,&quot;family&quot;:&quot;Arial&quot;,&quot;size&quot;:12},&quot;backgroundColorModified&quot;:false,&quot;ts&quot;:1759684194328,&quot;cs&quot;:&quot;1Oe8TIPI+zPMuJirAbWNYw==&quot;,&quot;size&quot;:{&quot;width&quot;:518,&quot;height&quot;:337}}" id="149" name="Google Shape;149;p22"/>
+          <p:cNvPr descr="{&quot;id&quot;:&quot;15&quot;,&quot;font&quot;:{&quot;color&quot;:&quot;#000000&quot;,&quot;size&quot;:10,&quot;family&quot;:&quot;Arial&quot;},&quot;backgroundColor&quot;:&quot;#FFFFFF&quot;,&quot;aid&quot;:null,&quot;type&quot;:&quot;gather*&quot;,&quot;code&quot;:&quot;\\begin{gather*}\n{f\\left(x_{0}+h\\right)=f\\left(x_{0}\\right)+\\nabla f\\left(x_{0}\\right)^{T}h+h^{T}H\\left(x_{0}\\right)h+R\\left(x_{0},h\\right)}\\\\\n{\\text{Here,}\\;x_{0},\\,h,\\,\\nabla f\\,\\text{etc}\\;\\text{are}\\;N\\times1\\,\\text{vectors}}\\\\\n{\\text{As}\\;\\text{in}\\;\\text{one}\\;\\text{dimension,}\\;\\nabla f\\left(x_{0}\\right)=0\\,\\text{at}\\;\\text{a}\\;\\text{critica}\\text{l}\\;\\text{point.}\\;\\text{}}\\\\\n{H\\,\\text{is}\\;\\text{the}\\;\\text{Hessian}\\;\\text{matrix}\\;\\text{(}N\\times N\\text{),}\\;\\text{the}\\;\\text{equivalent}\\;\\text{of}\\;\\text{a}\\;\\text{second}\\;\\text{derivative}\\;\\text{}}\\\\\n{\\text{in}\\;\\text{higher}\\;\\text{dimensions.}\\;\\text{}}\\\\\n{\\text{At}\\;\\text{a}\\;\\text{critical}\\;\\text{point,}\\;\\text{}}\\\\\n{f\\left(x_{0}+h\\right)=f\\left(x_{0}\\right)+h^{T}H\\left(x_{0}\\right)h+R\\left(x_{0},h\\right)}\\\\\n{\\text{In}\\;\\text{a}\\;\\text{small}\\;\\text{enough}\\;\\text{neighborhood}\\;\\text{of}\\;x_{0\\,}\\left(\\text{small}\\;h\\right),}\\\\\n{\\text{if}\\;H\\,\\text{is}\\;\\text{positive}\\;\\text{definite}\\;\\text{(all}\\;\\text{eigenvalues}\\;\\text{positive),}\\;\\text{then}\\;h^{T}H\\left(x_{0}\\right)h&gt;0,\\,f\\left(x_{0}+h\\right)&gt;f\\left(x_{0}\\right)\\,\\text{and}\\;x_{0}\\text{}}\\\\\n{\\text{is}\\;\\text{local}\\;\\text{minimum}}\\\\\n{\\text{if}\\;H\\,\\text{is}\\;\\text{negative}\\;\\text{definite}\\;\\text{(all}\\;\\text{eigenvalues}\\;\\text{negative)}\\text{,}\\;\\text{then}\\;h^{T}H\\left(x_{0}\\right)h&lt;0,\\,f\\left(x_{0}+h\\right)&lt;f\\left(x_{0}\\right)\\,\\text{and}\\;x_{0}\\text{}}\\\\\n{\\text{is}\\;\\text{local}\\;\\text{maximum}}\\\\\n{\\text{if}\\;H\\,\\text{is}\\;\\text{indefinite}\\;\\text{(some}\\;\\text{eigenvalues}\\;\\text{positive,}\\;\\text{others}\\;\\text{negative),}\\;h^{T}H\\left(x_{0}\\right)h\\;\\text{can}\\;\\text{take}\\;\\text{both}\\;\\text{signs,}\\;\\text{and}\\;f\\left(x_{0}\\right)\\,\\text{is}\\;\\text{a}\\;\\text{saddle}\\;\\text{point}}\\\\\n{\\text{i.e.,}\\;f\\left(x_{0}+h\\right)\\,\\text{is}\\;\\text{larger}\\;\\text{in}\\;\\text{some}\\;\\text{directions}\\;\\text{and}\\;\\text{smaller}\\;\\text{in}\\;\\text{others}}\\\\\n{}\t\n\\end{gather*}&quot;,&quot;backgroundColorModified&quot;:false,&quot;ts&quot;:1761614345672,&quot;cs&quot;:&quot;Z2jO3NtcBpk8KFiWAF4HHQ==&quot;,&quot;size&quot;:{&quot;width&quot;:813,&quot;height&quot;:292.5}}" id="130" name="Google Shape;130;p22"/>
           <p:cNvPicPr preferRelativeResize="0"/>
           <p:nvPr/>
         </p:nvPicPr>
@@ -7296,8 +7646,8 @@
         </p:blipFill>
         <p:spPr>
           <a:xfrm>
-            <a:off x="422706" y="1114350"/>
-            <a:ext cx="4933950" cy="3209925"/>
+            <a:off x="601759" y="2134765"/>
+            <a:ext cx="7743825" cy="2786063"/>
           </a:xfrm>
           <a:prstGeom prst="rect">
             <a:avLst/>
@@ -7321,7 +7671,7 @@
   <p:cSld>
     <p:spTree>
       <p:nvGrpSpPr>
-        <p:cNvPr id="153" name="Shape 153"/>
+        <p:cNvPr id="134" name="Shape 134"/>
         <p:cNvGrpSpPr/>
         <p:nvPr/>
       </p:nvGrpSpPr>
@@ -7335,7 +7685,7 @@
       </p:grpSpPr>
       <p:sp>
         <p:nvSpPr>
-          <p:cNvPr id="154" name="Google Shape;154;p23"/>
+          <p:cNvPr id="135" name="Google Shape;135;p23"/>
           <p:cNvSpPr txBox="1"/>
           <p:nvPr>
             <p:ph idx="4294967295" type="title"/>
@@ -7344,7 +7694,7 @@
         <p:spPr>
           <a:xfrm>
             <a:off x="311700" y="445025"/>
-            <a:ext cx="8520600" cy="572700"/>
+            <a:ext cx="6865200" cy="572700"/>
           </a:xfrm>
           <a:prstGeom prst="rect">
             <a:avLst/>
@@ -7367,7 +7717,7 @@
             </a:pPr>
             <a:r>
               <a:rPr lang="en"/>
-              <a:t>Partial Derivatives: Chain Rule</a:t>
+              <a:t>Second Derivative Test in 2D..</a:t>
             </a:r>
             <a:endParaRPr/>
           </a:p>
@@ -7375,13 +7725,13 @@
       </p:sp>
       <p:sp>
         <p:nvSpPr>
-          <p:cNvPr id="155" name="Google Shape;155;p23"/>
+          <p:cNvPr id="136" name="Google Shape;136;p23"/>
           <p:cNvSpPr txBox="1"/>
           <p:nvPr/>
         </p:nvSpPr>
         <p:spPr>
           <a:xfrm>
-            <a:off x="936739" y="1004075"/>
+            <a:off x="369775" y="1162825"/>
             <a:ext cx="6747300" cy="738900"/>
           </a:xfrm>
           <a:prstGeom prst="rect">
@@ -7439,14 +7789,14 @@
       </p:sp>
       <p:sp>
         <p:nvSpPr>
-          <p:cNvPr id="156" name="Google Shape;156;p23"/>
+          <p:cNvPr id="137" name="Google Shape;137;p23"/>
           <p:cNvSpPr txBox="1"/>
           <p:nvPr/>
         </p:nvSpPr>
         <p:spPr>
           <a:xfrm>
-            <a:off x="361514" y="904350"/>
-            <a:ext cx="7137900" cy="384900"/>
+            <a:off x="418875" y="1128425"/>
+            <a:ext cx="7388700" cy="384900"/>
           </a:xfrm>
           <a:prstGeom prst="rect">
             <a:avLst/>
@@ -7477,7 +7827,7 @@
                   <a:schemeClr val="dk2"/>
                 </a:solidFill>
               </a:rPr>
-              <a:t>More complicated example</a:t>
+              <a:t>In 2D,</a:t>
             </a:r>
             <a:endParaRPr sz="1300">
               <a:solidFill>
@@ -7487,670 +7837,9 @@
           </a:p>
         </p:txBody>
       </p:sp>
-      <p:sp>
-        <p:nvSpPr>
-          <p:cNvPr id="157" name="Google Shape;157;p23"/>
-          <p:cNvSpPr/>
-          <p:nvPr/>
-        </p:nvSpPr>
-        <p:spPr>
-          <a:xfrm>
-            <a:off x="1157914" y="1791825"/>
-            <a:ext cx="437100" cy="342900"/>
-          </a:xfrm>
-          <a:prstGeom prst="rect">
-            <a:avLst/>
-          </a:prstGeom>
-          <a:solidFill>
-            <a:schemeClr val="lt2"/>
-          </a:solidFill>
-          <a:ln cap="flat" cmpd="sng" w="9525">
-            <a:solidFill>
-              <a:schemeClr val="dk2"/>
-            </a:solidFill>
-            <a:prstDash val="solid"/>
-            <a:round/>
-            <a:headEnd len="sm" w="sm" type="none"/>
-            <a:tailEnd len="sm" w="sm" type="none"/>
-          </a:ln>
-        </p:spPr>
-        <p:txBody>
-          <a:bodyPr anchorCtr="0" anchor="ctr" bIns="91425" lIns="91425" spcFirstLastPara="1" rIns="91425" wrap="square" tIns="91425">
-            <a:noAutofit/>
-          </a:bodyPr>
-          <a:lstStyle/>
-          <a:p>
-            <a:pPr indent="0" lvl="0" marL="0" rtl="0" algn="ctr">
-              <a:spcBef>
-                <a:spcPts val="0"/>
-              </a:spcBef>
-              <a:spcAft>
-                <a:spcPts val="0"/>
-              </a:spcAft>
-              <a:buNone/>
-            </a:pPr>
-            <a:r>
-              <a:rPr lang="en"/>
-              <a:t>x</a:t>
-            </a:r>
-            <a:endParaRPr/>
-          </a:p>
-        </p:txBody>
-      </p:sp>
-      <p:sp>
-        <p:nvSpPr>
-          <p:cNvPr id="158" name="Google Shape;158;p23"/>
-          <p:cNvSpPr/>
-          <p:nvPr/>
-        </p:nvSpPr>
-        <p:spPr>
-          <a:xfrm>
-            <a:off x="2056114" y="1387000"/>
-            <a:ext cx="772800" cy="342900"/>
-          </a:xfrm>
-          <a:prstGeom prst="rect">
-            <a:avLst/>
-          </a:prstGeom>
-          <a:solidFill>
-            <a:schemeClr val="lt2"/>
-          </a:solidFill>
-          <a:ln cap="flat" cmpd="sng" w="9525">
-            <a:solidFill>
-              <a:schemeClr val="dk2"/>
-            </a:solidFill>
-            <a:prstDash val="solid"/>
-            <a:round/>
-            <a:headEnd len="sm" w="sm" type="none"/>
-            <a:tailEnd len="sm" w="sm" type="none"/>
-          </a:ln>
-        </p:spPr>
-        <p:txBody>
-          <a:bodyPr anchorCtr="0" anchor="ctr" bIns="91425" lIns="91425" spcFirstLastPara="1" rIns="91425" wrap="square" tIns="91425">
-            <a:noAutofit/>
-          </a:bodyPr>
-          <a:lstStyle/>
-          <a:p>
-            <a:pPr indent="0" lvl="0" marL="0" rtl="0" algn="ctr">
-              <a:spcBef>
-                <a:spcPts val="0"/>
-              </a:spcBef>
-              <a:spcAft>
-                <a:spcPts val="0"/>
-              </a:spcAft>
-              <a:buNone/>
-            </a:pPr>
-            <a:r>
-              <a:rPr lang="en"/>
-              <a:t>f1=x^2</a:t>
-            </a:r>
-            <a:endParaRPr/>
-          </a:p>
-        </p:txBody>
-      </p:sp>
-      <p:sp>
-        <p:nvSpPr>
-          <p:cNvPr id="159" name="Google Shape;159;p23"/>
-          <p:cNvSpPr/>
-          <p:nvPr/>
-        </p:nvSpPr>
-        <p:spPr>
-          <a:xfrm>
-            <a:off x="2056114" y="2199475"/>
-            <a:ext cx="772800" cy="342900"/>
-          </a:xfrm>
-          <a:prstGeom prst="rect">
-            <a:avLst/>
-          </a:prstGeom>
-          <a:solidFill>
-            <a:schemeClr val="lt2"/>
-          </a:solidFill>
-          <a:ln cap="flat" cmpd="sng" w="9525">
-            <a:solidFill>
-              <a:schemeClr val="dk2"/>
-            </a:solidFill>
-            <a:prstDash val="solid"/>
-            <a:round/>
-            <a:headEnd len="sm" w="sm" type="none"/>
-            <a:tailEnd len="sm" w="sm" type="none"/>
-          </a:ln>
-        </p:spPr>
-        <p:txBody>
-          <a:bodyPr anchorCtr="0" anchor="ctr" bIns="91425" lIns="91425" spcFirstLastPara="1" rIns="91425" wrap="square" tIns="91425">
-            <a:noAutofit/>
-          </a:bodyPr>
-          <a:lstStyle/>
-          <a:p>
-            <a:pPr indent="0" lvl="0" marL="0" rtl="0" algn="ctr">
-              <a:spcBef>
-                <a:spcPts val="0"/>
-              </a:spcBef>
-              <a:spcAft>
-                <a:spcPts val="0"/>
-              </a:spcAft>
-              <a:buNone/>
-            </a:pPr>
-            <a:r>
-              <a:rPr lang="en"/>
-              <a:t>g1=1/x</a:t>
-            </a:r>
-            <a:endParaRPr/>
-          </a:p>
-        </p:txBody>
-      </p:sp>
-      <p:sp>
-        <p:nvSpPr>
-          <p:cNvPr id="160" name="Google Shape;160;p23"/>
-          <p:cNvSpPr/>
-          <p:nvPr/>
-        </p:nvSpPr>
-        <p:spPr>
-          <a:xfrm>
-            <a:off x="4350639" y="2199475"/>
-            <a:ext cx="1045200" cy="342900"/>
-          </a:xfrm>
-          <a:prstGeom prst="rect">
-            <a:avLst/>
-          </a:prstGeom>
-          <a:solidFill>
-            <a:schemeClr val="lt2"/>
-          </a:solidFill>
-          <a:ln cap="flat" cmpd="sng" w="9525">
-            <a:solidFill>
-              <a:schemeClr val="dk2"/>
-            </a:solidFill>
-            <a:prstDash val="solid"/>
-            <a:round/>
-            <a:headEnd len="sm" w="sm" type="none"/>
-            <a:tailEnd len="sm" w="sm" type="none"/>
-          </a:ln>
-        </p:spPr>
-        <p:txBody>
-          <a:bodyPr anchorCtr="0" anchor="ctr" bIns="91425" lIns="91425" spcFirstLastPara="1" rIns="91425" wrap="square" tIns="91425">
-            <a:noAutofit/>
-          </a:bodyPr>
-          <a:lstStyle/>
-          <a:p>
-            <a:pPr indent="0" lvl="0" marL="0" rtl="0" algn="ctr">
-              <a:spcBef>
-                <a:spcPts val="0"/>
-              </a:spcBef>
-              <a:spcAft>
-                <a:spcPts val="0"/>
-              </a:spcAft>
-              <a:buNone/>
-            </a:pPr>
-            <a:r>
-              <a:rPr lang="en"/>
-              <a:t>g2=log(g1)</a:t>
-            </a:r>
-            <a:endParaRPr/>
-          </a:p>
-        </p:txBody>
-      </p:sp>
-      <p:sp>
-        <p:nvSpPr>
-          <p:cNvPr id="161" name="Google Shape;161;p23"/>
-          <p:cNvSpPr/>
-          <p:nvPr/>
-        </p:nvSpPr>
-        <p:spPr>
-          <a:xfrm>
-            <a:off x="6053714" y="1869025"/>
-            <a:ext cx="916200" cy="342900"/>
-          </a:xfrm>
-          <a:prstGeom prst="rect">
-            <a:avLst/>
-          </a:prstGeom>
-          <a:solidFill>
-            <a:schemeClr val="lt2"/>
-          </a:solidFill>
-          <a:ln cap="flat" cmpd="sng" w="9525">
-            <a:solidFill>
-              <a:schemeClr val="dk2"/>
-            </a:solidFill>
-            <a:prstDash val="solid"/>
-            <a:round/>
-            <a:headEnd len="sm" w="sm" type="none"/>
-            <a:tailEnd len="sm" w="sm" type="none"/>
-          </a:ln>
-        </p:spPr>
-        <p:txBody>
-          <a:bodyPr anchorCtr="0" anchor="ctr" bIns="91425" lIns="91425" spcFirstLastPara="1" rIns="91425" wrap="square" tIns="91425">
-            <a:noAutofit/>
-          </a:bodyPr>
-          <a:lstStyle/>
-          <a:p>
-            <a:pPr indent="0" lvl="0" marL="0" rtl="0" algn="ctr">
-              <a:spcBef>
-                <a:spcPts val="0"/>
-              </a:spcBef>
-              <a:spcAft>
-                <a:spcPts val="0"/>
-              </a:spcAft>
-              <a:buNone/>
-            </a:pPr>
-            <a:r>
-              <a:rPr lang="en"/>
-              <a:t>h=f3/g2</a:t>
-            </a:r>
-            <a:endParaRPr/>
-          </a:p>
-        </p:txBody>
-      </p:sp>
-      <p:cxnSp>
-        <p:nvCxnSpPr>
-          <p:cNvPr id="162" name="Google Shape;162;p23"/>
-          <p:cNvCxnSpPr>
-            <a:stCxn id="157" idx="3"/>
-            <a:endCxn id="158" idx="1"/>
-          </p:cNvCxnSpPr>
-          <p:nvPr/>
-        </p:nvCxnSpPr>
-        <p:spPr>
-          <a:xfrm flipH="1" rot="10800000">
-            <a:off x="1595014" y="1558575"/>
-            <a:ext cx="461100" cy="404700"/>
-          </a:xfrm>
-          <a:prstGeom prst="straightConnector1">
-            <a:avLst/>
-          </a:prstGeom>
-          <a:noFill/>
-          <a:ln cap="flat" cmpd="sng" w="9525">
-            <a:solidFill>
-              <a:schemeClr val="dk2"/>
-            </a:solidFill>
-            <a:prstDash val="solid"/>
-            <a:round/>
-            <a:headEnd len="med" w="med" type="none"/>
-            <a:tailEnd len="med" w="med" type="triangle"/>
-          </a:ln>
-        </p:spPr>
-      </p:cxnSp>
-      <p:cxnSp>
-        <p:nvCxnSpPr>
-          <p:cNvPr id="163" name="Google Shape;163;p23"/>
-          <p:cNvCxnSpPr>
-            <a:stCxn id="157" idx="3"/>
-            <a:endCxn id="159" idx="1"/>
-          </p:cNvCxnSpPr>
-          <p:nvPr/>
-        </p:nvCxnSpPr>
-        <p:spPr>
-          <a:xfrm>
-            <a:off x="1595014" y="1963275"/>
-            <a:ext cx="461100" cy="407700"/>
-          </a:xfrm>
-          <a:prstGeom prst="straightConnector1">
-            <a:avLst/>
-          </a:prstGeom>
-          <a:noFill/>
-          <a:ln cap="flat" cmpd="sng" w="9525">
-            <a:solidFill>
-              <a:schemeClr val="dk2"/>
-            </a:solidFill>
-            <a:prstDash val="solid"/>
-            <a:round/>
-            <a:headEnd len="med" w="med" type="none"/>
-            <a:tailEnd len="med" w="med" type="triangle"/>
-          </a:ln>
-        </p:spPr>
-      </p:cxnSp>
-      <p:cxnSp>
-        <p:nvCxnSpPr>
-          <p:cNvPr id="164" name="Google Shape;164;p23"/>
-          <p:cNvCxnSpPr>
-            <a:stCxn id="158" idx="3"/>
-            <a:endCxn id="165" idx="1"/>
-          </p:cNvCxnSpPr>
-          <p:nvPr/>
-        </p:nvCxnSpPr>
-        <p:spPr>
-          <a:xfrm>
-            <a:off x="2828914" y="1558450"/>
-            <a:ext cx="475800" cy="0"/>
-          </a:xfrm>
-          <a:prstGeom prst="straightConnector1">
-            <a:avLst/>
-          </a:prstGeom>
-          <a:noFill/>
-          <a:ln cap="flat" cmpd="sng" w="9525">
-            <a:solidFill>
-              <a:schemeClr val="dk2"/>
-            </a:solidFill>
-            <a:prstDash val="solid"/>
-            <a:round/>
-            <a:headEnd len="med" w="med" type="none"/>
-            <a:tailEnd len="med" w="med" type="triangle"/>
-          </a:ln>
-        </p:spPr>
-      </p:cxnSp>
-      <p:cxnSp>
-        <p:nvCxnSpPr>
-          <p:cNvPr id="166" name="Google Shape;166;p23"/>
-          <p:cNvCxnSpPr>
-            <a:stCxn id="159" idx="3"/>
-            <a:endCxn id="160" idx="1"/>
-          </p:cNvCxnSpPr>
-          <p:nvPr/>
-        </p:nvCxnSpPr>
-        <p:spPr>
-          <a:xfrm>
-            <a:off x="2828914" y="2370925"/>
-            <a:ext cx="1521600" cy="0"/>
-          </a:xfrm>
-          <a:prstGeom prst="straightConnector1">
-            <a:avLst/>
-          </a:prstGeom>
-          <a:noFill/>
-          <a:ln cap="flat" cmpd="sng" w="9525">
-            <a:solidFill>
-              <a:schemeClr val="dk2"/>
-            </a:solidFill>
-            <a:prstDash val="solid"/>
-            <a:round/>
-            <a:headEnd len="med" w="med" type="none"/>
-            <a:tailEnd len="med" w="med" type="triangle"/>
-          </a:ln>
-        </p:spPr>
-      </p:cxnSp>
-      <p:cxnSp>
-        <p:nvCxnSpPr>
-          <p:cNvPr id="167" name="Google Shape;167;p23"/>
-          <p:cNvCxnSpPr>
-            <a:stCxn id="160" idx="3"/>
-            <a:endCxn id="161" idx="1"/>
-          </p:cNvCxnSpPr>
-          <p:nvPr/>
-        </p:nvCxnSpPr>
-        <p:spPr>
-          <a:xfrm flipH="1" rot="10800000">
-            <a:off x="5395839" y="2040625"/>
-            <a:ext cx="657900" cy="330300"/>
-          </a:xfrm>
-          <a:prstGeom prst="straightConnector1">
-            <a:avLst/>
-          </a:prstGeom>
-          <a:noFill/>
-          <a:ln cap="flat" cmpd="sng" w="9525">
-            <a:solidFill>
-              <a:schemeClr val="dk2"/>
-            </a:solidFill>
-            <a:prstDash val="solid"/>
-            <a:round/>
-            <a:headEnd len="med" w="med" type="none"/>
-            <a:tailEnd len="med" w="med" type="triangle"/>
-          </a:ln>
-        </p:spPr>
-      </p:cxnSp>
-      <p:sp>
-        <p:nvSpPr>
-          <p:cNvPr id="165" name="Google Shape;165;p23"/>
-          <p:cNvSpPr/>
-          <p:nvPr/>
-        </p:nvSpPr>
-        <p:spPr>
-          <a:xfrm>
-            <a:off x="3304639" y="1387000"/>
-            <a:ext cx="772800" cy="342900"/>
-          </a:xfrm>
-          <a:prstGeom prst="rect">
-            <a:avLst/>
-          </a:prstGeom>
-          <a:solidFill>
-            <a:schemeClr val="lt2"/>
-          </a:solidFill>
-          <a:ln cap="flat" cmpd="sng" w="9525">
-            <a:solidFill>
-              <a:schemeClr val="dk2"/>
-            </a:solidFill>
-            <a:prstDash val="solid"/>
-            <a:round/>
-            <a:headEnd len="sm" w="sm" type="none"/>
-            <a:tailEnd len="sm" w="sm" type="none"/>
-          </a:ln>
-        </p:spPr>
-        <p:txBody>
-          <a:bodyPr anchorCtr="0" anchor="ctr" bIns="91425" lIns="91425" spcFirstLastPara="1" rIns="91425" wrap="square" tIns="91425">
-            <a:noAutofit/>
-          </a:bodyPr>
-          <a:lstStyle/>
-          <a:p>
-            <a:pPr indent="0" lvl="0" marL="0" rtl="0" algn="ctr">
-              <a:spcBef>
-                <a:spcPts val="0"/>
-              </a:spcBef>
-              <a:spcAft>
-                <a:spcPts val="0"/>
-              </a:spcAft>
-              <a:buNone/>
-            </a:pPr>
-            <a:r>
-              <a:rPr lang="en"/>
-              <a:t>f2=(+)</a:t>
-            </a:r>
-            <a:endParaRPr/>
-          </a:p>
-        </p:txBody>
-      </p:sp>
-      <p:sp>
-        <p:nvSpPr>
-          <p:cNvPr id="168" name="Google Shape;168;p23"/>
-          <p:cNvSpPr/>
-          <p:nvPr/>
-        </p:nvSpPr>
-        <p:spPr>
-          <a:xfrm>
-            <a:off x="4401164" y="1387000"/>
-            <a:ext cx="967500" cy="342900"/>
-          </a:xfrm>
-          <a:prstGeom prst="rect">
-            <a:avLst/>
-          </a:prstGeom>
-          <a:solidFill>
-            <a:schemeClr val="lt2"/>
-          </a:solidFill>
-          <a:ln cap="flat" cmpd="sng" w="9525">
-            <a:solidFill>
-              <a:schemeClr val="dk2"/>
-            </a:solidFill>
-            <a:prstDash val="solid"/>
-            <a:round/>
-            <a:headEnd len="sm" w="sm" type="none"/>
-            <a:tailEnd len="sm" w="sm" type="none"/>
-          </a:ln>
-        </p:spPr>
-        <p:txBody>
-          <a:bodyPr anchorCtr="0" anchor="ctr" bIns="91425" lIns="91425" spcFirstLastPara="1" rIns="91425" wrap="square" tIns="91425">
-            <a:noAutofit/>
-          </a:bodyPr>
-          <a:lstStyle/>
-          <a:p>
-            <a:pPr indent="0" lvl="0" marL="0" rtl="0" algn="ctr">
-              <a:spcBef>
-                <a:spcPts val="0"/>
-              </a:spcBef>
-              <a:spcAft>
-                <a:spcPts val="0"/>
-              </a:spcAft>
-              <a:buNone/>
-            </a:pPr>
-            <a:r>
-              <a:rPr lang="en"/>
-              <a:t>f3=sin(f2)</a:t>
-            </a:r>
-            <a:endParaRPr/>
-          </a:p>
-        </p:txBody>
-      </p:sp>
-      <p:cxnSp>
-        <p:nvCxnSpPr>
-          <p:cNvPr id="169" name="Google Shape;169;p23"/>
-          <p:cNvCxnSpPr>
-            <a:stCxn id="165" idx="3"/>
-            <a:endCxn id="168" idx="1"/>
-          </p:cNvCxnSpPr>
-          <p:nvPr/>
-        </p:nvCxnSpPr>
-        <p:spPr>
-          <a:xfrm>
-            <a:off x="4077439" y="1558450"/>
-            <a:ext cx="323700" cy="0"/>
-          </a:xfrm>
-          <a:prstGeom prst="straightConnector1">
-            <a:avLst/>
-          </a:prstGeom>
-          <a:noFill/>
-          <a:ln cap="flat" cmpd="sng" w="9525">
-            <a:solidFill>
-              <a:schemeClr val="dk2"/>
-            </a:solidFill>
-            <a:prstDash val="solid"/>
-            <a:round/>
-            <a:headEnd len="med" w="med" type="none"/>
-            <a:tailEnd len="med" w="med" type="triangle"/>
-          </a:ln>
-        </p:spPr>
-      </p:cxnSp>
-      <p:cxnSp>
-        <p:nvCxnSpPr>
-          <p:cNvPr id="170" name="Google Shape;170;p23"/>
-          <p:cNvCxnSpPr>
-            <a:stCxn id="168" idx="3"/>
-            <a:endCxn id="161" idx="1"/>
-          </p:cNvCxnSpPr>
-          <p:nvPr/>
-        </p:nvCxnSpPr>
-        <p:spPr>
-          <a:xfrm>
-            <a:off x="5368664" y="1558450"/>
-            <a:ext cx="685200" cy="482100"/>
-          </a:xfrm>
-          <a:prstGeom prst="straightConnector1">
-            <a:avLst/>
-          </a:prstGeom>
-          <a:noFill/>
-          <a:ln cap="flat" cmpd="sng" w="9525">
-            <a:solidFill>
-              <a:schemeClr val="dk2"/>
-            </a:solidFill>
-            <a:prstDash val="solid"/>
-            <a:round/>
-            <a:headEnd len="med" w="med" type="none"/>
-            <a:tailEnd len="med" w="med" type="triangle"/>
-          </a:ln>
-        </p:spPr>
-      </p:cxnSp>
-      <p:cxnSp>
-        <p:nvCxnSpPr>
-          <p:cNvPr id="171" name="Google Shape;171;p23"/>
-          <p:cNvCxnSpPr>
-            <a:stCxn id="159" idx="3"/>
-            <a:endCxn id="165" idx="1"/>
-          </p:cNvCxnSpPr>
-          <p:nvPr/>
-        </p:nvCxnSpPr>
-        <p:spPr>
-          <a:xfrm flipH="1" rot="10800000">
-            <a:off x="2828914" y="1558525"/>
-            <a:ext cx="475800" cy="812400"/>
-          </a:xfrm>
-          <a:prstGeom prst="straightConnector1">
-            <a:avLst/>
-          </a:prstGeom>
-          <a:noFill/>
-          <a:ln cap="flat" cmpd="sng" w="9525">
-            <a:solidFill>
-              <a:schemeClr val="dk2"/>
-            </a:solidFill>
-            <a:prstDash val="solid"/>
-            <a:round/>
-            <a:headEnd len="med" w="med" type="none"/>
-            <a:tailEnd len="med" w="med" type="triangle"/>
-          </a:ln>
-        </p:spPr>
-      </p:cxnSp>
-      <p:cxnSp>
-        <p:nvCxnSpPr>
-          <p:cNvPr id="172" name="Google Shape;172;p23"/>
-          <p:cNvCxnSpPr>
-            <a:stCxn id="161" idx="3"/>
-            <a:endCxn id="173" idx="1"/>
-          </p:cNvCxnSpPr>
-          <p:nvPr/>
-        </p:nvCxnSpPr>
-        <p:spPr>
-          <a:xfrm>
-            <a:off x="6969914" y="2040475"/>
-            <a:ext cx="529500" cy="0"/>
-          </a:xfrm>
-          <a:prstGeom prst="straightConnector1">
-            <a:avLst/>
-          </a:prstGeom>
-          <a:noFill/>
-          <a:ln cap="flat" cmpd="sng" w="9525">
-            <a:solidFill>
-              <a:schemeClr val="dk2"/>
-            </a:solidFill>
-            <a:prstDash val="solid"/>
-            <a:round/>
-            <a:headEnd len="med" w="med" type="none"/>
-            <a:tailEnd len="med" w="med" type="triangle"/>
-          </a:ln>
-        </p:spPr>
-      </p:cxnSp>
-      <p:sp>
-        <p:nvSpPr>
-          <p:cNvPr id="173" name="Google Shape;173;p23"/>
-          <p:cNvSpPr/>
-          <p:nvPr/>
-        </p:nvSpPr>
-        <p:spPr>
-          <a:xfrm>
-            <a:off x="7499512" y="1869025"/>
-            <a:ext cx="437100" cy="342900"/>
-          </a:xfrm>
-          <a:prstGeom prst="rect">
-            <a:avLst/>
-          </a:prstGeom>
-          <a:solidFill>
-            <a:schemeClr val="lt2"/>
-          </a:solidFill>
-          <a:ln cap="flat" cmpd="sng" w="9525">
-            <a:solidFill>
-              <a:schemeClr val="dk2"/>
-            </a:solidFill>
-            <a:prstDash val="solid"/>
-            <a:round/>
-            <a:headEnd len="sm" w="sm" type="none"/>
-            <a:tailEnd len="sm" w="sm" type="none"/>
-          </a:ln>
-        </p:spPr>
-        <p:txBody>
-          <a:bodyPr anchorCtr="0" anchor="ctr" bIns="91425" lIns="91425" spcFirstLastPara="1" rIns="91425" wrap="square" tIns="91425">
-            <a:noAutofit/>
-          </a:bodyPr>
-          <a:lstStyle/>
-          <a:p>
-            <a:pPr indent="0" lvl="0" marL="0" rtl="0" algn="ctr">
-              <a:spcBef>
-                <a:spcPts val="0"/>
-              </a:spcBef>
-              <a:spcAft>
-                <a:spcPts val="0"/>
-              </a:spcAft>
-              <a:buNone/>
-            </a:pPr>
-            <a:r>
-              <a:rPr lang="en"/>
-              <a:t>y</a:t>
-            </a:r>
-            <a:endParaRPr/>
-          </a:p>
-        </p:txBody>
-      </p:sp>
       <p:pic>
         <p:nvPicPr>
-          <p:cNvPr descr="{&quot;type&quot;:&quot;lalign*&quot;,&quot;code&quot;:&quot;\\begin{lalign*}\n&amp;{h\\,=\\,\\frac{\\sin \\left(x^{2}+1/x\\right)}{\\log_{}\\left(1/x\\right)}}\\\\\n&amp;{\\diff{h}{g_{2}}=-\\frac{f_{3}}{g_{2}^{2}},\\diff{h}{f_{3}}=\\frac{1}{g_{2}}}\\\\\n&amp;{\\diff{f_{3}}{f_{2}}=\\cos\\left(f_{2}\\right),\\,\\diff{g_{2}}{g_{1}}=1/g_{1}}\\\\\n&amp;{\\diff{h}{f_{2}}=\\diff{h}{f_{3}}\\diff{f_{3}}{f_{2}}=\\frac{\\cos\\left(f_{2}\\right)}{g_{2}}}\\\\\n&amp;{\\diff{f2}{g1}=1,\\,\\diff{f2}{f1}=1}\\\\\n&amp;{\\diff{h}{g_{1}}=\\diff{h}{f_{2}}+\\diff{h}{g_{2}}\\diff{g_{2}}{g_{1}}=\\frac{\\cos\\left(f_{2}\\right)}{g_{2}}-\\frac{f_{3}}{g_{2}^{2}g_{1}}}\\\\\n&amp;{\\diff{h}{f_{1}}=\\diff{h}{f_{2}}\\diff{f_{2}}{f_{1}}=\\frac{\\cos\\left(f_{2}\\right)}{g_{2}}}\\\\\n&amp;{\\diff{h}{x}=\\diff{h}{f_{1}}\\diff{f_{1}}{x}+\\diff{h}{g_{1}}\\diff{g_{1}}{x}=\\frac{\\cos\\left(f_{2}\\right)}{g_{2}}2x-\\frac{1}{x^{2}}\\left(\\frac{\\cos\\left(f_{2}\\right)}{g_{2}}-\\frac{f_{3}}{g_{2}^{2}g_{1}}\\right)}\t\n\\end{lalign*}&quot;,&quot;font&quot;:{&quot;size&quot;:8,&quot;color&quot;:&quot;#000000&quot;,&quot;family&quot;:&quot;Arial&quot;},&quot;id&quot;:&quot;12&quot;,&quot;backgroundColorModified&quot;:false,&quot;aid&quot;:null,&quot;backgroundColor&quot;:&quot;#FFFFFF&quot;,&quot;ts&quot;:1759686743747,&quot;cs&quot;:&quot;qlO9+GnZHHpVzfDG/R5v7w==&quot;,&quot;size&quot;:{&quot;width&quot;:380.8134215223096,&quot;height&quot;:288.7612598425197}}" id="174" name="Google Shape;174;p23"/>
+          <p:cNvPr descr="{&quot;font&quot;:{&quot;size&quot;:11,&quot;color&quot;:&quot;#000000&quot;,&quot;family&quot;:&quot;Arial&quot;},&quot;id&quot;:&quot;15&quot;,&quot;backgroundColor&quot;:&quot;#FFFFFF&quot;,&quot;aid&quot;:null,&quot;backgroundColorModified&quot;:false,&quot;type&quot;:&quot;lalign*&quot;,&quot;code&quot;:&quot;\\begin{lalign*}\n&amp;{\\text{if}\\;f\\left(x\\right)=\\begin{pmatrix}\n{x}\\\\\n{y}\\\\\n\\end{pmatrix}}\\\\\n&amp;{\\text{Denoting}\\;\\pdf{f}{y}\\pdf{f}{x}\\to f_{yx},\\,\\pdf{f}{x}\\pdf{f}{x}\\to f_{xx}\\,etc}\\\\\n&amp;{\\text{And}\\,\\frac{\\dd ^{2}f}{dx^{2}}=H=\\begin{pmatrix}\n{f_{xx}}&amp;{f_{xy}}\\\\\n{f_{yx}}&amp;{f_{yy}}\\\\\n\\end{pmatrix}}\\\\\n&amp;{\\text{Let}\\;D_{xy\\,}=f_{xx}f_{yy}-f_{xy}f_{yx}}\\\\\n&amp;{\\text{if}\\;D_{xy}&gt;0\\,\\text{and}\\;f_{xx}&gt;0,\\,\\text{local}\\;\\text{minimum}}\\\\\n&amp;{\\text{if}\\;D_{xy}&gt;0\\,\\text{and}\\;f_{xx}&lt;0,\\,\\text{local}\\;\\text{maximum}}\\\\\n&amp;{\\text{if}\\;D_{xy}&lt;0,\\,\\text{saddle}\\;\\text{point}}\\\\\n&amp;{\\text{if}\\;D_{xy}=0,\\,\\text{inconclusive}}\t\n\\end{lalign*}&quot;,&quot;ts&quot;:1761614215153,&quot;cs&quot;:&quot;rtV5Dma8PBgM8/sR7wAl/g==&quot;,&quot;size&quot;:{&quot;width&quot;:316.49999999999994,&quot;height&quot;:249.75}}" id="138" name="Google Shape;138;p23"/>
           <p:cNvPicPr preferRelativeResize="0"/>
           <p:nvPr/>
         </p:nvPicPr>
@@ -8164,8 +7853,8 @@
         </p:blipFill>
         <p:spPr>
           <a:xfrm>
-            <a:off x="266025" y="2370921"/>
-            <a:ext cx="3627248" cy="2750451"/>
+            <a:off x="509704" y="1771849"/>
+            <a:ext cx="3014662" cy="2378869"/>
           </a:xfrm>
           <a:prstGeom prst="rect">
             <a:avLst/>
@@ -8176,16 +7865,24 @@
           </a:ln>
         </p:spPr>
       </p:pic>
-      <p:sp>
-        <p:nvSpPr>
-          <p:cNvPr id="175" name="Google Shape;175;p23"/>
-          <p:cNvSpPr txBox="1"/>
+      <p:pic>
+        <p:nvPicPr>
+          <p:cNvPr descr="{&quot;aid&quot;:null,&quot;code&quot;:&quot;\\begin{gather*}\n{\\text{Example:}}\\\\\n{\\text{Let}\\;f\\left(x,y\\right)=x^{2}+y^{2}}\\\\\n{\\pdf{f}{x}=2x,\\,\\pdf{f}{y}=2y}\\\\\n{\\pdf{f}{y}\\pdf{f}{x}=0,\\,\\pdf{f}{x}\\pdf{f}{y}=0}\\\\\n{\\pdf{f}{x}\\pdf{f}{x}=2,\\,\\pdf{f}{y}\\pdf{f}{y}=2}\\\\\n{\\text{so,}}\\\\\n{H=\\begin{pmatrix}\n{2}&amp;{0}\\\\\n{0}&amp;{2}\\\\\n\\end{pmatrix}}\\\\\n{D=4,\\,f_{xx}&gt;0..\\,\\left(0,0\\right)\\,\\text{is}\\;\\text{local}\\;\\text{(also}\\;\\text{global)}\\;\\text{miminum}}\\\\\n{\\text{Let}\\;f\\left(x,y\\right)=x^{2}-y^{2}}\\\\\n{H=\\begin{pmatrix}\n{2}&amp;{0}\\\\\n{0}&amp;{-2}\\\\\n\\end{pmatrix},\\,D=-4..\\,\\left(0,0\\right)\\,\\text{is}\\;\\text{a}\\;\\text{saddle}\\;\\text{point}}\t\n\\end{gather*}&quot;,&quot;backgroundColor&quot;:&quot;#FFFFFF&quot;,&quot;type&quot;:&quot;gather*&quot;,&quot;backgroundColorModified&quot;:false,&quot;font&quot;:{&quot;size&quot;:12,&quot;color&quot;:&quot;#000000&quot;,&quot;family&quot;:&quot;Arial&quot;},&quot;id&quot;:&quot;16&quot;,&quot;ts&quot;:1759977025984,&quot;cs&quot;:&quot;wKlhEdU55JcnYfI6XlLb+w==&quot;,&quot;size&quot;:{&quot;width&quot;:427,&quot;height&quot;:367.3333333333333}}" id="139" name="Google Shape;139;p23"/>
+          <p:cNvPicPr preferRelativeResize="0"/>
           <p:nvPr/>
-        </p:nvSpPr>
-        <p:spPr>
-          <a:xfrm>
-            <a:off x="2568626" y="3183400"/>
-            <a:ext cx="5021100" cy="384900"/>
+        </p:nvPicPr>
+        <p:blipFill>
+          <a:blip r:embed="rId4">
+            <a:alphaModFix/>
+          </a:blip>
+          <a:stretch>
+            <a:fillRect/>
+          </a:stretch>
+        </p:blipFill>
+        <p:spPr>
+          <a:xfrm>
+            <a:off x="4005438" y="1166300"/>
+            <a:ext cx="4067175" cy="3498850"/>
           </a:xfrm>
           <a:prstGeom prst="rect">
             <a:avLst/>
@@ -8195,137 +7892,7 @@
             <a:noFill/>
           </a:ln>
         </p:spPr>
-        <p:txBody>
-          <a:bodyPr anchorCtr="0" anchor="t" bIns="91425" lIns="91425" spcFirstLastPara="1" rIns="91425" wrap="square" tIns="91425">
-            <a:spAutoFit/>
-          </a:bodyPr>
-          <a:lstStyle/>
-          <a:p>
-            <a:pPr indent="0" lvl="0" marL="0" rtl="0" algn="l">
-              <a:spcBef>
-                <a:spcPts val="0"/>
-              </a:spcBef>
-              <a:spcAft>
-                <a:spcPts val="0"/>
-              </a:spcAft>
-              <a:buNone/>
-            </a:pPr>
-            <a:r>
-              <a:rPr lang="en" sz="1300">
-                <a:solidFill>
-                  <a:schemeClr val="dk2"/>
-                </a:solidFill>
-              </a:rPr>
-              <a:t>This is the interesting part! </a:t>
-            </a:r>
-            <a:r>
-              <a:rPr lang="en" sz="1300">
-                <a:solidFill>
-                  <a:schemeClr val="dk2"/>
-                </a:solidFill>
-              </a:rPr>
-              <a:t>g</a:t>
-            </a:r>
-            <a:r>
-              <a:rPr lang="en" sz="1300">
-                <a:solidFill>
-                  <a:schemeClr val="dk2"/>
-                </a:solidFill>
-              </a:rPr>
-              <a:t>1 gets gradients from f2 and g2</a:t>
-            </a:r>
-            <a:endParaRPr sz="1300">
-              <a:solidFill>
-                <a:schemeClr val="dk2"/>
-              </a:solidFill>
-            </a:endParaRPr>
-          </a:p>
-        </p:txBody>
-      </p:sp>
-      <p:cxnSp>
-        <p:nvCxnSpPr>
-          <p:cNvPr id="176" name="Google Shape;176;p23"/>
-          <p:cNvCxnSpPr/>
-          <p:nvPr/>
-        </p:nvCxnSpPr>
-        <p:spPr>
-          <a:xfrm flipH="1">
-            <a:off x="1557389" y="3452600"/>
-            <a:ext cx="1051800" cy="578100"/>
-          </a:xfrm>
-          <a:prstGeom prst="straightConnector1">
-            <a:avLst/>
-          </a:prstGeom>
-          <a:noFill/>
-          <a:ln cap="flat" cmpd="sng" w="9525">
-            <a:solidFill>
-              <a:schemeClr val="dk2"/>
-            </a:solidFill>
-            <a:prstDash val="solid"/>
-            <a:round/>
-            <a:headEnd len="med" w="med" type="none"/>
-            <a:tailEnd len="med" w="med" type="triangle"/>
-          </a:ln>
-        </p:spPr>
-      </p:cxnSp>
-      <p:sp>
-        <p:nvSpPr>
-          <p:cNvPr id="177" name="Google Shape;177;p23"/>
-          <p:cNvSpPr txBox="1"/>
-          <p:nvPr/>
-        </p:nvSpPr>
-        <p:spPr>
-          <a:xfrm>
-            <a:off x="4401150" y="4752075"/>
-            <a:ext cx="2780100" cy="369300"/>
-          </a:xfrm>
-          <a:prstGeom prst="rect">
-            <a:avLst/>
-          </a:prstGeom>
-          <a:noFill/>
-          <a:ln>
-            <a:noFill/>
-          </a:ln>
-        </p:spPr>
-        <p:txBody>
-          <a:bodyPr anchorCtr="0" anchor="t" bIns="91425" lIns="91425" spcFirstLastPara="1" rIns="91425" wrap="square" tIns="91425">
-            <a:spAutoFit/>
-          </a:bodyPr>
-          <a:lstStyle/>
-          <a:p>
-            <a:pPr indent="0" lvl="0" marL="0" rtl="0" algn="l">
-              <a:spcBef>
-                <a:spcPts val="0"/>
-              </a:spcBef>
-              <a:spcAft>
-                <a:spcPts val="0"/>
-              </a:spcAft>
-              <a:buNone/>
-            </a:pPr>
-            <a:r>
-              <a:rPr lang="en" sz="1200">
-                <a:solidFill>
-                  <a:schemeClr val="dk2"/>
-                </a:solidFill>
-              </a:rPr>
-              <a:t>chain_rule</a:t>
-            </a:r>
-            <a:r>
-              <a:rPr lang="en" sz="1200">
-                <a:solidFill>
-                  <a:schemeClr val="dk2"/>
-                </a:solidFill>
-              </a:rPr>
-              <a:t>.py</a:t>
-            </a:r>
-            <a:endParaRPr sz="1200">
-              <a:solidFill>
-                <a:schemeClr val="dk2"/>
-              </a:solidFill>
-            </a:endParaRPr>
-          </a:p>
-        </p:txBody>
-      </p:sp>
+      </p:pic>
     </p:spTree>
   </p:cSld>
   <p:clrMapOvr>
@@ -8339,7 +7906,7 @@
   <p:cSld>
     <p:spTree>
       <p:nvGrpSpPr>
-        <p:cNvPr id="181" name="Shape 181"/>
+        <p:cNvPr id="143" name="Shape 143"/>
         <p:cNvGrpSpPr/>
         <p:nvPr/>
       </p:nvGrpSpPr>
@@ -8353,7 +7920,7 @@
       </p:grpSpPr>
       <p:sp>
         <p:nvSpPr>
-          <p:cNvPr id="182" name="Google Shape;182;p24"/>
+          <p:cNvPr id="144" name="Google Shape;144;p24"/>
           <p:cNvSpPr txBox="1"/>
           <p:nvPr>
             <p:ph idx="4294967295" type="title"/>
@@ -8393,13 +7960,13 @@
       </p:sp>
       <p:sp>
         <p:nvSpPr>
-          <p:cNvPr id="183" name="Google Shape;183;p24"/>
+          <p:cNvPr id="145" name="Google Shape;145;p24"/>
           <p:cNvSpPr txBox="1"/>
           <p:nvPr/>
         </p:nvSpPr>
         <p:spPr>
           <a:xfrm>
-            <a:off x="1564170" y="1650035"/>
+            <a:off x="369775" y="1162825"/>
             <a:ext cx="6747300" cy="738900"/>
           </a:xfrm>
           <a:prstGeom prst="rect">
@@ -8457,13 +8024,13 @@
       </p:sp>
       <p:sp>
         <p:nvSpPr>
-          <p:cNvPr id="184" name="Google Shape;184;p24"/>
+          <p:cNvPr id="146" name="Google Shape;146;p24"/>
           <p:cNvSpPr txBox="1"/>
           <p:nvPr/>
         </p:nvSpPr>
         <p:spPr>
           <a:xfrm>
-            <a:off x="385025" y="1037588"/>
+            <a:off x="174475" y="3039113"/>
             <a:ext cx="7137900" cy="585000"/>
           </a:xfrm>
           <a:prstGeom prst="rect">
@@ -8495,7 +8062,7 @@
                   <a:schemeClr val="dk2"/>
                 </a:solidFill>
               </a:rPr>
-              <a:t>Multivariate case</a:t>
+              <a:t>    We can generalize this to multiple dimensions as follows:</a:t>
             </a:r>
             <a:endParaRPr sz="1300">
               <a:solidFill>
@@ -8526,13 +8093,13 @@
       </p:sp>
       <p:sp>
         <p:nvSpPr>
-          <p:cNvPr id="185" name="Google Shape;185;p24"/>
+          <p:cNvPr id="147" name="Google Shape;147;p24"/>
           <p:cNvSpPr/>
           <p:nvPr/>
         </p:nvSpPr>
         <p:spPr>
           <a:xfrm>
-            <a:off x="2296420" y="2122710"/>
+            <a:off x="982725" y="3977275"/>
             <a:ext cx="437100" cy="342900"/>
           </a:xfrm>
           <a:prstGeom prst="rect">
@@ -8576,13 +8143,13 @@
       </p:sp>
       <p:sp>
         <p:nvSpPr>
-          <p:cNvPr id="186" name="Google Shape;186;p24"/>
+          <p:cNvPr id="148" name="Google Shape;148;p24"/>
           <p:cNvSpPr/>
           <p:nvPr/>
         </p:nvSpPr>
         <p:spPr>
           <a:xfrm>
-            <a:off x="3286045" y="2122710"/>
+            <a:off x="1880925" y="3572450"/>
             <a:ext cx="542100" cy="342900"/>
           </a:xfrm>
           <a:prstGeom prst="rect">
@@ -8626,14 +8193,14 @@
       </p:sp>
       <p:sp>
         <p:nvSpPr>
-          <p:cNvPr id="187" name="Google Shape;187;p24"/>
+          <p:cNvPr id="149" name="Google Shape;149;p24"/>
           <p:cNvSpPr/>
           <p:nvPr/>
         </p:nvSpPr>
         <p:spPr>
           <a:xfrm>
-            <a:off x="3197670" y="2935185"/>
-            <a:ext cx="718800" cy="342900"/>
+            <a:off x="1880925" y="4384925"/>
+            <a:ext cx="542100" cy="342900"/>
           </a:xfrm>
           <a:prstGeom prst="rect">
             <a:avLst/>
@@ -8668,7 +8235,7 @@
             </a:pPr>
             <a:r>
               <a:rPr lang="en"/>
-              <a:t>g(x,y)</a:t>
+              <a:t>g(x)</a:t>
             </a:r>
             <a:endParaRPr/>
           </a:p>
@@ -8676,13 +8243,13 @@
       </p:sp>
       <p:sp>
         <p:nvSpPr>
-          <p:cNvPr id="188" name="Google Shape;188;p24"/>
+          <p:cNvPr id="150" name="Google Shape;150;p24"/>
           <p:cNvSpPr/>
           <p:nvPr/>
         </p:nvSpPr>
         <p:spPr>
           <a:xfrm>
-            <a:off x="4381420" y="2493335"/>
+            <a:off x="2976300" y="3943075"/>
             <a:ext cx="1238400" cy="342900"/>
           </a:xfrm>
           <a:prstGeom prst="rect">
@@ -8718,7 +8285,7 @@
             </a:pPr>
             <a:r>
               <a:rPr lang="en"/>
-              <a:t>h(f(x), g(x,y))</a:t>
+              <a:t>h(f(x), g(x))</a:t>
             </a:r>
             <a:endParaRPr/>
           </a:p>
@@ -8726,13 +8293,13 @@
       </p:sp>
       <p:sp>
         <p:nvSpPr>
-          <p:cNvPr id="189" name="Google Shape;189;p24"/>
+          <p:cNvPr id="151" name="Google Shape;151;p24"/>
           <p:cNvSpPr/>
           <p:nvPr/>
         </p:nvSpPr>
         <p:spPr>
           <a:xfrm>
-            <a:off x="6089245" y="2493335"/>
+            <a:off x="4684125" y="3943075"/>
             <a:ext cx="437100" cy="342900"/>
           </a:xfrm>
           <a:prstGeom prst="rect">
@@ -8776,17 +8343,17 @@
       </p:sp>
       <p:cxnSp>
         <p:nvCxnSpPr>
-          <p:cNvPr id="190" name="Google Shape;190;p24"/>
+          <p:cNvPr id="152" name="Google Shape;152;p24"/>
           <p:cNvCxnSpPr>
-            <a:stCxn id="185" idx="3"/>
-            <a:endCxn id="186" idx="1"/>
+            <a:stCxn id="147" idx="3"/>
+            <a:endCxn id="148" idx="1"/>
           </p:cNvCxnSpPr>
           <p:nvPr/>
         </p:nvCxnSpPr>
         <p:spPr>
-          <a:xfrm>
-            <a:off x="2733520" y="2294160"/>
-            <a:ext cx="552600" cy="0"/>
+          <a:xfrm flipH="1" rot="10800000">
+            <a:off x="1419825" y="3744025"/>
+            <a:ext cx="461100" cy="404700"/>
           </a:xfrm>
           <a:prstGeom prst="straightConnector1">
             <a:avLst/>
@@ -8805,17 +8372,17 @@
       </p:cxnSp>
       <p:cxnSp>
         <p:nvCxnSpPr>
-          <p:cNvPr id="191" name="Google Shape;191;p24"/>
+          <p:cNvPr id="153" name="Google Shape;153;p24"/>
           <p:cNvCxnSpPr>
-            <a:stCxn id="185" idx="3"/>
-            <a:endCxn id="187" idx="1"/>
+            <a:stCxn id="147" idx="3"/>
+            <a:endCxn id="149" idx="1"/>
           </p:cNvCxnSpPr>
           <p:nvPr/>
         </p:nvCxnSpPr>
         <p:spPr>
           <a:xfrm>
-            <a:off x="2733520" y="2294160"/>
-            <a:ext cx="464100" cy="812400"/>
+            <a:off x="1419825" y="4148725"/>
+            <a:ext cx="461100" cy="407700"/>
           </a:xfrm>
           <a:prstGeom prst="straightConnector1">
             <a:avLst/>
@@ -8834,15 +8401,15 @@
       </p:cxnSp>
       <p:cxnSp>
         <p:nvCxnSpPr>
-          <p:cNvPr id="192" name="Google Shape;192;p24"/>
+          <p:cNvPr id="154" name="Google Shape;154;p24"/>
           <p:cNvCxnSpPr>
-            <a:stCxn id="186" idx="3"/>
+            <a:stCxn id="148" idx="3"/>
           </p:cNvCxnSpPr>
           <p:nvPr/>
         </p:nvCxnSpPr>
         <p:spPr>
           <a:xfrm>
-            <a:off x="3828145" y="2294160"/>
+            <a:off x="2423025" y="3743900"/>
             <a:ext cx="553200" cy="365400"/>
           </a:xfrm>
           <a:prstGeom prst="straightConnector1">
@@ -8862,17 +8429,17 @@
       </p:cxnSp>
       <p:cxnSp>
         <p:nvCxnSpPr>
-          <p:cNvPr id="193" name="Google Shape;193;p24"/>
+          <p:cNvPr id="155" name="Google Shape;155;p24"/>
           <p:cNvCxnSpPr>
-            <a:stCxn id="187" idx="3"/>
-            <a:endCxn id="188" idx="1"/>
+            <a:stCxn id="149" idx="3"/>
+            <a:endCxn id="150" idx="1"/>
           </p:cNvCxnSpPr>
           <p:nvPr/>
         </p:nvCxnSpPr>
         <p:spPr>
           <a:xfrm flipH="1" rot="10800000">
-            <a:off x="3916470" y="2664735"/>
-            <a:ext cx="465000" cy="441900"/>
+            <a:off x="2423025" y="4114475"/>
+            <a:ext cx="553200" cy="441900"/>
           </a:xfrm>
           <a:prstGeom prst="straightConnector1">
             <a:avLst/>
@@ -8891,16 +8458,16 @@
       </p:cxnSp>
       <p:cxnSp>
         <p:nvCxnSpPr>
-          <p:cNvPr id="194" name="Google Shape;194;p24"/>
+          <p:cNvPr id="156" name="Google Shape;156;p24"/>
           <p:cNvCxnSpPr>
-            <a:stCxn id="188" idx="3"/>
-            <a:endCxn id="189" idx="1"/>
+            <a:stCxn id="150" idx="3"/>
+            <a:endCxn id="151" idx="1"/>
           </p:cNvCxnSpPr>
           <p:nvPr/>
         </p:nvCxnSpPr>
         <p:spPr>
           <a:xfrm>
-            <a:off x="5619820" y="2664785"/>
+            <a:off x="4214700" y="4114525"/>
             <a:ext cx="469500" cy="0"/>
           </a:xfrm>
           <a:prstGeom prst="straightConnector1">
@@ -8920,7 +8487,7 @@
       </p:cxnSp>
       <p:pic>
         <p:nvPicPr>
-          <p:cNvPr descr="{&quot;aid&quot;:null,&quot;font&quot;:{&quot;family&quot;:&quot;Arial&quot;,&quot;size&quot;:11.5,&quot;color&quot;:&quot;#000000&quot;},&quot;id&quot;:&quot;9&quot;,&quot;type&quot;:&quot;$$&quot;,&quot;backgroundColor&quot;:&quot;#FFFFFF&quot;,&quot;code&quot;:&quot;$$\\pdf{h}{y}=\\pdf{h}{g}\\pdf{g}{y}$$&quot;,&quot;backgroundColorModified&quot;:false,&quot;ts&quot;:1759687964827,&quot;cs&quot;:&quot;Qc8PJV17GmA9R5BlOgzUXQ==&quot;,&quot;size&quot;:{&quot;width&quot;:103.66666666666667,&quot;height&quot;:41.166666666666664}}" id="195" name="Google Shape;195;p24"/>
+          <p:cNvPr descr="{&quot;code&quot;:&quot;$$\\pdf{h}{f}$$&quot;,&quot;font&quot;:{&quot;family&quot;:&quot;Arial&quot;,&quot;size&quot;:14,&quot;color&quot;:&quot;#000000&quot;},&quot;backgroundColorModified&quot;:false,&quot;backgroundColor&quot;:&quot;#EEEEEE&quot;,&quot;aid&quot;:null,&quot;type&quot;:&quot;$$&quot;,&quot;id&quot;:&quot;8&quot;,&quot;ts&quot;:1759676254594,&quot;cs&quot;:&quot;ORmG5BsYHePJNC5t1yPhjA==&quot;,&quot;size&quot;:{&quot;width&quot;:29.666666666666668,&quot;height&quot;:50}}" id="157" name="Google Shape;157;p24"/>
           <p:cNvPicPr preferRelativeResize="0"/>
           <p:nvPr/>
         </p:nvPicPr>
@@ -8934,8 +8501,8 @@
         </p:blipFill>
         <p:spPr>
           <a:xfrm>
-            <a:off x="1150195" y="2910572"/>
-            <a:ext cx="987425" cy="392113"/>
+            <a:off x="2736175" y="3393425"/>
+            <a:ext cx="240122" cy="404700"/>
           </a:xfrm>
           <a:prstGeom prst="rect">
             <a:avLst/>
@@ -8948,7 +8515,7 @@
       </p:pic>
       <p:pic>
         <p:nvPicPr>
-          <p:cNvPr descr="{&quot;backgroundColor&quot;:&quot;#FFFFFF&quot;,&quot;code&quot;:&quot;$$\\pdf{g}{y}$$&quot;,&quot;id&quot;:&quot;11&quot;,&quot;backgroundColorModified&quot;:false,&quot;font&quot;:{&quot;family&quot;:&quot;Arial&quot;,&quot;size&quot;:10,&quot;color&quot;:&quot;#000000&quot;},&quot;type&quot;:&quot;$$&quot;,&quot;aid&quot;:null,&quot;ts&quot;:1759688055217,&quot;cs&quot;:&quot;7d3QjHgfedczDp+7xAJdCQ==&quot;,&quot;size&quot;:{&quot;width&quot;:19.91999999999999,&quot;height&quot;:36}}" id="196" name="Google Shape;196;p24"/>
+          <p:cNvPr descr="{&quot;aid&quot;:null,&quot;font&quot;:{&quot;color&quot;:&quot;#000000&quot;,&quot;size&quot;:14,&quot;family&quot;:&quot;Arial&quot;},&quot;backgroundColorModified&quot;:false,&quot;backgroundColor&quot;:&quot;#FFFFFF&quot;,&quot;type&quot;:&quot;$$&quot;,&quot;code&quot;:&quot;$$\\pdf{h}{g}$$&quot;,&quot;id&quot;:&quot;9&quot;,&quot;ts&quot;:1759676276679,&quot;cs&quot;:&quot;EjUf1W/u9vfVIoywd6dHiQ==&quot;,&quot;size&quot;:{&quot;width&quot;:29.666666666666668,&quot;height&quot;:50}}" id="158" name="Google Shape;158;p24"/>
           <p:cNvPicPr preferRelativeResize="0"/>
           <p:nvPr/>
         </p:nvPicPr>
@@ -8962,8 +8529,8 @@
         </p:blipFill>
         <p:spPr>
           <a:xfrm>
-            <a:off x="2870723" y="3208655"/>
-            <a:ext cx="189738" cy="342900"/>
+            <a:off x="2781475" y="4405525"/>
+            <a:ext cx="240125" cy="404705"/>
           </a:xfrm>
           <a:prstGeom prst="rect">
             <a:avLst/>
@@ -8974,88 +8541,9 @@
           </a:ln>
         </p:spPr>
       </p:pic>
-      <p:sp>
-        <p:nvSpPr>
-          <p:cNvPr id="197" name="Google Shape;197;p24"/>
-          <p:cNvSpPr/>
-          <p:nvPr/>
-        </p:nvSpPr>
-        <p:spPr>
-          <a:xfrm>
-            <a:off x="2296420" y="2935185"/>
-            <a:ext cx="437100" cy="342900"/>
-          </a:xfrm>
-          <a:prstGeom prst="rect">
-            <a:avLst/>
-          </a:prstGeom>
-          <a:solidFill>
-            <a:schemeClr val="lt2"/>
-          </a:solidFill>
-          <a:ln cap="flat" cmpd="sng" w="9525">
-            <a:solidFill>
-              <a:schemeClr val="dk2"/>
-            </a:solidFill>
-            <a:prstDash val="solid"/>
-            <a:round/>
-            <a:headEnd len="sm" w="sm" type="none"/>
-            <a:tailEnd len="sm" w="sm" type="none"/>
-          </a:ln>
-        </p:spPr>
-        <p:txBody>
-          <a:bodyPr anchorCtr="0" anchor="ctr" bIns="91425" lIns="91425" spcFirstLastPara="1" rIns="91425" wrap="square" tIns="91425">
-            <a:noAutofit/>
-          </a:bodyPr>
-          <a:lstStyle/>
-          <a:p>
-            <a:pPr indent="0" lvl="0" marL="0" rtl="0" algn="ctr">
-              <a:spcBef>
-                <a:spcPts val="0"/>
-              </a:spcBef>
-              <a:spcAft>
-                <a:spcPts val="0"/>
-              </a:spcAft>
-              <a:buNone/>
-            </a:pPr>
-            <a:r>
-              <a:rPr lang="en"/>
-              <a:t>y</a:t>
-            </a:r>
-            <a:endParaRPr/>
-          </a:p>
-        </p:txBody>
-      </p:sp>
-      <p:cxnSp>
-        <p:nvCxnSpPr>
-          <p:cNvPr id="198" name="Google Shape;198;p24"/>
-          <p:cNvCxnSpPr>
-            <a:stCxn id="197" idx="3"/>
-            <a:endCxn id="187" idx="1"/>
-          </p:cNvCxnSpPr>
-          <p:nvPr/>
-        </p:nvCxnSpPr>
-        <p:spPr>
-          <a:xfrm>
-            <a:off x="2733520" y="3106635"/>
-            <a:ext cx="464100" cy="0"/>
-          </a:xfrm>
-          <a:prstGeom prst="straightConnector1">
-            <a:avLst/>
-          </a:prstGeom>
-          <a:noFill/>
-          <a:ln cap="flat" cmpd="sng" w="9525">
-            <a:solidFill>
-              <a:schemeClr val="dk2"/>
-            </a:solidFill>
-            <a:prstDash val="solid"/>
-            <a:round/>
-            <a:headEnd len="med" w="med" type="none"/>
-            <a:tailEnd len="med" w="med" type="triangle"/>
-          </a:ln>
-        </p:spPr>
-      </p:cxnSp>
       <p:pic>
         <p:nvPicPr>
-          <p:cNvPr descr="{&quot;font&quot;:{&quot;size&quot;:11.5,&quot;family&quot;:&quot;Arial&quot;,&quot;color&quot;:&quot;#000000&quot;},&quot;backgroundColorModified&quot;:false,&quot;backgroundColor&quot;:&quot;#FFFFFF&quot;,&quot;id&quot;:&quot;9&quot;,&quot;code&quot;:&quot;$$\\pdf{h}{g}$$&quot;,&quot;type&quot;:&quot;$$&quot;,&quot;aid&quot;:null,&quot;ts&quot;:1759687993613,&quot;cs&quot;:&quot;dCXzNT7L6Cjy9szm1NfC2Q==&quot;,&quot;size&quot;:{&quot;width&quot;:24.333333333333332,&quot;height&quot;:41.166666666666664}}" id="199" name="Google Shape;199;p24"/>
+          <p:cNvPr descr="{&quot;aid&quot;:null,&quot;id&quot;:&quot;10&quot;,&quot;font&quot;:{&quot;size&quot;:14,&quot;color&quot;:&quot;#000000&quot;,&quot;family&quot;:&quot;Arial&quot;},&quot;type&quot;:&quot;$$&quot;,&quot;code&quot;:&quot;$$\\diff{f}{x}$$&quot;,&quot;backgroundColorModified&quot;:false,&quot;backgroundColor&quot;:&quot;#FFFFFF&quot;,&quot;ts&quot;:1759676328967,&quot;cs&quot;:&quot;uXDGP/K8g8GdIRDV2NTuuA==&quot;,&quot;size&quot;:{&quot;width&quot;:29.333333333333332,&quot;height&quot;:45.5}}" id="159" name="Google Shape;159;p24"/>
           <p:cNvPicPr preferRelativeResize="0"/>
           <p:nvPr/>
         </p:nvPicPr>
@@ -9069,8 +8557,8 @@
         </p:blipFill>
         <p:spPr>
           <a:xfrm>
-            <a:off x="4149695" y="2910572"/>
-            <a:ext cx="231775" cy="392113"/>
+            <a:off x="1399538" y="3464026"/>
+            <a:ext cx="240125" cy="372477"/>
           </a:xfrm>
           <a:prstGeom prst="rect">
             <a:avLst/>
@@ -9083,7 +8571,7 @@
       </p:pic>
       <p:pic>
         <p:nvPicPr>
-          <p:cNvPr descr="{&quot;code&quot;:&quot;$$\\pdf{h}{f}$$&quot;,&quot;aid&quot;:null,&quot;backgroundColor&quot;:&quot;#FFFFFF&quot;,&quot;backgroundColorModified&quot;:false,&quot;id&quot;:&quot;9&quot;,&quot;type&quot;:&quot;$$&quot;,&quot;font&quot;:{&quot;family&quot;:&quot;Arial&quot;,&quot;size&quot;:11.5,&quot;color&quot;:&quot;#000000&quot;},&quot;ts&quot;:1759688077455,&quot;cs&quot;:&quot;Ru/TbM+nOZyykFFW/A2RKQ==&quot;,&quot;size&quot;:{&quot;width&quot;:24.333333333333332,&quot;height&quot;:41.166666666666664}}" id="200" name="Google Shape;200;p24"/>
+          <p:cNvPr descr="{&quot;type&quot;:&quot;$$&quot;,&quot;aid&quot;:null,&quot;backgroundColorModified&quot;:false,&quot;backgroundColor&quot;:&quot;#FFFFFF&quot;,&quot;code&quot;:&quot;$$\\diff{g}{x}$$&quot;,&quot;font&quot;:{&quot;color&quot;:&quot;#000000&quot;,&quot;size&quot;:18,&quot;family&quot;:&quot;Arial&quot;},&quot;id&quot;:&quot;11&quot;,&quot;ts&quot;:1759676375776,&quot;cs&quot;:&quot;AvAEUwZie6D8hX1WI6IPRg==&quot;,&quot;size&quot;:{&quot;width&quot;:37.666666666666664,&quot;height&quot;:58.333333333333336}}" id="160" name="Google Shape;160;p24"/>
           <p:cNvPicPr preferRelativeResize="0"/>
           <p:nvPr/>
         </p:nvPicPr>
@@ -9097,8 +8585,8 @@
         </p:blipFill>
         <p:spPr>
           <a:xfrm>
-            <a:off x="4067745" y="2042447"/>
-            <a:ext cx="231775" cy="392113"/>
+            <a:off x="1328400" y="4460950"/>
+            <a:ext cx="279400" cy="432708"/>
           </a:xfrm>
           <a:prstGeom prst="rect">
             <a:avLst/>
@@ -9109,9 +8597,265 @@
           </a:ln>
         </p:spPr>
       </p:pic>
+      <p:cxnSp>
+        <p:nvCxnSpPr>
+          <p:cNvPr id="161" name="Google Shape;161;p24"/>
+          <p:cNvCxnSpPr/>
+          <p:nvPr/>
+        </p:nvCxnSpPr>
+        <p:spPr>
+          <a:xfrm flipH="1">
+            <a:off x="1420150" y="3660875"/>
+            <a:ext cx="449100" cy="393600"/>
+          </a:xfrm>
+          <a:prstGeom prst="straightConnector1">
+            <a:avLst/>
+          </a:prstGeom>
+          <a:noFill/>
+          <a:ln cap="flat" cmpd="sng" w="9525">
+            <a:solidFill>
+              <a:schemeClr val="dk2"/>
+            </a:solidFill>
+            <a:prstDash val="dash"/>
+            <a:round/>
+            <a:headEnd len="med" w="med" type="none"/>
+            <a:tailEnd len="med" w="med" type="triangle"/>
+          </a:ln>
+        </p:spPr>
+      </p:cxnSp>
+      <p:cxnSp>
+        <p:nvCxnSpPr>
+          <p:cNvPr id="162" name="Google Shape;162;p24"/>
+          <p:cNvCxnSpPr/>
+          <p:nvPr/>
+        </p:nvCxnSpPr>
+        <p:spPr>
+          <a:xfrm rot="10800000">
+            <a:off x="1431650" y="4237425"/>
+            <a:ext cx="447900" cy="401700"/>
+          </a:xfrm>
+          <a:prstGeom prst="straightConnector1">
+            <a:avLst/>
+          </a:prstGeom>
+          <a:noFill/>
+          <a:ln cap="flat" cmpd="sng" w="9525">
+            <a:solidFill>
+              <a:schemeClr val="dk2"/>
+            </a:solidFill>
+            <a:prstDash val="dash"/>
+            <a:round/>
+            <a:headEnd len="med" w="med" type="none"/>
+            <a:tailEnd len="med" w="med" type="triangle"/>
+          </a:ln>
+        </p:spPr>
+      </p:cxnSp>
+      <p:cxnSp>
+        <p:nvCxnSpPr>
+          <p:cNvPr id="163" name="Google Shape;163;p24"/>
+          <p:cNvCxnSpPr/>
+          <p:nvPr/>
+        </p:nvCxnSpPr>
+        <p:spPr>
+          <a:xfrm rot="10800000">
+            <a:off x="2420200" y="3650675"/>
+            <a:ext cx="545700" cy="360300"/>
+          </a:xfrm>
+          <a:prstGeom prst="straightConnector1">
+            <a:avLst/>
+          </a:prstGeom>
+          <a:noFill/>
+          <a:ln cap="flat" cmpd="sng" w="9525">
+            <a:solidFill>
+              <a:schemeClr val="dk2"/>
+            </a:solidFill>
+            <a:prstDash val="dash"/>
+            <a:round/>
+            <a:headEnd len="med" w="med" type="none"/>
+            <a:tailEnd len="med" w="med" type="triangle"/>
+          </a:ln>
+        </p:spPr>
+      </p:cxnSp>
+      <p:cxnSp>
+        <p:nvCxnSpPr>
+          <p:cNvPr id="164" name="Google Shape;164;p24"/>
+          <p:cNvCxnSpPr/>
+          <p:nvPr/>
+        </p:nvCxnSpPr>
+        <p:spPr>
+          <a:xfrm flipH="1">
+            <a:off x="2430450" y="4206625"/>
+            <a:ext cx="540600" cy="442800"/>
+          </a:xfrm>
+          <a:prstGeom prst="straightConnector1">
+            <a:avLst/>
+          </a:prstGeom>
+          <a:noFill/>
+          <a:ln cap="flat" cmpd="sng" w="9525">
+            <a:solidFill>
+              <a:schemeClr val="dk2"/>
+            </a:solidFill>
+            <a:prstDash val="dash"/>
+            <a:round/>
+            <a:headEnd len="med" w="med" type="none"/>
+            <a:tailEnd len="med" w="med" type="triangle"/>
+          </a:ln>
+        </p:spPr>
+      </p:cxnSp>
+      <p:cxnSp>
+        <p:nvCxnSpPr>
+          <p:cNvPr id="165" name="Google Shape;165;p24"/>
+          <p:cNvCxnSpPr/>
+          <p:nvPr/>
+        </p:nvCxnSpPr>
+        <p:spPr>
+          <a:xfrm>
+            <a:off x="5775250" y="3938888"/>
+            <a:ext cx="363900" cy="0"/>
+          </a:xfrm>
+          <a:prstGeom prst="straightConnector1">
+            <a:avLst/>
+          </a:prstGeom>
+          <a:noFill/>
+          <a:ln cap="flat" cmpd="sng" w="9525">
+            <a:solidFill>
+              <a:schemeClr val="dk2"/>
+            </a:solidFill>
+            <a:prstDash val="dash"/>
+            <a:round/>
+            <a:headEnd len="med" w="med" type="none"/>
+            <a:tailEnd len="med" w="med" type="triangle"/>
+          </a:ln>
+        </p:spPr>
+      </p:cxnSp>
+      <p:sp>
+        <p:nvSpPr>
+          <p:cNvPr id="166" name="Google Shape;166;p24"/>
+          <p:cNvSpPr txBox="1"/>
+          <p:nvPr/>
+        </p:nvSpPr>
+        <p:spPr>
+          <a:xfrm>
+            <a:off x="5998733" y="3734150"/>
+            <a:ext cx="1744800" cy="384900"/>
+          </a:xfrm>
+          <a:prstGeom prst="rect">
+            <a:avLst/>
+          </a:prstGeom>
+          <a:noFill/>
+          <a:ln>
+            <a:noFill/>
+          </a:ln>
+        </p:spPr>
+        <p:txBody>
+          <a:bodyPr anchorCtr="0" anchor="t" bIns="91425" lIns="91425" spcFirstLastPara="1" rIns="91425" wrap="square" tIns="91425">
+            <a:spAutoFit/>
+          </a:bodyPr>
+          <a:lstStyle/>
+          <a:p>
+            <a:pPr indent="0" lvl="0" marL="0" rtl="0" algn="l">
+              <a:spcBef>
+                <a:spcPts val="0"/>
+              </a:spcBef>
+              <a:spcAft>
+                <a:spcPts val="0"/>
+              </a:spcAft>
+              <a:buNone/>
+            </a:pPr>
+            <a:r>
+              <a:rPr lang="en" sz="1300">
+                <a:solidFill>
+                  <a:schemeClr val="dk2"/>
+                </a:solidFill>
+              </a:rPr>
+              <a:t>    Backward pass</a:t>
+            </a:r>
+            <a:endParaRPr sz="1300">
+              <a:solidFill>
+                <a:schemeClr val="dk2"/>
+              </a:solidFill>
+            </a:endParaRPr>
+          </a:p>
+        </p:txBody>
+      </p:sp>
+      <p:cxnSp>
+        <p:nvCxnSpPr>
+          <p:cNvPr id="167" name="Google Shape;167;p24"/>
+          <p:cNvCxnSpPr/>
+          <p:nvPr/>
+        </p:nvCxnSpPr>
+        <p:spPr>
+          <a:xfrm>
+            <a:off x="5775250" y="4274813"/>
+            <a:ext cx="365400" cy="0"/>
+          </a:xfrm>
+          <a:prstGeom prst="straightConnector1">
+            <a:avLst/>
+          </a:prstGeom>
+          <a:noFill/>
+          <a:ln cap="flat" cmpd="sng" w="9525">
+            <a:solidFill>
+              <a:schemeClr val="dk2"/>
+            </a:solidFill>
+            <a:prstDash val="solid"/>
+            <a:round/>
+            <a:headEnd len="med" w="med" type="none"/>
+            <a:tailEnd len="med" w="med" type="triangle"/>
+          </a:ln>
+        </p:spPr>
+      </p:cxnSp>
+      <p:sp>
+        <p:nvSpPr>
+          <p:cNvPr id="168" name="Google Shape;168;p24"/>
+          <p:cNvSpPr txBox="1"/>
+          <p:nvPr/>
+        </p:nvSpPr>
+        <p:spPr>
+          <a:xfrm>
+            <a:off x="6030183" y="4082375"/>
+            <a:ext cx="1744800" cy="384900"/>
+          </a:xfrm>
+          <a:prstGeom prst="rect">
+            <a:avLst/>
+          </a:prstGeom>
+          <a:noFill/>
+          <a:ln>
+            <a:noFill/>
+          </a:ln>
+        </p:spPr>
+        <p:txBody>
+          <a:bodyPr anchorCtr="0" anchor="t" bIns="91425" lIns="91425" spcFirstLastPara="1" rIns="91425" wrap="square" tIns="91425">
+            <a:spAutoFit/>
+          </a:bodyPr>
+          <a:lstStyle/>
+          <a:p>
+            <a:pPr indent="0" lvl="0" marL="0" rtl="0" algn="l">
+              <a:spcBef>
+                <a:spcPts val="0"/>
+              </a:spcBef>
+              <a:spcAft>
+                <a:spcPts val="0"/>
+              </a:spcAft>
+              <a:buNone/>
+            </a:pPr>
+            <a:r>
+              <a:rPr lang="en" sz="1300">
+                <a:solidFill>
+                  <a:schemeClr val="dk2"/>
+                </a:solidFill>
+              </a:rPr>
+              <a:t>    Forward Pass</a:t>
+            </a:r>
+            <a:endParaRPr sz="1300">
+              <a:solidFill>
+                <a:schemeClr val="dk2"/>
+              </a:solidFill>
+            </a:endParaRPr>
+          </a:p>
+        </p:txBody>
+      </p:sp>
       <p:pic>
         <p:nvPicPr>
-          <p:cNvPr descr="{&quot;font&quot;:{&quot;family&quot;:&quot;Arial&quot;,&quot;color&quot;:&quot;#000000&quot;,&quot;size&quot;:10},&quot;code&quot;:&quot;$$\\pdf{h}{g}\\pdf{g}{x}$$&quot;,&quot;backgroundColorModified&quot;:false,&quot;type&quot;:&quot;$$&quot;,&quot;aid&quot;:null,&quot;backgroundColor&quot;:&quot;#FFFFFF&quot;,&quot;id&quot;:&quot;9&quot;,&quot;ts&quot;:1759688173091,&quot;cs&quot;:&quot;Pm59d0r0uGzPNNWgCgxrqQ==&quot;,&quot;size&quot;:{&quot;width&quot;:46.05521679790025,&quot;height&quot;:36.00002309711285}}" id="201" name="Google Shape;201;p24"/>
+          <p:cNvPr descr="{&quot;backgroundColor&quot;:&quot;#FFFFFF&quot;,&quot;aid&quot;:null,&quot;code&quot;:&quot;\\begin{lalign*}\n&amp;{\\text{Recall}\\;\\text{chain}\\;\\text{rule}\\;\\text{in}\\;\\text{one}\\;\\text{dimension:}}\\\\\n&amp;{h\\left(x\\right)=f\\left(g\\left(x\\right)\\right)}\\\\\n&amp;{\\diff{h}{x}=\\diff{g}{x}\\diff{f}{g},\\,eg.,\\,h\\left(x\\right)=\\sin\\left(\\log_{}\\left(x\\right)\\right),\\,h^{\\prime}\\left(x\\right)=\\cos\\left(\\log_{}\\left(x\\right)\\right)/x}\\\\\n&amp;{\\text{This}\\;\\text{can}\\;\\text{be}\\;\\text{thought}\\;\\text{of}\\;\\text{a}\\text{s}\\;\\text{a}\\;\\text{graph}}\\\\\n&amp;{x\\to g\\left(x\\right)\\to f\\left(g\\right)\\to h}\\\\\n&amp;{g=g\\left(x\\right)=log\\left(x\\right)}\\\\\n&amp;{h=f\\left(g\\right)=\\sin\\left(g\\right)}\t\n\\end{lalign*}&quot;,&quot;font&quot;:{&quot;color&quot;:&quot;#000000&quot;,&quot;size&quot;:12,&quot;family&quot;:&quot;Arial&quot;},&quot;type&quot;:&quot;lalign*&quot;,&quot;id&quot;:&quot;18&quot;,&quot;backgroundColorModified&quot;:false,&quot;ts&quot;:1761614725797,&quot;cs&quot;:&quot;9DbGuKsuLQ7eh8YevQBNKQ==&quot;,&quot;size&quot;:{&quot;width&quot;:518.5,&quot;height&quot;:188}}" id="169" name="Google Shape;169;p24"/>
           <p:cNvPicPr preferRelativeResize="0"/>
           <p:nvPr/>
         </p:nvPicPr>
@@ -9125,64 +8869,8 @@
         </p:blipFill>
         <p:spPr>
           <a:xfrm>
-            <a:off x="3006193" y="2490610"/>
-            <a:ext cx="438676" cy="342900"/>
-          </a:xfrm>
-          <a:prstGeom prst="rect">
-            <a:avLst/>
-          </a:prstGeom>
-          <a:noFill/>
-          <a:ln>
-            <a:noFill/>
-          </a:ln>
-        </p:spPr>
-      </p:pic>
-      <p:pic>
-        <p:nvPicPr>
-          <p:cNvPr descr="{&quot;code&quot;:&quot;$$\\pdf{h}{f}\\pdf{f}{x}$$&quot;,&quot;aid&quot;:null,&quot;backgroundColor&quot;:&quot;#FFFFFF&quot;,&quot;type&quot;:&quot;$$&quot;,&quot;font&quot;:{&quot;color&quot;:&quot;#000000&quot;,&quot;family&quot;:&quot;Arial&quot;,&quot;size&quot;:10},&quot;id&quot;:&quot;9&quot;,&quot;backgroundColorModified&quot;:false,&quot;ts&quot;:1759688199442,&quot;cs&quot;:&quot;iRyEckkOyXXlYqZQXm8qvQ==&quot;,&quot;size&quot;:{&quot;width&quot;:46.00000000000002,&quot;height&quot;:35.83333333333335}}" id="202" name="Google Shape;202;p24"/>
-          <p:cNvPicPr preferRelativeResize="0"/>
-          <p:nvPr/>
-        </p:nvPicPr>
-        <p:blipFill>
-          <a:blip r:embed="rId8">
-            <a:alphaModFix/>
-          </a:blip>
-          <a:stretch>
-            <a:fillRect/>
-          </a:stretch>
-        </p:blipFill>
-        <p:spPr>
-          <a:xfrm>
-            <a:off x="2790705" y="1889724"/>
-            <a:ext cx="438150" cy="341313"/>
-          </a:xfrm>
-          <a:prstGeom prst="rect">
-            <a:avLst/>
-          </a:prstGeom>
-          <a:noFill/>
-          <a:ln>
-            <a:noFill/>
-          </a:ln>
-        </p:spPr>
-      </p:pic>
-      <p:pic>
-        <p:nvPicPr>
-          <p:cNvPr descr="{&quot;backgroundColorModified&quot;:false,&quot;code&quot;:&quot;$$\\pdf{h}{x}=\\pdf{h}{g}\\pdf{g}{x}+\\pdf{h}{f}\\pdf{f}{x}$$&quot;,&quot;aid&quot;:null,&quot;type&quot;:&quot;$$&quot;,&quot;id&quot;:&quot;9&quot;,&quot;font&quot;:{&quot;family&quot;:&quot;Arial&quot;,&quot;size&quot;:11.5,&quot;color&quot;:&quot;#000000&quot;},&quot;backgroundColor&quot;:&quot;#FFFFFF&quot;,&quot;ts&quot;:1759688245069,&quot;cs&quot;:&quot;UjOpRCzbC4wKd4lYYnBDoQ==&quot;,&quot;size&quot;:{&quot;width&quot;:184,&quot;height&quot;:41.166666666666664}}" id="203" name="Google Shape;203;p24"/>
-          <p:cNvPicPr preferRelativeResize="0"/>
-          <p:nvPr/>
-        </p:nvPicPr>
-        <p:blipFill>
-          <a:blip r:embed="rId9">
-            <a:alphaModFix/>
-          </a:blip>
-          <a:stretch>
-            <a:fillRect/>
-          </a:stretch>
-        </p:blipFill>
-        <p:spPr>
-          <a:xfrm>
-            <a:off x="385020" y="2070532"/>
-            <a:ext cx="1752600" cy="392113"/>
+            <a:off x="432175" y="1138375"/>
+            <a:ext cx="4938713" cy="1790700"/>
           </a:xfrm>
           <a:prstGeom prst="rect">
             <a:avLst/>
@@ -9206,7 +8894,7 @@
   <p:cSld>
     <p:spTree>
       <p:nvGrpSpPr>
-        <p:cNvPr id="207" name="Shape 207"/>
+        <p:cNvPr id="173" name="Shape 173"/>
         <p:cNvGrpSpPr/>
         <p:nvPr/>
       </p:nvGrpSpPr>
@@ -9220,7 +8908,7 @@
       </p:grpSpPr>
       <p:sp>
         <p:nvSpPr>
-          <p:cNvPr id="208" name="Google Shape;208;p25"/>
+          <p:cNvPr id="174" name="Google Shape;174;p25"/>
           <p:cNvSpPr txBox="1"/>
           <p:nvPr>
             <p:ph idx="4294967295" type="title"/>
@@ -9228,7 +8916,7 @@
         </p:nvSpPr>
         <p:spPr>
           <a:xfrm>
-            <a:off x="259350" y="157250"/>
+            <a:off x="311700" y="445025"/>
             <a:ext cx="8520600" cy="572700"/>
           </a:xfrm>
           <a:prstGeom prst="rect">
@@ -9252,15 +8940,79 @@
             </a:pPr>
             <a:r>
               <a:rPr lang="en"/>
-              <a:t>Linear case</a:t>
+              <a:t>Partial Derivatives: Chain Rule</a:t>
             </a:r>
             <a:endParaRPr/>
+          </a:p>
+        </p:txBody>
+      </p:sp>
+      <p:sp>
+        <p:nvSpPr>
+          <p:cNvPr id="175" name="Google Shape;175;p25"/>
+          <p:cNvSpPr txBox="1"/>
+          <p:nvPr/>
+        </p:nvSpPr>
+        <p:spPr>
+          <a:xfrm>
+            <a:off x="369775" y="1162825"/>
+            <a:ext cx="6747300" cy="738900"/>
+          </a:xfrm>
+          <a:prstGeom prst="rect">
+            <a:avLst/>
+          </a:prstGeom>
+          <a:noFill/>
+          <a:ln>
+            <a:noFill/>
+          </a:ln>
+        </p:spPr>
+        <p:txBody>
+          <a:bodyPr anchorCtr="0" anchor="t" bIns="91425" lIns="91425" spcFirstLastPara="1" rIns="91425" wrap="square" tIns="91425">
+            <a:spAutoFit/>
+          </a:bodyPr>
+          <a:lstStyle/>
+          <a:p>
+            <a:pPr indent="0" lvl="0" marL="0" rtl="0" algn="l">
+              <a:spcBef>
+                <a:spcPts val="0"/>
+              </a:spcBef>
+              <a:spcAft>
+                <a:spcPts val="0"/>
+              </a:spcAft>
+              <a:buNone/>
+            </a:pPr>
+            <a:r>
+              <a:t/>
+            </a:r>
+            <a:endParaRPr sz="1800">
+              <a:solidFill>
+                <a:schemeClr val="dk2"/>
+              </a:solidFill>
+            </a:endParaRPr>
+          </a:p>
+          <a:p>
+            <a:pPr indent="0" lvl="0" marL="457200" rtl="0" algn="l">
+              <a:spcBef>
+                <a:spcPts val="0"/>
+              </a:spcBef>
+              <a:spcAft>
+                <a:spcPts val="0"/>
+              </a:spcAft>
+              <a:buNone/>
+            </a:pPr>
+            <a:r>
+              <a:t/>
+            </a:r>
+            <a:endParaRPr sz="1800">
+              <a:solidFill>
+                <a:schemeClr val="dk2"/>
+              </a:solidFill>
+            </a:endParaRPr>
           </a:p>
         </p:txBody>
       </p:sp>
       <p:pic>
         <p:nvPicPr>
-          <p:cNvPr descr="{&quot;type&quot;:&quot;lalign*&quot;,&quot;backgroundColor&quot;:&quot;#FFFFFF&quot;,&quot;code&quot;:&quot;\\begin{lalign*}\n&amp;{\\text{Let}\\;\\boldsymbol{x}\\,\\text{and}\\;\\boldsymbol{a}\\,\\text{be}\\;N\\times1\\,\\text{vectors}}\\\\\n&amp;{y=a^{T}x=a_{1}x_{1}+a_{2}x_{2}\\cdots a_{n}x_{n}}\\\\\n&amp;{\\pdf{y}{x_{i}}=a_{i}\\,\\therefore\\pdf{y}{\\boldsymbol{x}}=\\boldsymbol{a\\,}\\,N\\times1\\,\\text{vector}}\t\n\\end{lalign*}&quot;,&quot;backgroundColorModified&quot;:false,&quot;id&quot;:&quot;14&quot;,&quot;aid&quot;:null,&quot;font&quot;:{&quot;family&quot;:&quot;Arial&quot;,&quot;color&quot;:&quot;#000000&quot;,&quot;size&quot;:12},&quot;ts&quot;:1759690899809,&quot;cs&quot;:&quot;NAwmycti0QMIwDAha7kl9Q==&quot;,&quot;size&quot;:{&quot;width&quot;:279.5,&quot;height&quot;:92.5}}" id="209" name="Google Shape;209;p25"/>
+          <p:cNvPr descr="{&quot;code&quot;:&quot;\\begin{lalign*}\n&amp;{\\text{In}\\;\\text{the}\\;\\text{below,}\\;\\text{we'll}\\;\\text{refer}\\;\\text{to}\\;\\text{h(x),}\\;\\text{g(x),}\\;\\text{f(x)}\\;\\text{as}\\;h,g,f\\,\\text{respectively}}\\\\\n&amp;{\\text{Example}\\;\\text{1:}}\\\\\n&amp;{h=g+f}\\\\\n&amp;{h_{g}:=\\pdf{h}{g}=1\\,\\text{:=}\\;\\text{means}\\;\\text{\&quot;defined}\\;\\text{as\&quot;}}\\\\\n&amp;{h_{f}:=\\pdf{h}{f}=1}\\\\\n&amp;{\\text{Example}\\;\\text{2:}}\\\\\n&amp;{h=g\\times f}\\\\\n&amp;{h_{g}=f}\\\\\n&amp;{h_{f}=g}\\\\\n&amp;{\\text{Eg.,}\\;h\\left(x\\right)=\\sin\\left(x\\right)\\cos\\left(x\\right)}\\\\\n&amp;{f\\left(x\\right)=\\sin\\left(x\\right),\\,g\\left(x\\right)=\\cos\\left(x\\right)}\\\\\n&amp;{h_{x}=f\\left(x\\right)g_{x}\\left(x\\right)+g\\left(x\\right)f_{x}\\left(x\\right)=-\\sin \\left(x\\right)\\sin\\left(x\\right)+\\cos\\left(x\\right)\\cos\\left(x\\right)}\t\n\\end{lalign*}&quot;,&quot;id&quot;:&quot;6&quot;,&quot;backgroundColor&quot;:&quot;#FFFFFF&quot;,&quot;type&quot;:&quot;lalign*&quot;,&quot;aid&quot;:null,&quot;font&quot;:{&quot;color&quot;:&quot;#000000&quot;,&quot;family&quot;:&quot;Arial&quot;,&quot;size&quot;:12},&quot;backgroundColorModified&quot;:false,&quot;ts&quot;:1759684194328,&quot;cs&quot;:&quot;1Oe8TIPI+zPMuJirAbWNYw==&quot;,&quot;size&quot;:{&quot;width&quot;:518,&quot;height&quot;:337}}" id="176" name="Google Shape;176;p25"/>
           <p:cNvPicPr preferRelativeResize="0"/>
           <p:nvPr/>
         </p:nvPicPr>
@@ -9274,8 +9026,8 @@
         </p:blipFill>
         <p:spPr>
           <a:xfrm>
-            <a:off x="376450" y="946450"/>
-            <a:ext cx="3175050" cy="1050775"/>
+            <a:off x="414206" y="1162813"/>
+            <a:ext cx="4933950" cy="3209925"/>
           </a:xfrm>
           <a:prstGeom prst="rect">
             <a:avLst/>
@@ -9286,6 +9038,616 @@
           </a:ln>
         </p:spPr>
       </p:pic>
+      <p:sp>
+        <p:nvSpPr>
+          <p:cNvPr id="177" name="Google Shape;177;p25"/>
+          <p:cNvSpPr/>
+          <p:nvPr/>
+        </p:nvSpPr>
+        <p:spPr>
+          <a:xfrm>
+            <a:off x="3976827" y="2699200"/>
+            <a:ext cx="437100" cy="342900"/>
+          </a:xfrm>
+          <a:prstGeom prst="rect">
+            <a:avLst/>
+          </a:prstGeom>
+          <a:solidFill>
+            <a:schemeClr val="lt2"/>
+          </a:solidFill>
+          <a:ln cap="flat" cmpd="sng" w="9525">
+            <a:solidFill>
+              <a:schemeClr val="dk2"/>
+            </a:solidFill>
+            <a:prstDash val="solid"/>
+            <a:round/>
+            <a:headEnd len="sm" w="sm" type="none"/>
+            <a:tailEnd len="sm" w="sm" type="none"/>
+          </a:ln>
+        </p:spPr>
+        <p:txBody>
+          <a:bodyPr anchorCtr="0" anchor="ctr" bIns="91425" lIns="91425" spcFirstLastPara="1" rIns="91425" wrap="square" tIns="91425">
+            <a:noAutofit/>
+          </a:bodyPr>
+          <a:lstStyle/>
+          <a:p>
+            <a:pPr indent="0" lvl="0" marL="0" rtl="0" algn="ctr">
+              <a:spcBef>
+                <a:spcPts val="0"/>
+              </a:spcBef>
+              <a:spcAft>
+                <a:spcPts val="0"/>
+              </a:spcAft>
+              <a:buNone/>
+            </a:pPr>
+            <a:r>
+              <a:rPr lang="en"/>
+              <a:t>x</a:t>
+            </a:r>
+            <a:endParaRPr/>
+          </a:p>
+        </p:txBody>
+      </p:sp>
+      <p:sp>
+        <p:nvSpPr>
+          <p:cNvPr id="178" name="Google Shape;178;p25"/>
+          <p:cNvSpPr/>
+          <p:nvPr/>
+        </p:nvSpPr>
+        <p:spPr>
+          <a:xfrm>
+            <a:off x="4875027" y="2294375"/>
+            <a:ext cx="542100" cy="342900"/>
+          </a:xfrm>
+          <a:prstGeom prst="rect">
+            <a:avLst/>
+          </a:prstGeom>
+          <a:solidFill>
+            <a:schemeClr val="lt2"/>
+          </a:solidFill>
+          <a:ln cap="flat" cmpd="sng" w="9525">
+            <a:solidFill>
+              <a:schemeClr val="dk2"/>
+            </a:solidFill>
+            <a:prstDash val="solid"/>
+            <a:round/>
+            <a:headEnd len="sm" w="sm" type="none"/>
+            <a:tailEnd len="sm" w="sm" type="none"/>
+          </a:ln>
+        </p:spPr>
+        <p:txBody>
+          <a:bodyPr anchorCtr="0" anchor="ctr" bIns="91425" lIns="91425" spcFirstLastPara="1" rIns="91425" wrap="square" tIns="91425">
+            <a:noAutofit/>
+          </a:bodyPr>
+          <a:lstStyle/>
+          <a:p>
+            <a:pPr indent="0" lvl="0" marL="0" rtl="0" algn="ctr">
+              <a:spcBef>
+                <a:spcPts val="0"/>
+              </a:spcBef>
+              <a:spcAft>
+                <a:spcPts val="0"/>
+              </a:spcAft>
+              <a:buNone/>
+            </a:pPr>
+            <a:r>
+              <a:rPr lang="en" sz="1100"/>
+              <a:t>sin(x)</a:t>
+            </a:r>
+            <a:endParaRPr sz="900"/>
+          </a:p>
+        </p:txBody>
+      </p:sp>
+      <p:sp>
+        <p:nvSpPr>
+          <p:cNvPr id="179" name="Google Shape;179;p25"/>
+          <p:cNvSpPr/>
+          <p:nvPr/>
+        </p:nvSpPr>
+        <p:spPr>
+          <a:xfrm>
+            <a:off x="4875027" y="3106850"/>
+            <a:ext cx="542100" cy="342900"/>
+          </a:xfrm>
+          <a:prstGeom prst="rect">
+            <a:avLst/>
+          </a:prstGeom>
+          <a:solidFill>
+            <a:schemeClr val="lt2"/>
+          </a:solidFill>
+          <a:ln cap="flat" cmpd="sng" w="9525">
+            <a:solidFill>
+              <a:schemeClr val="dk2"/>
+            </a:solidFill>
+            <a:prstDash val="solid"/>
+            <a:round/>
+            <a:headEnd len="sm" w="sm" type="none"/>
+            <a:tailEnd len="sm" w="sm" type="none"/>
+          </a:ln>
+        </p:spPr>
+        <p:txBody>
+          <a:bodyPr anchorCtr="0" anchor="ctr" bIns="91425" lIns="91425" spcFirstLastPara="1" rIns="91425" wrap="square" tIns="91425">
+            <a:noAutofit/>
+          </a:bodyPr>
+          <a:lstStyle/>
+          <a:p>
+            <a:pPr indent="0" lvl="0" marL="0" rtl="0" algn="ctr">
+              <a:spcBef>
+                <a:spcPts val="0"/>
+              </a:spcBef>
+              <a:spcAft>
+                <a:spcPts val="0"/>
+              </a:spcAft>
+              <a:buNone/>
+            </a:pPr>
+            <a:r>
+              <a:rPr lang="en" sz="1000"/>
+              <a:t>cos(x)</a:t>
+            </a:r>
+            <a:endParaRPr sz="1000"/>
+          </a:p>
+        </p:txBody>
+      </p:sp>
+      <p:sp>
+        <p:nvSpPr>
+          <p:cNvPr id="180" name="Google Shape;180;p25"/>
+          <p:cNvSpPr/>
+          <p:nvPr/>
+        </p:nvSpPr>
+        <p:spPr>
+          <a:xfrm>
+            <a:off x="5970402" y="2665000"/>
+            <a:ext cx="1238400" cy="342900"/>
+          </a:xfrm>
+          <a:prstGeom prst="rect">
+            <a:avLst/>
+          </a:prstGeom>
+          <a:solidFill>
+            <a:schemeClr val="lt2"/>
+          </a:solidFill>
+          <a:ln cap="flat" cmpd="sng" w="9525">
+            <a:solidFill>
+              <a:schemeClr val="dk2"/>
+            </a:solidFill>
+            <a:prstDash val="solid"/>
+            <a:round/>
+            <a:headEnd len="sm" w="sm" type="none"/>
+            <a:tailEnd len="sm" w="sm" type="none"/>
+          </a:ln>
+        </p:spPr>
+        <p:txBody>
+          <a:bodyPr anchorCtr="0" anchor="ctr" bIns="91425" lIns="91425" spcFirstLastPara="1" rIns="91425" wrap="square" tIns="91425">
+            <a:noAutofit/>
+          </a:bodyPr>
+          <a:lstStyle/>
+          <a:p>
+            <a:pPr indent="0" lvl="0" marL="0" rtl="0" algn="ctr">
+              <a:spcBef>
+                <a:spcPts val="0"/>
+              </a:spcBef>
+              <a:spcAft>
+                <a:spcPts val="0"/>
+              </a:spcAft>
+              <a:buNone/>
+            </a:pPr>
+            <a:r>
+              <a:rPr lang="en"/>
+              <a:t>sin(x)cos(x)</a:t>
+            </a:r>
+            <a:endParaRPr/>
+          </a:p>
+        </p:txBody>
+      </p:sp>
+      <p:sp>
+        <p:nvSpPr>
+          <p:cNvPr id="181" name="Google Shape;181;p25"/>
+          <p:cNvSpPr/>
+          <p:nvPr/>
+        </p:nvSpPr>
+        <p:spPr>
+          <a:xfrm>
+            <a:off x="7678227" y="2665000"/>
+            <a:ext cx="437100" cy="342900"/>
+          </a:xfrm>
+          <a:prstGeom prst="rect">
+            <a:avLst/>
+          </a:prstGeom>
+          <a:solidFill>
+            <a:schemeClr val="lt2"/>
+          </a:solidFill>
+          <a:ln cap="flat" cmpd="sng" w="9525">
+            <a:solidFill>
+              <a:schemeClr val="dk2"/>
+            </a:solidFill>
+            <a:prstDash val="solid"/>
+            <a:round/>
+            <a:headEnd len="sm" w="sm" type="none"/>
+            <a:tailEnd len="sm" w="sm" type="none"/>
+          </a:ln>
+        </p:spPr>
+        <p:txBody>
+          <a:bodyPr anchorCtr="0" anchor="ctr" bIns="91425" lIns="91425" spcFirstLastPara="1" rIns="91425" wrap="square" tIns="91425">
+            <a:noAutofit/>
+          </a:bodyPr>
+          <a:lstStyle/>
+          <a:p>
+            <a:pPr indent="0" lvl="0" marL="0" rtl="0" algn="ctr">
+              <a:spcBef>
+                <a:spcPts val="0"/>
+              </a:spcBef>
+              <a:spcAft>
+                <a:spcPts val="0"/>
+              </a:spcAft>
+              <a:buNone/>
+            </a:pPr>
+            <a:r>
+              <a:rPr lang="en"/>
+              <a:t>y</a:t>
+            </a:r>
+            <a:endParaRPr/>
+          </a:p>
+        </p:txBody>
+      </p:sp>
+      <p:cxnSp>
+        <p:nvCxnSpPr>
+          <p:cNvPr id="182" name="Google Shape;182;p25"/>
+          <p:cNvCxnSpPr>
+            <a:stCxn id="177" idx="3"/>
+            <a:endCxn id="178" idx="1"/>
+          </p:cNvCxnSpPr>
+          <p:nvPr/>
+        </p:nvCxnSpPr>
+        <p:spPr>
+          <a:xfrm flipH="1" rot="10800000">
+            <a:off x="4413927" y="2465950"/>
+            <a:ext cx="461100" cy="404700"/>
+          </a:xfrm>
+          <a:prstGeom prst="straightConnector1">
+            <a:avLst/>
+          </a:prstGeom>
+          <a:noFill/>
+          <a:ln cap="flat" cmpd="sng" w="9525">
+            <a:solidFill>
+              <a:schemeClr val="dk2"/>
+            </a:solidFill>
+            <a:prstDash val="solid"/>
+            <a:round/>
+            <a:headEnd len="med" w="med" type="none"/>
+            <a:tailEnd len="med" w="med" type="triangle"/>
+          </a:ln>
+        </p:spPr>
+      </p:cxnSp>
+      <p:cxnSp>
+        <p:nvCxnSpPr>
+          <p:cNvPr id="183" name="Google Shape;183;p25"/>
+          <p:cNvCxnSpPr>
+            <a:stCxn id="177" idx="3"/>
+            <a:endCxn id="179" idx="1"/>
+          </p:cNvCxnSpPr>
+          <p:nvPr/>
+        </p:nvCxnSpPr>
+        <p:spPr>
+          <a:xfrm>
+            <a:off x="4413927" y="2870650"/>
+            <a:ext cx="461100" cy="407700"/>
+          </a:xfrm>
+          <a:prstGeom prst="straightConnector1">
+            <a:avLst/>
+          </a:prstGeom>
+          <a:noFill/>
+          <a:ln cap="flat" cmpd="sng" w="9525">
+            <a:solidFill>
+              <a:schemeClr val="dk2"/>
+            </a:solidFill>
+            <a:prstDash val="solid"/>
+            <a:round/>
+            <a:headEnd len="med" w="med" type="none"/>
+            <a:tailEnd len="med" w="med" type="triangle"/>
+          </a:ln>
+        </p:spPr>
+      </p:cxnSp>
+      <p:cxnSp>
+        <p:nvCxnSpPr>
+          <p:cNvPr id="184" name="Google Shape;184;p25"/>
+          <p:cNvCxnSpPr>
+            <a:stCxn id="178" idx="3"/>
+          </p:cNvCxnSpPr>
+          <p:nvPr/>
+        </p:nvCxnSpPr>
+        <p:spPr>
+          <a:xfrm>
+            <a:off x="5417127" y="2465825"/>
+            <a:ext cx="553200" cy="365400"/>
+          </a:xfrm>
+          <a:prstGeom prst="straightConnector1">
+            <a:avLst/>
+          </a:prstGeom>
+          <a:noFill/>
+          <a:ln cap="flat" cmpd="sng" w="9525">
+            <a:solidFill>
+              <a:schemeClr val="dk2"/>
+            </a:solidFill>
+            <a:prstDash val="solid"/>
+            <a:round/>
+            <a:headEnd len="med" w="med" type="none"/>
+            <a:tailEnd len="med" w="med" type="triangle"/>
+          </a:ln>
+        </p:spPr>
+      </p:cxnSp>
+      <p:cxnSp>
+        <p:nvCxnSpPr>
+          <p:cNvPr id="185" name="Google Shape;185;p25"/>
+          <p:cNvCxnSpPr>
+            <a:stCxn id="179" idx="3"/>
+            <a:endCxn id="180" idx="1"/>
+          </p:cNvCxnSpPr>
+          <p:nvPr/>
+        </p:nvCxnSpPr>
+        <p:spPr>
+          <a:xfrm flipH="1" rot="10800000">
+            <a:off x="5417127" y="2836400"/>
+            <a:ext cx="553200" cy="441900"/>
+          </a:xfrm>
+          <a:prstGeom prst="straightConnector1">
+            <a:avLst/>
+          </a:prstGeom>
+          <a:noFill/>
+          <a:ln cap="flat" cmpd="sng" w="9525">
+            <a:solidFill>
+              <a:schemeClr val="dk2"/>
+            </a:solidFill>
+            <a:prstDash val="solid"/>
+            <a:round/>
+            <a:headEnd len="med" w="med" type="none"/>
+            <a:tailEnd len="med" w="med" type="triangle"/>
+          </a:ln>
+        </p:spPr>
+      </p:cxnSp>
+      <p:cxnSp>
+        <p:nvCxnSpPr>
+          <p:cNvPr id="186" name="Google Shape;186;p25"/>
+          <p:cNvCxnSpPr>
+            <a:stCxn id="180" idx="3"/>
+            <a:endCxn id="181" idx="1"/>
+          </p:cNvCxnSpPr>
+          <p:nvPr/>
+        </p:nvCxnSpPr>
+        <p:spPr>
+          <a:xfrm>
+            <a:off x="7208802" y="2836450"/>
+            <a:ext cx="469500" cy="0"/>
+          </a:xfrm>
+          <a:prstGeom prst="straightConnector1">
+            <a:avLst/>
+          </a:prstGeom>
+          <a:noFill/>
+          <a:ln cap="flat" cmpd="sng" w="9525">
+            <a:solidFill>
+              <a:schemeClr val="dk2"/>
+            </a:solidFill>
+            <a:prstDash val="solid"/>
+            <a:round/>
+            <a:headEnd len="med" w="med" type="none"/>
+            <a:tailEnd len="med" w="med" type="triangle"/>
+          </a:ln>
+        </p:spPr>
+      </p:cxnSp>
+      <p:pic>
+        <p:nvPicPr>
+          <p:cNvPr descr="{&quot;backgroundColor&quot;:&quot;#EEEEEE&quot;,&quot;type&quot;:&quot;$$&quot;,&quot;id&quot;:&quot;8&quot;,&quot;aid&quot;:null,&quot;font&quot;:{&quot;size&quot;:11.5,&quot;color&quot;:&quot;#000000&quot;,&quot;family&quot;:&quot;Arial&quot;},&quot;code&quot;:&quot;$$\\pdf{h}{f}=\\cos\\left(x\\right)$$&quot;,&quot;backgroundColorModified&quot;:false,&quot;ts&quot;:1761615243316,&quot;cs&quot;:&quot;d/7Cd3npP0Hpq7IkVjoQgA==&quot;,&quot;size&quot;:{&quot;width&quot;:100.16666666666659,&quot;height&quot;:41.166666666666664}}" id="187" name="Google Shape;187;p25"/>
+          <p:cNvPicPr preferRelativeResize="0"/>
+          <p:nvPr/>
+        </p:nvPicPr>
+        <p:blipFill>
+          <a:blip r:embed="rId4">
+            <a:alphaModFix/>
+          </a:blip>
+          <a:stretch>
+            <a:fillRect/>
+          </a:stretch>
+        </p:blipFill>
+        <p:spPr>
+          <a:xfrm>
+            <a:off x="5708527" y="2173007"/>
+            <a:ext cx="954087" cy="392113"/>
+          </a:xfrm>
+          <a:prstGeom prst="rect">
+            <a:avLst/>
+          </a:prstGeom>
+          <a:noFill/>
+          <a:ln>
+            <a:noFill/>
+          </a:ln>
+        </p:spPr>
+      </p:pic>
+      <p:pic>
+        <p:nvPicPr>
+          <p:cNvPr descr="{&quot;id&quot;:&quot;9&quot;,&quot;backgroundColorModified&quot;:false,&quot;font&quot;:{&quot;size&quot;:11.5,&quot;color&quot;:&quot;#000000&quot;,&quot;family&quot;:&quot;Arial&quot;},&quot;backgroundColor&quot;:&quot;#FFFFFF&quot;,&quot;code&quot;:&quot;$$\\pdf{h}{g}=\\sin\\left(x\\right)$$&quot;,&quot;type&quot;:&quot;$$&quot;,&quot;aid&quot;:null,&quot;ts&quot;:1761615271934,&quot;cs&quot;:&quot;cBuzeI3KomEq0J+5izLk4A==&quot;,&quot;size&quot;:{&quot;width&quot;:98.16666666666659,&quot;height&quot;:41.166666666666664}}" id="188" name="Google Shape;188;p25"/>
+          <p:cNvPicPr preferRelativeResize="0"/>
+          <p:nvPr/>
+        </p:nvPicPr>
+        <p:blipFill>
+          <a:blip r:embed="rId5">
+            <a:alphaModFix/>
+          </a:blip>
+          <a:stretch>
+            <a:fillRect/>
+          </a:stretch>
+        </p:blipFill>
+        <p:spPr>
+          <a:xfrm>
+            <a:off x="5775577" y="3279454"/>
+            <a:ext cx="935037" cy="392113"/>
+          </a:xfrm>
+          <a:prstGeom prst="rect">
+            <a:avLst/>
+          </a:prstGeom>
+          <a:noFill/>
+          <a:ln>
+            <a:noFill/>
+          </a:ln>
+        </p:spPr>
+      </p:pic>
+      <p:pic>
+        <p:nvPicPr>
+          <p:cNvPr descr="{&quot;aid&quot;:null,&quot;id&quot;:&quot;10&quot;,&quot;font&quot;:{&quot;size&quot;:14,&quot;color&quot;:&quot;#000000&quot;,&quot;family&quot;:&quot;Arial&quot;},&quot;type&quot;:&quot;$$&quot;,&quot;code&quot;:&quot;$$\\diff{f}{x}$$&quot;,&quot;backgroundColorModified&quot;:false,&quot;backgroundColor&quot;:&quot;#FFFFFF&quot;,&quot;ts&quot;:1759676328967,&quot;cs&quot;:&quot;uXDGP/K8g8GdIRDV2NTuuA==&quot;,&quot;size&quot;:{&quot;width&quot;:29.333333333333332,&quot;height&quot;:45.5}}" id="189" name="Google Shape;189;p25"/>
+          <p:cNvPicPr preferRelativeResize="0"/>
+          <p:nvPr/>
+        </p:nvPicPr>
+        <p:blipFill>
+          <a:blip r:embed="rId6">
+            <a:alphaModFix/>
+          </a:blip>
+          <a:stretch>
+            <a:fillRect/>
+          </a:stretch>
+        </p:blipFill>
+        <p:spPr>
+          <a:xfrm>
+            <a:off x="4393640" y="2185951"/>
+            <a:ext cx="240125" cy="372477"/>
+          </a:xfrm>
+          <a:prstGeom prst="rect">
+            <a:avLst/>
+          </a:prstGeom>
+          <a:noFill/>
+          <a:ln>
+            <a:noFill/>
+          </a:ln>
+        </p:spPr>
+      </p:pic>
+      <p:pic>
+        <p:nvPicPr>
+          <p:cNvPr descr="{&quot;type&quot;:&quot;$$&quot;,&quot;aid&quot;:null,&quot;backgroundColorModified&quot;:false,&quot;backgroundColor&quot;:&quot;#FFFFFF&quot;,&quot;code&quot;:&quot;$$\\diff{g}{x}$$&quot;,&quot;font&quot;:{&quot;color&quot;:&quot;#000000&quot;,&quot;size&quot;:18,&quot;family&quot;:&quot;Arial&quot;},&quot;id&quot;:&quot;11&quot;,&quot;ts&quot;:1759676375776,&quot;cs&quot;:&quot;AvAEUwZie6D8hX1WI6IPRg==&quot;,&quot;size&quot;:{&quot;width&quot;:37.666666666666664,&quot;height&quot;:58.333333333333336}}" id="190" name="Google Shape;190;p25"/>
+          <p:cNvPicPr preferRelativeResize="0"/>
+          <p:nvPr/>
+        </p:nvPicPr>
+        <p:blipFill>
+          <a:blip r:embed="rId7">
+            <a:alphaModFix/>
+          </a:blip>
+          <a:stretch>
+            <a:fillRect/>
+          </a:stretch>
+        </p:blipFill>
+        <p:spPr>
+          <a:xfrm>
+            <a:off x="4322502" y="3182875"/>
+            <a:ext cx="279400" cy="432708"/>
+          </a:xfrm>
+          <a:prstGeom prst="rect">
+            <a:avLst/>
+          </a:prstGeom>
+          <a:noFill/>
+          <a:ln>
+            <a:noFill/>
+          </a:ln>
+        </p:spPr>
+      </p:pic>
+      <p:cxnSp>
+        <p:nvCxnSpPr>
+          <p:cNvPr id="191" name="Google Shape;191;p25"/>
+          <p:cNvCxnSpPr/>
+          <p:nvPr/>
+        </p:nvCxnSpPr>
+        <p:spPr>
+          <a:xfrm flipH="1">
+            <a:off x="4414252" y="2382800"/>
+            <a:ext cx="449100" cy="393600"/>
+          </a:xfrm>
+          <a:prstGeom prst="straightConnector1">
+            <a:avLst/>
+          </a:prstGeom>
+          <a:noFill/>
+          <a:ln cap="flat" cmpd="sng" w="9525">
+            <a:solidFill>
+              <a:schemeClr val="dk2"/>
+            </a:solidFill>
+            <a:prstDash val="dash"/>
+            <a:round/>
+            <a:headEnd len="med" w="med" type="none"/>
+            <a:tailEnd len="med" w="med" type="triangle"/>
+          </a:ln>
+        </p:spPr>
+      </p:cxnSp>
+      <p:cxnSp>
+        <p:nvCxnSpPr>
+          <p:cNvPr id="192" name="Google Shape;192;p25"/>
+          <p:cNvCxnSpPr/>
+          <p:nvPr/>
+        </p:nvCxnSpPr>
+        <p:spPr>
+          <a:xfrm rot="10800000">
+            <a:off x="4425752" y="2959350"/>
+            <a:ext cx="447900" cy="401700"/>
+          </a:xfrm>
+          <a:prstGeom prst="straightConnector1">
+            <a:avLst/>
+          </a:prstGeom>
+          <a:noFill/>
+          <a:ln cap="flat" cmpd="sng" w="9525">
+            <a:solidFill>
+              <a:schemeClr val="dk2"/>
+            </a:solidFill>
+            <a:prstDash val="dash"/>
+            <a:round/>
+            <a:headEnd len="med" w="med" type="none"/>
+            <a:tailEnd len="med" w="med" type="triangle"/>
+          </a:ln>
+        </p:spPr>
+      </p:cxnSp>
+      <p:cxnSp>
+        <p:nvCxnSpPr>
+          <p:cNvPr id="193" name="Google Shape;193;p25"/>
+          <p:cNvCxnSpPr/>
+          <p:nvPr/>
+        </p:nvCxnSpPr>
+        <p:spPr>
+          <a:xfrm rot="10800000">
+            <a:off x="5414302" y="2372600"/>
+            <a:ext cx="545700" cy="360300"/>
+          </a:xfrm>
+          <a:prstGeom prst="straightConnector1">
+            <a:avLst/>
+          </a:prstGeom>
+          <a:noFill/>
+          <a:ln cap="flat" cmpd="sng" w="9525">
+            <a:solidFill>
+              <a:schemeClr val="dk2"/>
+            </a:solidFill>
+            <a:prstDash val="dash"/>
+            <a:round/>
+            <a:headEnd len="med" w="med" type="none"/>
+            <a:tailEnd len="med" w="med" type="triangle"/>
+          </a:ln>
+        </p:spPr>
+      </p:cxnSp>
+      <p:cxnSp>
+        <p:nvCxnSpPr>
+          <p:cNvPr id="194" name="Google Shape;194;p25"/>
+          <p:cNvCxnSpPr/>
+          <p:nvPr/>
+        </p:nvCxnSpPr>
+        <p:spPr>
+          <a:xfrm flipH="1">
+            <a:off x="5424552" y="2928550"/>
+            <a:ext cx="540600" cy="442800"/>
+          </a:xfrm>
+          <a:prstGeom prst="straightConnector1">
+            <a:avLst/>
+          </a:prstGeom>
+          <a:noFill/>
+          <a:ln cap="flat" cmpd="sng" w="9525">
+            <a:solidFill>
+              <a:schemeClr val="dk2"/>
+            </a:solidFill>
+            <a:prstDash val="dash"/>
+            <a:round/>
+            <a:headEnd len="med" w="med" type="none"/>
+            <a:tailEnd len="med" w="med" type="triangle"/>
+          </a:ln>
+        </p:spPr>
+      </p:cxnSp>
     </p:spTree>
   </p:cSld>
   <p:clrMapOvr>
@@ -9299,7 +9661,7 @@
   <p:cSld>
     <p:spTree>
       <p:nvGrpSpPr>
-        <p:cNvPr id="213" name="Shape 213"/>
+        <p:cNvPr id="198" name="Shape 198"/>
         <p:cNvGrpSpPr/>
         <p:nvPr/>
       </p:nvGrpSpPr>
@@ -9313,7 +9675,7 @@
       </p:grpSpPr>
       <p:sp>
         <p:nvSpPr>
-          <p:cNvPr id="214" name="Google Shape;214;p26"/>
+          <p:cNvPr id="199" name="Google Shape;199;p26"/>
           <p:cNvSpPr txBox="1"/>
           <p:nvPr>
             <p:ph idx="4294967295" type="title"/>
@@ -9321,7 +9683,7 @@
         </p:nvSpPr>
         <p:spPr>
           <a:xfrm>
-            <a:off x="259350" y="157250"/>
+            <a:off x="311700" y="445025"/>
             <a:ext cx="8520600" cy="572700"/>
           </a:xfrm>
           <a:prstGeom prst="rect">
@@ -9345,15 +9707,940 @@
             </a:pPr>
             <a:r>
               <a:rPr lang="en"/>
-              <a:t>Let’s come back to the optimization problem</a:t>
+              <a:t>Partial Derivatives: Chain Rule</a:t>
             </a:r>
             <a:endParaRPr/>
+          </a:p>
+        </p:txBody>
+      </p:sp>
+      <p:sp>
+        <p:nvSpPr>
+          <p:cNvPr id="200" name="Google Shape;200;p26"/>
+          <p:cNvSpPr txBox="1"/>
+          <p:nvPr/>
+        </p:nvSpPr>
+        <p:spPr>
+          <a:xfrm>
+            <a:off x="936739" y="1004075"/>
+            <a:ext cx="6747300" cy="738900"/>
+          </a:xfrm>
+          <a:prstGeom prst="rect">
+            <a:avLst/>
+          </a:prstGeom>
+          <a:noFill/>
+          <a:ln>
+            <a:noFill/>
+          </a:ln>
+        </p:spPr>
+        <p:txBody>
+          <a:bodyPr anchorCtr="0" anchor="t" bIns="91425" lIns="91425" spcFirstLastPara="1" rIns="91425" wrap="square" tIns="91425">
+            <a:spAutoFit/>
+          </a:bodyPr>
+          <a:lstStyle/>
+          <a:p>
+            <a:pPr indent="0" lvl="0" marL="0" rtl="0" algn="l">
+              <a:spcBef>
+                <a:spcPts val="0"/>
+              </a:spcBef>
+              <a:spcAft>
+                <a:spcPts val="0"/>
+              </a:spcAft>
+              <a:buNone/>
+            </a:pPr>
+            <a:r>
+              <a:t/>
+            </a:r>
+            <a:endParaRPr sz="1800">
+              <a:solidFill>
+                <a:schemeClr val="dk2"/>
+              </a:solidFill>
+            </a:endParaRPr>
+          </a:p>
+          <a:p>
+            <a:pPr indent="0" lvl="0" marL="457200" rtl="0" algn="l">
+              <a:spcBef>
+                <a:spcPts val="0"/>
+              </a:spcBef>
+              <a:spcAft>
+                <a:spcPts val="0"/>
+              </a:spcAft>
+              <a:buNone/>
+            </a:pPr>
+            <a:r>
+              <a:t/>
+            </a:r>
+            <a:endParaRPr sz="1800">
+              <a:solidFill>
+                <a:schemeClr val="dk2"/>
+              </a:solidFill>
+            </a:endParaRPr>
+          </a:p>
+        </p:txBody>
+      </p:sp>
+      <p:sp>
+        <p:nvSpPr>
+          <p:cNvPr id="201" name="Google Shape;201;p26"/>
+          <p:cNvSpPr txBox="1"/>
+          <p:nvPr/>
+        </p:nvSpPr>
+        <p:spPr>
+          <a:xfrm>
+            <a:off x="361514" y="904350"/>
+            <a:ext cx="7137900" cy="384900"/>
+          </a:xfrm>
+          <a:prstGeom prst="rect">
+            <a:avLst/>
+          </a:prstGeom>
+          <a:noFill/>
+          <a:ln>
+            <a:noFill/>
+          </a:ln>
+        </p:spPr>
+        <p:txBody>
+          <a:bodyPr anchorCtr="0" anchor="t" bIns="91425" lIns="91425" spcFirstLastPara="1" rIns="91425" wrap="square" tIns="91425">
+            <a:spAutoFit/>
+          </a:bodyPr>
+          <a:lstStyle/>
+          <a:p>
+            <a:pPr indent="0" lvl="0" marL="0" rtl="0" algn="l">
+              <a:spcBef>
+                <a:spcPts val="0"/>
+              </a:spcBef>
+              <a:spcAft>
+                <a:spcPts val="0"/>
+              </a:spcAft>
+              <a:buNone/>
+            </a:pPr>
+            <a:r>
+              <a:rPr lang="en" sz="1300">
+                <a:solidFill>
+                  <a:schemeClr val="dk2"/>
+                </a:solidFill>
+              </a:rPr>
+              <a:t>More complicated example</a:t>
+            </a:r>
+            <a:endParaRPr sz="1300">
+              <a:solidFill>
+                <a:schemeClr val="dk2"/>
+              </a:solidFill>
+            </a:endParaRPr>
+          </a:p>
+        </p:txBody>
+      </p:sp>
+      <p:sp>
+        <p:nvSpPr>
+          <p:cNvPr id="202" name="Google Shape;202;p26"/>
+          <p:cNvSpPr/>
+          <p:nvPr/>
+        </p:nvSpPr>
+        <p:spPr>
+          <a:xfrm>
+            <a:off x="1157914" y="1791825"/>
+            <a:ext cx="437100" cy="342900"/>
+          </a:xfrm>
+          <a:prstGeom prst="rect">
+            <a:avLst/>
+          </a:prstGeom>
+          <a:solidFill>
+            <a:schemeClr val="lt2"/>
+          </a:solidFill>
+          <a:ln cap="flat" cmpd="sng" w="9525">
+            <a:solidFill>
+              <a:schemeClr val="dk2"/>
+            </a:solidFill>
+            <a:prstDash val="solid"/>
+            <a:round/>
+            <a:headEnd len="sm" w="sm" type="none"/>
+            <a:tailEnd len="sm" w="sm" type="none"/>
+          </a:ln>
+        </p:spPr>
+        <p:txBody>
+          <a:bodyPr anchorCtr="0" anchor="ctr" bIns="91425" lIns="91425" spcFirstLastPara="1" rIns="91425" wrap="square" tIns="91425">
+            <a:noAutofit/>
+          </a:bodyPr>
+          <a:lstStyle/>
+          <a:p>
+            <a:pPr indent="0" lvl="0" marL="0" rtl="0" algn="ctr">
+              <a:spcBef>
+                <a:spcPts val="0"/>
+              </a:spcBef>
+              <a:spcAft>
+                <a:spcPts val="0"/>
+              </a:spcAft>
+              <a:buNone/>
+            </a:pPr>
+            <a:r>
+              <a:rPr lang="en"/>
+              <a:t>x</a:t>
+            </a:r>
+            <a:endParaRPr/>
+          </a:p>
+        </p:txBody>
+      </p:sp>
+      <p:sp>
+        <p:nvSpPr>
+          <p:cNvPr id="203" name="Google Shape;203;p26"/>
+          <p:cNvSpPr/>
+          <p:nvPr/>
+        </p:nvSpPr>
+        <p:spPr>
+          <a:xfrm>
+            <a:off x="2056114" y="1387000"/>
+            <a:ext cx="772800" cy="342900"/>
+          </a:xfrm>
+          <a:prstGeom prst="rect">
+            <a:avLst/>
+          </a:prstGeom>
+          <a:solidFill>
+            <a:schemeClr val="lt2"/>
+          </a:solidFill>
+          <a:ln cap="flat" cmpd="sng" w="9525">
+            <a:solidFill>
+              <a:schemeClr val="dk2"/>
+            </a:solidFill>
+            <a:prstDash val="solid"/>
+            <a:round/>
+            <a:headEnd len="sm" w="sm" type="none"/>
+            <a:tailEnd len="sm" w="sm" type="none"/>
+          </a:ln>
+        </p:spPr>
+        <p:txBody>
+          <a:bodyPr anchorCtr="0" anchor="ctr" bIns="91425" lIns="91425" spcFirstLastPara="1" rIns="91425" wrap="square" tIns="91425">
+            <a:noAutofit/>
+          </a:bodyPr>
+          <a:lstStyle/>
+          <a:p>
+            <a:pPr indent="0" lvl="0" marL="0" rtl="0" algn="ctr">
+              <a:spcBef>
+                <a:spcPts val="0"/>
+              </a:spcBef>
+              <a:spcAft>
+                <a:spcPts val="0"/>
+              </a:spcAft>
+              <a:buNone/>
+            </a:pPr>
+            <a:r>
+              <a:rPr lang="en"/>
+              <a:t>f1=x^2</a:t>
+            </a:r>
+            <a:endParaRPr/>
+          </a:p>
+        </p:txBody>
+      </p:sp>
+      <p:sp>
+        <p:nvSpPr>
+          <p:cNvPr id="204" name="Google Shape;204;p26"/>
+          <p:cNvSpPr/>
+          <p:nvPr/>
+        </p:nvSpPr>
+        <p:spPr>
+          <a:xfrm>
+            <a:off x="2056114" y="2199475"/>
+            <a:ext cx="772800" cy="342900"/>
+          </a:xfrm>
+          <a:prstGeom prst="rect">
+            <a:avLst/>
+          </a:prstGeom>
+          <a:solidFill>
+            <a:schemeClr val="lt2"/>
+          </a:solidFill>
+          <a:ln cap="flat" cmpd="sng" w="9525">
+            <a:solidFill>
+              <a:schemeClr val="dk2"/>
+            </a:solidFill>
+            <a:prstDash val="solid"/>
+            <a:round/>
+            <a:headEnd len="sm" w="sm" type="none"/>
+            <a:tailEnd len="sm" w="sm" type="none"/>
+          </a:ln>
+        </p:spPr>
+        <p:txBody>
+          <a:bodyPr anchorCtr="0" anchor="ctr" bIns="91425" lIns="91425" spcFirstLastPara="1" rIns="91425" wrap="square" tIns="91425">
+            <a:noAutofit/>
+          </a:bodyPr>
+          <a:lstStyle/>
+          <a:p>
+            <a:pPr indent="0" lvl="0" marL="0" rtl="0" algn="ctr">
+              <a:spcBef>
+                <a:spcPts val="0"/>
+              </a:spcBef>
+              <a:spcAft>
+                <a:spcPts val="0"/>
+              </a:spcAft>
+              <a:buNone/>
+            </a:pPr>
+            <a:r>
+              <a:rPr lang="en"/>
+              <a:t>g1=1/x</a:t>
+            </a:r>
+            <a:endParaRPr/>
+          </a:p>
+        </p:txBody>
+      </p:sp>
+      <p:sp>
+        <p:nvSpPr>
+          <p:cNvPr id="205" name="Google Shape;205;p26"/>
+          <p:cNvSpPr/>
+          <p:nvPr/>
+        </p:nvSpPr>
+        <p:spPr>
+          <a:xfrm>
+            <a:off x="4350639" y="2199475"/>
+            <a:ext cx="1045200" cy="342900"/>
+          </a:xfrm>
+          <a:prstGeom prst="rect">
+            <a:avLst/>
+          </a:prstGeom>
+          <a:solidFill>
+            <a:schemeClr val="lt2"/>
+          </a:solidFill>
+          <a:ln cap="flat" cmpd="sng" w="9525">
+            <a:solidFill>
+              <a:schemeClr val="dk2"/>
+            </a:solidFill>
+            <a:prstDash val="solid"/>
+            <a:round/>
+            <a:headEnd len="sm" w="sm" type="none"/>
+            <a:tailEnd len="sm" w="sm" type="none"/>
+          </a:ln>
+        </p:spPr>
+        <p:txBody>
+          <a:bodyPr anchorCtr="0" anchor="ctr" bIns="91425" lIns="91425" spcFirstLastPara="1" rIns="91425" wrap="square" tIns="91425">
+            <a:noAutofit/>
+          </a:bodyPr>
+          <a:lstStyle/>
+          <a:p>
+            <a:pPr indent="0" lvl="0" marL="0" rtl="0" algn="ctr">
+              <a:spcBef>
+                <a:spcPts val="0"/>
+              </a:spcBef>
+              <a:spcAft>
+                <a:spcPts val="0"/>
+              </a:spcAft>
+              <a:buNone/>
+            </a:pPr>
+            <a:r>
+              <a:rPr lang="en"/>
+              <a:t>g2=log(g1)</a:t>
+            </a:r>
+            <a:endParaRPr/>
+          </a:p>
+        </p:txBody>
+      </p:sp>
+      <p:sp>
+        <p:nvSpPr>
+          <p:cNvPr id="206" name="Google Shape;206;p26"/>
+          <p:cNvSpPr/>
+          <p:nvPr/>
+        </p:nvSpPr>
+        <p:spPr>
+          <a:xfrm>
+            <a:off x="6053714" y="1869025"/>
+            <a:ext cx="916200" cy="342900"/>
+          </a:xfrm>
+          <a:prstGeom prst="rect">
+            <a:avLst/>
+          </a:prstGeom>
+          <a:solidFill>
+            <a:schemeClr val="lt2"/>
+          </a:solidFill>
+          <a:ln cap="flat" cmpd="sng" w="9525">
+            <a:solidFill>
+              <a:schemeClr val="dk2"/>
+            </a:solidFill>
+            <a:prstDash val="solid"/>
+            <a:round/>
+            <a:headEnd len="sm" w="sm" type="none"/>
+            <a:tailEnd len="sm" w="sm" type="none"/>
+          </a:ln>
+        </p:spPr>
+        <p:txBody>
+          <a:bodyPr anchorCtr="0" anchor="ctr" bIns="91425" lIns="91425" spcFirstLastPara="1" rIns="91425" wrap="square" tIns="91425">
+            <a:noAutofit/>
+          </a:bodyPr>
+          <a:lstStyle/>
+          <a:p>
+            <a:pPr indent="0" lvl="0" marL="0" rtl="0" algn="ctr">
+              <a:spcBef>
+                <a:spcPts val="0"/>
+              </a:spcBef>
+              <a:spcAft>
+                <a:spcPts val="0"/>
+              </a:spcAft>
+              <a:buNone/>
+            </a:pPr>
+            <a:r>
+              <a:rPr lang="en"/>
+              <a:t>h=f3/g2</a:t>
+            </a:r>
+            <a:endParaRPr/>
+          </a:p>
+        </p:txBody>
+      </p:sp>
+      <p:cxnSp>
+        <p:nvCxnSpPr>
+          <p:cNvPr id="207" name="Google Shape;207;p26"/>
+          <p:cNvCxnSpPr>
+            <a:stCxn id="202" idx="3"/>
+            <a:endCxn id="203" idx="1"/>
+          </p:cNvCxnSpPr>
+          <p:nvPr/>
+        </p:nvCxnSpPr>
+        <p:spPr>
+          <a:xfrm flipH="1" rot="10800000">
+            <a:off x="1595014" y="1558575"/>
+            <a:ext cx="461100" cy="404700"/>
+          </a:xfrm>
+          <a:prstGeom prst="straightConnector1">
+            <a:avLst/>
+          </a:prstGeom>
+          <a:noFill/>
+          <a:ln cap="flat" cmpd="sng" w="9525">
+            <a:solidFill>
+              <a:schemeClr val="dk2"/>
+            </a:solidFill>
+            <a:prstDash val="solid"/>
+            <a:round/>
+            <a:headEnd len="med" w="med" type="none"/>
+            <a:tailEnd len="med" w="med" type="triangle"/>
+          </a:ln>
+        </p:spPr>
+      </p:cxnSp>
+      <p:cxnSp>
+        <p:nvCxnSpPr>
+          <p:cNvPr id="208" name="Google Shape;208;p26"/>
+          <p:cNvCxnSpPr>
+            <a:stCxn id="202" idx="3"/>
+            <a:endCxn id="204" idx="1"/>
+          </p:cNvCxnSpPr>
+          <p:nvPr/>
+        </p:nvCxnSpPr>
+        <p:spPr>
+          <a:xfrm>
+            <a:off x="1595014" y="1963275"/>
+            <a:ext cx="461100" cy="407700"/>
+          </a:xfrm>
+          <a:prstGeom prst="straightConnector1">
+            <a:avLst/>
+          </a:prstGeom>
+          <a:noFill/>
+          <a:ln cap="flat" cmpd="sng" w="9525">
+            <a:solidFill>
+              <a:schemeClr val="dk2"/>
+            </a:solidFill>
+            <a:prstDash val="solid"/>
+            <a:round/>
+            <a:headEnd len="med" w="med" type="none"/>
+            <a:tailEnd len="med" w="med" type="triangle"/>
+          </a:ln>
+        </p:spPr>
+      </p:cxnSp>
+      <p:cxnSp>
+        <p:nvCxnSpPr>
+          <p:cNvPr id="209" name="Google Shape;209;p26"/>
+          <p:cNvCxnSpPr>
+            <a:stCxn id="203" idx="3"/>
+            <a:endCxn id="210" idx="1"/>
+          </p:cNvCxnSpPr>
+          <p:nvPr/>
+        </p:nvCxnSpPr>
+        <p:spPr>
+          <a:xfrm>
+            <a:off x="2828914" y="1558450"/>
+            <a:ext cx="475800" cy="0"/>
+          </a:xfrm>
+          <a:prstGeom prst="straightConnector1">
+            <a:avLst/>
+          </a:prstGeom>
+          <a:noFill/>
+          <a:ln cap="flat" cmpd="sng" w="9525">
+            <a:solidFill>
+              <a:schemeClr val="dk2"/>
+            </a:solidFill>
+            <a:prstDash val="solid"/>
+            <a:round/>
+            <a:headEnd len="med" w="med" type="none"/>
+            <a:tailEnd len="med" w="med" type="triangle"/>
+          </a:ln>
+        </p:spPr>
+      </p:cxnSp>
+      <p:cxnSp>
+        <p:nvCxnSpPr>
+          <p:cNvPr id="211" name="Google Shape;211;p26"/>
+          <p:cNvCxnSpPr>
+            <a:stCxn id="204" idx="3"/>
+            <a:endCxn id="205" idx="1"/>
+          </p:cNvCxnSpPr>
+          <p:nvPr/>
+        </p:nvCxnSpPr>
+        <p:spPr>
+          <a:xfrm>
+            <a:off x="2828914" y="2370925"/>
+            <a:ext cx="1521600" cy="0"/>
+          </a:xfrm>
+          <a:prstGeom prst="straightConnector1">
+            <a:avLst/>
+          </a:prstGeom>
+          <a:noFill/>
+          <a:ln cap="flat" cmpd="sng" w="9525">
+            <a:solidFill>
+              <a:schemeClr val="dk2"/>
+            </a:solidFill>
+            <a:prstDash val="solid"/>
+            <a:round/>
+            <a:headEnd len="med" w="med" type="none"/>
+            <a:tailEnd len="med" w="med" type="triangle"/>
+          </a:ln>
+        </p:spPr>
+      </p:cxnSp>
+      <p:cxnSp>
+        <p:nvCxnSpPr>
+          <p:cNvPr id="212" name="Google Shape;212;p26"/>
+          <p:cNvCxnSpPr>
+            <a:stCxn id="205" idx="3"/>
+            <a:endCxn id="206" idx="1"/>
+          </p:cNvCxnSpPr>
+          <p:nvPr/>
+        </p:nvCxnSpPr>
+        <p:spPr>
+          <a:xfrm flipH="1" rot="10800000">
+            <a:off x="5395839" y="2040625"/>
+            <a:ext cx="657900" cy="330300"/>
+          </a:xfrm>
+          <a:prstGeom prst="straightConnector1">
+            <a:avLst/>
+          </a:prstGeom>
+          <a:noFill/>
+          <a:ln cap="flat" cmpd="sng" w="9525">
+            <a:solidFill>
+              <a:schemeClr val="dk2"/>
+            </a:solidFill>
+            <a:prstDash val="solid"/>
+            <a:round/>
+            <a:headEnd len="med" w="med" type="none"/>
+            <a:tailEnd len="med" w="med" type="triangle"/>
+          </a:ln>
+        </p:spPr>
+      </p:cxnSp>
+      <p:sp>
+        <p:nvSpPr>
+          <p:cNvPr id="210" name="Google Shape;210;p26"/>
+          <p:cNvSpPr/>
+          <p:nvPr/>
+        </p:nvSpPr>
+        <p:spPr>
+          <a:xfrm>
+            <a:off x="3304639" y="1387000"/>
+            <a:ext cx="772800" cy="342900"/>
+          </a:xfrm>
+          <a:prstGeom prst="rect">
+            <a:avLst/>
+          </a:prstGeom>
+          <a:solidFill>
+            <a:schemeClr val="lt2"/>
+          </a:solidFill>
+          <a:ln cap="flat" cmpd="sng" w="9525">
+            <a:solidFill>
+              <a:schemeClr val="dk2"/>
+            </a:solidFill>
+            <a:prstDash val="solid"/>
+            <a:round/>
+            <a:headEnd len="sm" w="sm" type="none"/>
+            <a:tailEnd len="sm" w="sm" type="none"/>
+          </a:ln>
+        </p:spPr>
+        <p:txBody>
+          <a:bodyPr anchorCtr="0" anchor="ctr" bIns="91425" lIns="91425" spcFirstLastPara="1" rIns="91425" wrap="square" tIns="91425">
+            <a:noAutofit/>
+          </a:bodyPr>
+          <a:lstStyle/>
+          <a:p>
+            <a:pPr indent="0" lvl="0" marL="0" rtl="0" algn="ctr">
+              <a:spcBef>
+                <a:spcPts val="0"/>
+              </a:spcBef>
+              <a:spcAft>
+                <a:spcPts val="0"/>
+              </a:spcAft>
+              <a:buNone/>
+            </a:pPr>
+            <a:r>
+              <a:rPr lang="en"/>
+              <a:t>f2=(+)</a:t>
+            </a:r>
+            <a:endParaRPr/>
+          </a:p>
+        </p:txBody>
+      </p:sp>
+      <p:sp>
+        <p:nvSpPr>
+          <p:cNvPr id="213" name="Google Shape;213;p26"/>
+          <p:cNvSpPr/>
+          <p:nvPr/>
+        </p:nvSpPr>
+        <p:spPr>
+          <a:xfrm>
+            <a:off x="4401164" y="1387000"/>
+            <a:ext cx="967500" cy="342900"/>
+          </a:xfrm>
+          <a:prstGeom prst="rect">
+            <a:avLst/>
+          </a:prstGeom>
+          <a:solidFill>
+            <a:schemeClr val="lt2"/>
+          </a:solidFill>
+          <a:ln cap="flat" cmpd="sng" w="9525">
+            <a:solidFill>
+              <a:schemeClr val="dk2"/>
+            </a:solidFill>
+            <a:prstDash val="solid"/>
+            <a:round/>
+            <a:headEnd len="sm" w="sm" type="none"/>
+            <a:tailEnd len="sm" w="sm" type="none"/>
+          </a:ln>
+        </p:spPr>
+        <p:txBody>
+          <a:bodyPr anchorCtr="0" anchor="ctr" bIns="91425" lIns="91425" spcFirstLastPara="1" rIns="91425" wrap="square" tIns="91425">
+            <a:noAutofit/>
+          </a:bodyPr>
+          <a:lstStyle/>
+          <a:p>
+            <a:pPr indent="0" lvl="0" marL="0" rtl="0" algn="ctr">
+              <a:spcBef>
+                <a:spcPts val="0"/>
+              </a:spcBef>
+              <a:spcAft>
+                <a:spcPts val="0"/>
+              </a:spcAft>
+              <a:buNone/>
+            </a:pPr>
+            <a:r>
+              <a:rPr lang="en"/>
+              <a:t>f3=sin(f2)</a:t>
+            </a:r>
+            <a:endParaRPr/>
+          </a:p>
+        </p:txBody>
+      </p:sp>
+      <p:cxnSp>
+        <p:nvCxnSpPr>
+          <p:cNvPr id="214" name="Google Shape;214;p26"/>
+          <p:cNvCxnSpPr>
+            <a:stCxn id="210" idx="3"/>
+            <a:endCxn id="213" idx="1"/>
+          </p:cNvCxnSpPr>
+          <p:nvPr/>
+        </p:nvCxnSpPr>
+        <p:spPr>
+          <a:xfrm>
+            <a:off x="4077439" y="1558450"/>
+            <a:ext cx="323700" cy="0"/>
+          </a:xfrm>
+          <a:prstGeom prst="straightConnector1">
+            <a:avLst/>
+          </a:prstGeom>
+          <a:noFill/>
+          <a:ln cap="flat" cmpd="sng" w="9525">
+            <a:solidFill>
+              <a:schemeClr val="dk2"/>
+            </a:solidFill>
+            <a:prstDash val="solid"/>
+            <a:round/>
+            <a:headEnd len="med" w="med" type="none"/>
+            <a:tailEnd len="med" w="med" type="triangle"/>
+          </a:ln>
+        </p:spPr>
+      </p:cxnSp>
+      <p:cxnSp>
+        <p:nvCxnSpPr>
+          <p:cNvPr id="215" name="Google Shape;215;p26"/>
+          <p:cNvCxnSpPr>
+            <a:stCxn id="213" idx="3"/>
+            <a:endCxn id="206" idx="1"/>
+          </p:cNvCxnSpPr>
+          <p:nvPr/>
+        </p:nvCxnSpPr>
+        <p:spPr>
+          <a:xfrm>
+            <a:off x="5368664" y="1558450"/>
+            <a:ext cx="685200" cy="482100"/>
+          </a:xfrm>
+          <a:prstGeom prst="straightConnector1">
+            <a:avLst/>
+          </a:prstGeom>
+          <a:noFill/>
+          <a:ln cap="flat" cmpd="sng" w="9525">
+            <a:solidFill>
+              <a:schemeClr val="dk2"/>
+            </a:solidFill>
+            <a:prstDash val="solid"/>
+            <a:round/>
+            <a:headEnd len="med" w="med" type="none"/>
+            <a:tailEnd len="med" w="med" type="triangle"/>
+          </a:ln>
+        </p:spPr>
+      </p:cxnSp>
+      <p:cxnSp>
+        <p:nvCxnSpPr>
+          <p:cNvPr id="216" name="Google Shape;216;p26"/>
+          <p:cNvCxnSpPr>
+            <a:stCxn id="204" idx="3"/>
+            <a:endCxn id="210" idx="1"/>
+          </p:cNvCxnSpPr>
+          <p:nvPr/>
+        </p:nvCxnSpPr>
+        <p:spPr>
+          <a:xfrm flipH="1" rot="10800000">
+            <a:off x="2828914" y="1558525"/>
+            <a:ext cx="475800" cy="812400"/>
+          </a:xfrm>
+          <a:prstGeom prst="straightConnector1">
+            <a:avLst/>
+          </a:prstGeom>
+          <a:noFill/>
+          <a:ln cap="flat" cmpd="sng" w="9525">
+            <a:solidFill>
+              <a:schemeClr val="dk2"/>
+            </a:solidFill>
+            <a:prstDash val="solid"/>
+            <a:round/>
+            <a:headEnd len="med" w="med" type="none"/>
+            <a:tailEnd len="med" w="med" type="triangle"/>
+          </a:ln>
+        </p:spPr>
+      </p:cxnSp>
+      <p:cxnSp>
+        <p:nvCxnSpPr>
+          <p:cNvPr id="217" name="Google Shape;217;p26"/>
+          <p:cNvCxnSpPr>
+            <a:stCxn id="206" idx="3"/>
+            <a:endCxn id="218" idx="1"/>
+          </p:cNvCxnSpPr>
+          <p:nvPr/>
+        </p:nvCxnSpPr>
+        <p:spPr>
+          <a:xfrm>
+            <a:off x="6969914" y="2040475"/>
+            <a:ext cx="529500" cy="0"/>
+          </a:xfrm>
+          <a:prstGeom prst="straightConnector1">
+            <a:avLst/>
+          </a:prstGeom>
+          <a:noFill/>
+          <a:ln cap="flat" cmpd="sng" w="9525">
+            <a:solidFill>
+              <a:schemeClr val="dk2"/>
+            </a:solidFill>
+            <a:prstDash val="solid"/>
+            <a:round/>
+            <a:headEnd len="med" w="med" type="none"/>
+            <a:tailEnd len="med" w="med" type="triangle"/>
+          </a:ln>
+        </p:spPr>
+      </p:cxnSp>
+      <p:sp>
+        <p:nvSpPr>
+          <p:cNvPr id="218" name="Google Shape;218;p26"/>
+          <p:cNvSpPr/>
+          <p:nvPr/>
+        </p:nvSpPr>
+        <p:spPr>
+          <a:xfrm>
+            <a:off x="7499512" y="1869025"/>
+            <a:ext cx="437100" cy="342900"/>
+          </a:xfrm>
+          <a:prstGeom prst="rect">
+            <a:avLst/>
+          </a:prstGeom>
+          <a:solidFill>
+            <a:schemeClr val="lt2"/>
+          </a:solidFill>
+          <a:ln cap="flat" cmpd="sng" w="9525">
+            <a:solidFill>
+              <a:schemeClr val="dk2"/>
+            </a:solidFill>
+            <a:prstDash val="solid"/>
+            <a:round/>
+            <a:headEnd len="sm" w="sm" type="none"/>
+            <a:tailEnd len="sm" w="sm" type="none"/>
+          </a:ln>
+        </p:spPr>
+        <p:txBody>
+          <a:bodyPr anchorCtr="0" anchor="ctr" bIns="91425" lIns="91425" spcFirstLastPara="1" rIns="91425" wrap="square" tIns="91425">
+            <a:noAutofit/>
+          </a:bodyPr>
+          <a:lstStyle/>
+          <a:p>
+            <a:pPr indent="0" lvl="0" marL="0" rtl="0" algn="ctr">
+              <a:spcBef>
+                <a:spcPts val="0"/>
+              </a:spcBef>
+              <a:spcAft>
+                <a:spcPts val="0"/>
+              </a:spcAft>
+              <a:buNone/>
+            </a:pPr>
+            <a:r>
+              <a:rPr lang="en"/>
+              <a:t>y</a:t>
+            </a:r>
+            <a:endParaRPr/>
+          </a:p>
+        </p:txBody>
+      </p:sp>
+      <p:sp>
+        <p:nvSpPr>
+          <p:cNvPr id="219" name="Google Shape;219;p26"/>
+          <p:cNvSpPr txBox="1"/>
+          <p:nvPr/>
+        </p:nvSpPr>
+        <p:spPr>
+          <a:xfrm>
+            <a:off x="2568626" y="3183400"/>
+            <a:ext cx="5021100" cy="384900"/>
+          </a:xfrm>
+          <a:prstGeom prst="rect">
+            <a:avLst/>
+          </a:prstGeom>
+          <a:noFill/>
+          <a:ln>
+            <a:noFill/>
+          </a:ln>
+        </p:spPr>
+        <p:txBody>
+          <a:bodyPr anchorCtr="0" anchor="t" bIns="91425" lIns="91425" spcFirstLastPara="1" rIns="91425" wrap="square" tIns="91425">
+            <a:spAutoFit/>
+          </a:bodyPr>
+          <a:lstStyle/>
+          <a:p>
+            <a:pPr indent="0" lvl="0" marL="0" rtl="0" algn="l">
+              <a:spcBef>
+                <a:spcPts val="0"/>
+              </a:spcBef>
+              <a:spcAft>
+                <a:spcPts val="0"/>
+              </a:spcAft>
+              <a:buNone/>
+            </a:pPr>
+            <a:r>
+              <a:rPr lang="en" sz="1300">
+                <a:solidFill>
+                  <a:schemeClr val="dk2"/>
+                </a:solidFill>
+              </a:rPr>
+              <a:t>This is the interesting part! </a:t>
+            </a:r>
+            <a:r>
+              <a:rPr lang="en" sz="1300">
+                <a:solidFill>
+                  <a:schemeClr val="dk2"/>
+                </a:solidFill>
+              </a:rPr>
+              <a:t>g</a:t>
+            </a:r>
+            <a:r>
+              <a:rPr lang="en" sz="1300">
+                <a:solidFill>
+                  <a:schemeClr val="dk2"/>
+                </a:solidFill>
+              </a:rPr>
+              <a:t>1 gets gradients from f2 and g2</a:t>
+            </a:r>
+            <a:endParaRPr sz="1300">
+              <a:solidFill>
+                <a:schemeClr val="dk2"/>
+              </a:solidFill>
+            </a:endParaRPr>
+          </a:p>
+        </p:txBody>
+      </p:sp>
+      <p:cxnSp>
+        <p:nvCxnSpPr>
+          <p:cNvPr id="220" name="Google Shape;220;p26"/>
+          <p:cNvCxnSpPr/>
+          <p:nvPr/>
+        </p:nvCxnSpPr>
+        <p:spPr>
+          <a:xfrm flipH="1">
+            <a:off x="1557389" y="3452600"/>
+            <a:ext cx="1051800" cy="578100"/>
+          </a:xfrm>
+          <a:prstGeom prst="straightConnector1">
+            <a:avLst/>
+          </a:prstGeom>
+          <a:noFill/>
+          <a:ln cap="flat" cmpd="sng" w="9525">
+            <a:solidFill>
+              <a:schemeClr val="dk2"/>
+            </a:solidFill>
+            <a:prstDash val="solid"/>
+            <a:round/>
+            <a:headEnd len="med" w="med" type="none"/>
+            <a:tailEnd len="med" w="med" type="triangle"/>
+          </a:ln>
+        </p:spPr>
+      </p:cxnSp>
+      <p:sp>
+        <p:nvSpPr>
+          <p:cNvPr id="221" name="Google Shape;221;p26"/>
+          <p:cNvSpPr txBox="1"/>
+          <p:nvPr/>
+        </p:nvSpPr>
+        <p:spPr>
+          <a:xfrm>
+            <a:off x="4401150" y="4752075"/>
+            <a:ext cx="2780100" cy="369300"/>
+          </a:xfrm>
+          <a:prstGeom prst="rect">
+            <a:avLst/>
+          </a:prstGeom>
+          <a:noFill/>
+          <a:ln>
+            <a:noFill/>
+          </a:ln>
+        </p:spPr>
+        <p:txBody>
+          <a:bodyPr anchorCtr="0" anchor="t" bIns="91425" lIns="91425" spcFirstLastPara="1" rIns="91425" wrap="square" tIns="91425">
+            <a:spAutoFit/>
+          </a:bodyPr>
+          <a:lstStyle/>
+          <a:p>
+            <a:pPr indent="0" lvl="0" marL="0" rtl="0" algn="l">
+              <a:spcBef>
+                <a:spcPts val="0"/>
+              </a:spcBef>
+              <a:spcAft>
+                <a:spcPts val="0"/>
+              </a:spcAft>
+              <a:buNone/>
+            </a:pPr>
+            <a:r>
+              <a:rPr lang="en" sz="1200">
+                <a:solidFill>
+                  <a:schemeClr val="dk2"/>
+                </a:solidFill>
+              </a:rPr>
+              <a:t>See: chain_rule</a:t>
+            </a:r>
+            <a:r>
+              <a:rPr lang="en" sz="1200">
+                <a:solidFill>
+                  <a:schemeClr val="dk2"/>
+                </a:solidFill>
+              </a:rPr>
+              <a:t>.py</a:t>
+            </a:r>
+            <a:endParaRPr sz="1200">
+              <a:solidFill>
+                <a:schemeClr val="dk2"/>
+              </a:solidFill>
+            </a:endParaRPr>
           </a:p>
         </p:txBody>
       </p:sp>
       <p:pic>
         <p:nvPicPr>
-          <p:cNvPr descr="{&quot;backgroundColorModified&quot;:false,&quot;id&quot;:&quot;9&quot;,&quot;backgroundColor&quot;:&quot;#FFFFFF&quot;,&quot;aid&quot;:null,&quot;font&quot;:{&quot;family&quot;:&quot;Arial&quot;,&quot;size&quot;:16,&quot;color&quot;:&quot;#595959&quot;},&quot;type&quot;:&quot;lalign*&quot;,&quot;code&quot;:&quot;\\begin{lalign*}\n&amp;{\\text{If}\\;y=f\\left(x\\right),\\;}\\\\\n&amp;{\\text{find}\\;f\\,\\text{that}\\;\\text{minimizes}\\;\\text{L(y)}}\t\n\\end{lalign*}&quot;,&quot;ts&quot;:1753561656433,&quot;cs&quot;:&quot;yTReRyOOxMTbp80idXCI2Q==&quot;,&quot;size&quot;:{&quot;width&quot;:281.25,&quot;height&quot;:57.75000000000002}}" id="215" name="Google Shape;215;p26"/>
+          <p:cNvPr descr="{&quot;font&quot;:{&quot;color&quot;:&quot;#000000&quot;,&quot;size&quot;:8,&quot;family&quot;:&quot;Arial&quot;},&quot;id&quot;:&quot;19&quot;,&quot;backgroundColor&quot;:&quot;#FFFFFF&quot;,&quot;aid&quot;:null,&quot;backgroundColorModified&quot;:false,&quot;code&quot;:&quot;\\begin{lalign*}\n&amp;{h\\,=\\,\\frac{\\sin \\left(x^{2}+1/x\\right)}{\\log_{}\\left(1/x\\right)}}\\\\\n&amp;{\\diff{h}{g_{2}}=-\\frac{f_{3}}{g_{2}^{2}},\\diff{h}{f_{3}}=\\frac{1}{g_{2}}}\\\\\n&amp;{\\diff{f_{3}}{f_{2}}=\\cos\\left(f_{2}\\right),\\,\\diff{g_{2}}{g_{1}}=1/g_{1}}\\\\\n&amp;{\\diff{h}{f_{2}}=\\diff{h}{f_{3}}\\diff{f_{3}}{f_{2}}=\\frac{\\cos\\left(f_{2}\\right)}{g_{2}}}\\\\\n&amp;{\\diff{f2}{g1}=1,\\,\\diff{f2}{f1}=1}\\\\\n&amp;{\\diff{h}{g_{1}}=\\diff{h}{f_{2}}\\diff{f_{2}}{g_{1}}+\\diff{h}{g_{2}}\\diff{g_{2}}{g_{1}}=\\frac{\\cos\\left(f_{2}\\right)}{g_{2}}-\\frac{f_{3}}{g_{2}^{2}g_{1}}}\\\\\n&amp;{\\diff{h}{f_{1}}=\\diff{h}{f_{2}}\\diff{f_{2}}{f_{1}}=\\frac{\\cos\\left(f_{2}\\right)}{g_{2}}}\\\\\n&amp;{\\diff{h}{x}=\\diff{h}{f_{1}}\\diff{f_{1}}{x}+\\diff{h}{g_{1}}\\diff{g_{1}}{x}=\\frac{\\cos\\left(f_{2}\\right)}{g_{2}}2x-\\frac{1}{x^{2}}\\left(\\frac{\\cos\\left(f_{2}\\right)}{g_{2}}-\\frac{f_{3}}{g_{2}^{2}g_{1}}\\right)}\t\n\\end{lalign*}&quot;,&quot;type&quot;:&quot;lalign*&quot;,&quot;ts&quot;:1761616207505,&quot;cs&quot;:&quot;N1TgU7MpPUxesRV/e4JKjw==&quot;,&quot;size&quot;:{&quot;width&quot;:362.6666666666667,&quot;height&quot;:275}}" id="222" name="Google Shape;222;p26"/>
           <p:cNvPicPr preferRelativeResize="0"/>
           <p:nvPr/>
         </p:nvPicPr>
@@ -9367,36 +10654,8 @@
         </p:blipFill>
         <p:spPr>
           <a:xfrm>
-            <a:off x="364484" y="988025"/>
-            <a:ext cx="2678906" cy="550069"/>
-          </a:xfrm>
-          <a:prstGeom prst="rect">
-            <a:avLst/>
-          </a:prstGeom>
-          <a:noFill/>
-          <a:ln>
-            <a:noFill/>
-          </a:ln>
-        </p:spPr>
-      </p:pic>
-      <p:pic>
-        <p:nvPicPr>
-          <p:cNvPr descr="{&quot;font&quot;:{&quot;size&quot;:24,&quot;family&quot;:&quot;Arial&quot;,&quot;color&quot;:&quot;#000000&quot;},&quot;aid&quot;:null,&quot;backgroundColorModified&quot;:false,&quot;code&quot;:&quot;\\begin{lalign*}\n&amp;{\\text{Let's}\\;\\text{consider}\\;\\text{a}\\;\\text{simple}\\;\\text{function}\\;\\text{}}\\\\\n&amp;{y=ax+b}\\\\\n&amp;{\\text{Here,}\\;a\\;\\text{and}\\;b\\,\\text{are}\\;\\text{the}\\;\\text{function}\\;\\text{parameters}}\\\\\n&amp;{x\\,\\text{is}\\;\\text{the}\\;\\text{indepedent}\\;\\text{variable}}\\\\\n&amp;{y\\,\\text{is}\\;\\text{the}\\;\\text{dependent}\\;\\text{variable}}\\\\\n&amp;{\\text{There}\\;\\text{are}\\;\\text{two}\\;\\text{types}\\;\\text{of}\\;\\text{problems}\\;\\text{we}\\;\\text{can}\\;\\text{pose}}\\\\\n&amp;{1.\\,\\text{Solve}\\;\\text{for}\\;x:\\,\\text{For}\\;\\text{a}\\;\\text{given}\\;\\text{y,}\\;a\\,\\text{and}\\;b,\\,\\text{find}\\;x}\\\\\n&amp;{2.\\,\\text{Given}\\;\\text{some}\\;x\\,\\text{and}\\;y,\\,\\text{find}\\;a\\,\\text{and}\\;b}\t\n\\end{lalign*}&quot;,&quot;backgroundColor&quot;:&quot;#FFFFFF&quot;,&quot;id&quot;:&quot;12&quot;,&quot;type&quot;:&quot;lalign*&quot;,&quot;ts&quot;:1753756039838,&quot;cs&quot;:&quot;unEBo9Ze5PUYjDHHVFcaEw==&quot;,&quot;size&quot;:{&quot;width&quot;:725.5,&quot;height&quot;:376}}" id="216" name="Google Shape;216;p26"/>
-          <p:cNvPicPr preferRelativeResize="0"/>
-          <p:nvPr/>
-        </p:nvPicPr>
-        <p:blipFill>
-          <a:blip r:embed="rId4">
-            <a:alphaModFix/>
-          </a:blip>
-          <a:stretch>
-            <a:fillRect/>
-          </a:stretch>
-        </p:blipFill>
-        <p:spPr>
-          <a:xfrm>
-            <a:off x="299975" y="1736375"/>
-            <a:ext cx="5161925" cy="2675225"/>
+            <a:off x="98375" y="2504125"/>
+            <a:ext cx="3454400" cy="2619375"/>
           </a:xfrm>
           <a:prstGeom prst="rect">
             <a:avLst/>
@@ -9420,7 +10679,7 @@
   <p:cSld>
     <p:spTree>
       <p:nvGrpSpPr>
-        <p:cNvPr id="220" name="Shape 220"/>
+        <p:cNvPr id="226" name="Shape 226"/>
         <p:cNvGrpSpPr/>
         <p:nvPr/>
       </p:nvGrpSpPr>
@@ -9434,7 +10693,7 @@
       </p:grpSpPr>
       <p:sp>
         <p:nvSpPr>
-          <p:cNvPr id="221" name="Google Shape;221;p27"/>
+          <p:cNvPr id="227" name="Google Shape;227;p27"/>
           <p:cNvSpPr txBox="1"/>
           <p:nvPr>
             <p:ph idx="4294967295" type="title"/>
@@ -9442,7 +10701,7 @@
         </p:nvSpPr>
         <p:spPr>
           <a:xfrm>
-            <a:off x="259350" y="157250"/>
+            <a:off x="311700" y="445025"/>
             <a:ext cx="8520600" cy="572700"/>
           </a:xfrm>
           <a:prstGeom prst="rect">
@@ -9466,7 +10725,7 @@
             </a:pPr>
             <a:r>
               <a:rPr lang="en"/>
-              <a:t>Let’s come back to the optimization problem</a:t>
+              <a:t>Partial Derivatives: Chain Rule</a:t>
             </a:r>
             <a:endParaRPr/>
           </a:p>
@@ -9474,14 +10733,14 @@
       </p:sp>
       <p:sp>
         <p:nvSpPr>
-          <p:cNvPr id="222" name="Google Shape;222;p27"/>
+          <p:cNvPr id="228" name="Google Shape;228;p27"/>
           <p:cNvSpPr txBox="1"/>
           <p:nvPr/>
         </p:nvSpPr>
         <p:spPr>
           <a:xfrm>
-            <a:off x="367400" y="901325"/>
-            <a:ext cx="5932200" cy="461700"/>
+            <a:off x="1604770" y="2508191"/>
+            <a:ext cx="6747300" cy="738900"/>
           </a:xfrm>
           <a:prstGeom prst="rect">
             <a:avLst/>
@@ -9507,12 +10766,7 @@
               <a:buNone/>
             </a:pPr>
             <a:r>
-              <a:rPr lang="en" sz="1800">
-                <a:solidFill>
-                  <a:schemeClr val="dk2"/>
-                </a:solidFill>
-              </a:rPr>
-              <a:t>Optimization deals with problem 2.  </a:t>
+              <a:t/>
             </a:r>
             <a:endParaRPr sz="1800">
               <a:solidFill>
@@ -9520,18 +10774,37 @@
               </a:solidFill>
             </a:endParaRPr>
           </a:p>
+          <a:p>
+            <a:pPr indent="0" lvl="0" marL="457200" rtl="0" algn="l">
+              <a:spcBef>
+                <a:spcPts val="0"/>
+              </a:spcBef>
+              <a:spcAft>
+                <a:spcPts val="0"/>
+              </a:spcAft>
+              <a:buNone/>
+            </a:pPr>
+            <a:r>
+              <a:t/>
+            </a:r>
+            <a:endParaRPr sz="1800">
+              <a:solidFill>
+                <a:schemeClr val="dk2"/>
+              </a:solidFill>
+            </a:endParaRPr>
+          </a:p>
         </p:txBody>
       </p:sp>
       <p:sp>
         <p:nvSpPr>
-          <p:cNvPr id="223" name="Google Shape;223;p27"/>
+          <p:cNvPr id="229" name="Google Shape;229;p27"/>
           <p:cNvSpPr txBox="1"/>
           <p:nvPr/>
         </p:nvSpPr>
         <p:spPr>
           <a:xfrm>
-            <a:off x="367400" y="1382625"/>
-            <a:ext cx="5932200" cy="738900"/>
+            <a:off x="385025" y="1037588"/>
+            <a:ext cx="7137900" cy="585000"/>
           </a:xfrm>
           <a:prstGeom prst="rect">
             <a:avLst/>
@@ -9557,14 +10830,14 @@
               <a:buNone/>
             </a:pPr>
             <a:r>
-              <a:rPr lang="en" sz="1800">
+              <a:rPr lang="en" sz="1300">
                 <a:solidFill>
                   <a:schemeClr val="dk2"/>
                 </a:solidFill>
               </a:rPr>
-              <a:t>Let’s consider an example </a:t>
-            </a:r>
-            <a:endParaRPr sz="1800">
+              <a:t>Multivariate case</a:t>
+            </a:r>
+            <a:endParaRPr sz="1300">
               <a:solidFill>
                 <a:schemeClr val="dk2"/>
               </a:solidFill>
@@ -9583,7 +10856,7 @@
             <a:r>
               <a:t/>
             </a:r>
-            <a:endParaRPr sz="1800">
+            <a:endParaRPr sz="1300">
               <a:solidFill>
                 <a:schemeClr val="dk2"/>
               </a:solidFill>
@@ -9591,9 +10864,403 @@
           </a:p>
         </p:txBody>
       </p:sp>
+      <p:sp>
+        <p:nvSpPr>
+          <p:cNvPr id="230" name="Google Shape;230;p27"/>
+          <p:cNvSpPr/>
+          <p:nvPr/>
+        </p:nvSpPr>
+        <p:spPr>
+          <a:xfrm>
+            <a:off x="2337020" y="2980866"/>
+            <a:ext cx="437100" cy="342900"/>
+          </a:xfrm>
+          <a:prstGeom prst="rect">
+            <a:avLst/>
+          </a:prstGeom>
+          <a:solidFill>
+            <a:schemeClr val="lt2"/>
+          </a:solidFill>
+          <a:ln cap="flat" cmpd="sng" w="9525">
+            <a:solidFill>
+              <a:schemeClr val="dk2"/>
+            </a:solidFill>
+            <a:prstDash val="solid"/>
+            <a:round/>
+            <a:headEnd len="sm" w="sm" type="none"/>
+            <a:tailEnd len="sm" w="sm" type="none"/>
+          </a:ln>
+        </p:spPr>
+        <p:txBody>
+          <a:bodyPr anchorCtr="0" anchor="ctr" bIns="91425" lIns="91425" spcFirstLastPara="1" rIns="91425" wrap="square" tIns="91425">
+            <a:noAutofit/>
+          </a:bodyPr>
+          <a:lstStyle/>
+          <a:p>
+            <a:pPr indent="0" lvl="0" marL="0" rtl="0" algn="ctr">
+              <a:spcBef>
+                <a:spcPts val="0"/>
+              </a:spcBef>
+              <a:spcAft>
+                <a:spcPts val="0"/>
+              </a:spcAft>
+              <a:buNone/>
+            </a:pPr>
+            <a:r>
+              <a:rPr lang="en"/>
+              <a:t>x</a:t>
+            </a:r>
+            <a:endParaRPr/>
+          </a:p>
+        </p:txBody>
+      </p:sp>
+      <p:sp>
+        <p:nvSpPr>
+          <p:cNvPr id="231" name="Google Shape;231;p27"/>
+          <p:cNvSpPr/>
+          <p:nvPr/>
+        </p:nvSpPr>
+        <p:spPr>
+          <a:xfrm>
+            <a:off x="3326645" y="2980866"/>
+            <a:ext cx="542100" cy="342900"/>
+          </a:xfrm>
+          <a:prstGeom prst="rect">
+            <a:avLst/>
+          </a:prstGeom>
+          <a:solidFill>
+            <a:schemeClr val="lt2"/>
+          </a:solidFill>
+          <a:ln cap="flat" cmpd="sng" w="9525">
+            <a:solidFill>
+              <a:schemeClr val="dk2"/>
+            </a:solidFill>
+            <a:prstDash val="solid"/>
+            <a:round/>
+            <a:headEnd len="sm" w="sm" type="none"/>
+            <a:tailEnd len="sm" w="sm" type="none"/>
+          </a:ln>
+        </p:spPr>
+        <p:txBody>
+          <a:bodyPr anchorCtr="0" anchor="ctr" bIns="91425" lIns="91425" spcFirstLastPara="1" rIns="91425" wrap="square" tIns="91425">
+            <a:noAutofit/>
+          </a:bodyPr>
+          <a:lstStyle/>
+          <a:p>
+            <a:pPr indent="0" lvl="0" marL="0" rtl="0" algn="ctr">
+              <a:spcBef>
+                <a:spcPts val="0"/>
+              </a:spcBef>
+              <a:spcAft>
+                <a:spcPts val="0"/>
+              </a:spcAft>
+              <a:buNone/>
+            </a:pPr>
+            <a:r>
+              <a:rPr lang="en"/>
+              <a:t>f(x)</a:t>
+            </a:r>
+            <a:endParaRPr/>
+          </a:p>
+        </p:txBody>
+      </p:sp>
+      <p:sp>
+        <p:nvSpPr>
+          <p:cNvPr id="232" name="Google Shape;232;p27"/>
+          <p:cNvSpPr/>
+          <p:nvPr/>
+        </p:nvSpPr>
+        <p:spPr>
+          <a:xfrm>
+            <a:off x="3238270" y="3793341"/>
+            <a:ext cx="718800" cy="342900"/>
+          </a:xfrm>
+          <a:prstGeom prst="rect">
+            <a:avLst/>
+          </a:prstGeom>
+          <a:solidFill>
+            <a:schemeClr val="lt2"/>
+          </a:solidFill>
+          <a:ln cap="flat" cmpd="sng" w="9525">
+            <a:solidFill>
+              <a:schemeClr val="dk2"/>
+            </a:solidFill>
+            <a:prstDash val="solid"/>
+            <a:round/>
+            <a:headEnd len="sm" w="sm" type="none"/>
+            <a:tailEnd len="sm" w="sm" type="none"/>
+          </a:ln>
+        </p:spPr>
+        <p:txBody>
+          <a:bodyPr anchorCtr="0" anchor="ctr" bIns="91425" lIns="91425" spcFirstLastPara="1" rIns="91425" wrap="square" tIns="91425">
+            <a:noAutofit/>
+          </a:bodyPr>
+          <a:lstStyle/>
+          <a:p>
+            <a:pPr indent="0" lvl="0" marL="0" rtl="0" algn="ctr">
+              <a:spcBef>
+                <a:spcPts val="0"/>
+              </a:spcBef>
+              <a:spcAft>
+                <a:spcPts val="0"/>
+              </a:spcAft>
+              <a:buNone/>
+            </a:pPr>
+            <a:r>
+              <a:rPr lang="en"/>
+              <a:t>g(x,y)</a:t>
+            </a:r>
+            <a:endParaRPr/>
+          </a:p>
+        </p:txBody>
+      </p:sp>
+      <p:sp>
+        <p:nvSpPr>
+          <p:cNvPr id="233" name="Google Shape;233;p27"/>
+          <p:cNvSpPr/>
+          <p:nvPr/>
+        </p:nvSpPr>
+        <p:spPr>
+          <a:xfrm>
+            <a:off x="4422020" y="3351491"/>
+            <a:ext cx="1238400" cy="342900"/>
+          </a:xfrm>
+          <a:prstGeom prst="rect">
+            <a:avLst/>
+          </a:prstGeom>
+          <a:solidFill>
+            <a:schemeClr val="lt2"/>
+          </a:solidFill>
+          <a:ln cap="flat" cmpd="sng" w="9525">
+            <a:solidFill>
+              <a:schemeClr val="dk2"/>
+            </a:solidFill>
+            <a:prstDash val="solid"/>
+            <a:round/>
+            <a:headEnd len="sm" w="sm" type="none"/>
+            <a:tailEnd len="sm" w="sm" type="none"/>
+          </a:ln>
+        </p:spPr>
+        <p:txBody>
+          <a:bodyPr anchorCtr="0" anchor="ctr" bIns="91425" lIns="91425" spcFirstLastPara="1" rIns="91425" wrap="square" tIns="91425">
+            <a:noAutofit/>
+          </a:bodyPr>
+          <a:lstStyle/>
+          <a:p>
+            <a:pPr indent="0" lvl="0" marL="0" rtl="0" algn="ctr">
+              <a:spcBef>
+                <a:spcPts val="0"/>
+              </a:spcBef>
+              <a:spcAft>
+                <a:spcPts val="0"/>
+              </a:spcAft>
+              <a:buNone/>
+            </a:pPr>
+            <a:r>
+              <a:rPr lang="en"/>
+              <a:t>h(f(x), g(x,y))</a:t>
+            </a:r>
+            <a:endParaRPr/>
+          </a:p>
+        </p:txBody>
+      </p:sp>
+      <p:sp>
+        <p:nvSpPr>
+          <p:cNvPr id="234" name="Google Shape;234;p27"/>
+          <p:cNvSpPr/>
+          <p:nvPr/>
+        </p:nvSpPr>
+        <p:spPr>
+          <a:xfrm>
+            <a:off x="6129845" y="3351491"/>
+            <a:ext cx="437100" cy="342900"/>
+          </a:xfrm>
+          <a:prstGeom prst="rect">
+            <a:avLst/>
+          </a:prstGeom>
+          <a:solidFill>
+            <a:schemeClr val="lt2"/>
+          </a:solidFill>
+          <a:ln cap="flat" cmpd="sng" w="9525">
+            <a:solidFill>
+              <a:schemeClr val="dk2"/>
+            </a:solidFill>
+            <a:prstDash val="solid"/>
+            <a:round/>
+            <a:headEnd len="sm" w="sm" type="none"/>
+            <a:tailEnd len="sm" w="sm" type="none"/>
+          </a:ln>
+        </p:spPr>
+        <p:txBody>
+          <a:bodyPr anchorCtr="0" anchor="ctr" bIns="91425" lIns="91425" spcFirstLastPara="1" rIns="91425" wrap="square" tIns="91425">
+            <a:noAutofit/>
+          </a:bodyPr>
+          <a:lstStyle/>
+          <a:p>
+            <a:pPr indent="0" lvl="0" marL="0" rtl="0" algn="ctr">
+              <a:spcBef>
+                <a:spcPts val="0"/>
+              </a:spcBef>
+              <a:spcAft>
+                <a:spcPts val="0"/>
+              </a:spcAft>
+              <a:buNone/>
+            </a:pPr>
+            <a:r>
+              <a:rPr lang="en"/>
+              <a:t>y</a:t>
+            </a:r>
+            <a:endParaRPr/>
+          </a:p>
+        </p:txBody>
+      </p:sp>
+      <p:cxnSp>
+        <p:nvCxnSpPr>
+          <p:cNvPr id="235" name="Google Shape;235;p27"/>
+          <p:cNvCxnSpPr>
+            <a:stCxn id="230" idx="3"/>
+            <a:endCxn id="231" idx="1"/>
+          </p:cNvCxnSpPr>
+          <p:nvPr/>
+        </p:nvCxnSpPr>
+        <p:spPr>
+          <a:xfrm>
+            <a:off x="2774120" y="3152316"/>
+            <a:ext cx="552600" cy="0"/>
+          </a:xfrm>
+          <a:prstGeom prst="straightConnector1">
+            <a:avLst/>
+          </a:prstGeom>
+          <a:noFill/>
+          <a:ln cap="flat" cmpd="sng" w="9525">
+            <a:solidFill>
+              <a:schemeClr val="dk2"/>
+            </a:solidFill>
+            <a:prstDash val="solid"/>
+            <a:round/>
+            <a:headEnd len="med" w="med" type="none"/>
+            <a:tailEnd len="med" w="med" type="triangle"/>
+          </a:ln>
+        </p:spPr>
+      </p:cxnSp>
+      <p:cxnSp>
+        <p:nvCxnSpPr>
+          <p:cNvPr id="236" name="Google Shape;236;p27"/>
+          <p:cNvCxnSpPr>
+            <a:stCxn id="230" idx="3"/>
+            <a:endCxn id="232" idx="1"/>
+          </p:cNvCxnSpPr>
+          <p:nvPr/>
+        </p:nvCxnSpPr>
+        <p:spPr>
+          <a:xfrm>
+            <a:off x="2774120" y="3152316"/>
+            <a:ext cx="464100" cy="812400"/>
+          </a:xfrm>
+          <a:prstGeom prst="straightConnector1">
+            <a:avLst/>
+          </a:prstGeom>
+          <a:noFill/>
+          <a:ln cap="flat" cmpd="sng" w="9525">
+            <a:solidFill>
+              <a:schemeClr val="dk2"/>
+            </a:solidFill>
+            <a:prstDash val="solid"/>
+            <a:round/>
+            <a:headEnd len="med" w="med" type="none"/>
+            <a:tailEnd len="med" w="med" type="triangle"/>
+          </a:ln>
+        </p:spPr>
+      </p:cxnSp>
+      <p:cxnSp>
+        <p:nvCxnSpPr>
+          <p:cNvPr id="237" name="Google Shape;237;p27"/>
+          <p:cNvCxnSpPr>
+            <a:stCxn id="231" idx="3"/>
+          </p:cNvCxnSpPr>
+          <p:nvPr/>
+        </p:nvCxnSpPr>
+        <p:spPr>
+          <a:xfrm>
+            <a:off x="3868745" y="3152316"/>
+            <a:ext cx="553200" cy="365400"/>
+          </a:xfrm>
+          <a:prstGeom prst="straightConnector1">
+            <a:avLst/>
+          </a:prstGeom>
+          <a:noFill/>
+          <a:ln cap="flat" cmpd="sng" w="9525">
+            <a:solidFill>
+              <a:schemeClr val="dk2"/>
+            </a:solidFill>
+            <a:prstDash val="solid"/>
+            <a:round/>
+            <a:headEnd len="med" w="med" type="none"/>
+            <a:tailEnd len="med" w="med" type="triangle"/>
+          </a:ln>
+        </p:spPr>
+      </p:cxnSp>
+      <p:cxnSp>
+        <p:nvCxnSpPr>
+          <p:cNvPr id="238" name="Google Shape;238;p27"/>
+          <p:cNvCxnSpPr>
+            <a:stCxn id="232" idx="3"/>
+            <a:endCxn id="233" idx="1"/>
+          </p:cNvCxnSpPr>
+          <p:nvPr/>
+        </p:nvCxnSpPr>
+        <p:spPr>
+          <a:xfrm flipH="1" rot="10800000">
+            <a:off x="3957070" y="3522891"/>
+            <a:ext cx="465000" cy="441900"/>
+          </a:xfrm>
+          <a:prstGeom prst="straightConnector1">
+            <a:avLst/>
+          </a:prstGeom>
+          <a:noFill/>
+          <a:ln cap="flat" cmpd="sng" w="9525">
+            <a:solidFill>
+              <a:schemeClr val="dk2"/>
+            </a:solidFill>
+            <a:prstDash val="solid"/>
+            <a:round/>
+            <a:headEnd len="med" w="med" type="none"/>
+            <a:tailEnd len="med" w="med" type="triangle"/>
+          </a:ln>
+        </p:spPr>
+      </p:cxnSp>
+      <p:cxnSp>
+        <p:nvCxnSpPr>
+          <p:cNvPr id="239" name="Google Shape;239;p27"/>
+          <p:cNvCxnSpPr>
+            <a:stCxn id="233" idx="3"/>
+            <a:endCxn id="234" idx="1"/>
+          </p:cNvCxnSpPr>
+          <p:nvPr/>
+        </p:nvCxnSpPr>
+        <p:spPr>
+          <a:xfrm>
+            <a:off x="5660420" y="3522941"/>
+            <a:ext cx="469500" cy="0"/>
+          </a:xfrm>
+          <a:prstGeom prst="straightConnector1">
+            <a:avLst/>
+          </a:prstGeom>
+          <a:noFill/>
+          <a:ln cap="flat" cmpd="sng" w="9525">
+            <a:solidFill>
+              <a:schemeClr val="dk2"/>
+            </a:solidFill>
+            <a:prstDash val="solid"/>
+            <a:round/>
+            <a:headEnd len="med" w="med" type="none"/>
+            <a:tailEnd len="med" w="med" type="triangle"/>
+          </a:ln>
+        </p:spPr>
+      </p:cxnSp>
       <p:pic>
         <p:nvPicPr>
-          <p:cNvPr descr="{&quot;type&quot;:&quot;lalign*&quot;,&quot;font&quot;:{&quot;color&quot;:&quot;#000000&quot;,&quot;family&quot;:&quot;Arial&quot;,&quot;size&quot;:13.5},&quot;backgroundColorModified&quot;:false,&quot;code&quot;:&quot;\\begin{lalign*}\n&amp;{y=ax+b}\\\\\n&amp;{\\text{say}\\;y=1,\\,x\\,=2}\\\\\n&amp;{\\text{There}\\;\\text{are}\\;\\text{infinite}\\;\\text{number}\\;\\text{of}\\;\\text{solutions}\\;\\text{for}\\;a\\,\\text{and}\\;b}\\\\\n&amp;{\\text{Now}\\;\\text{if}\\;\\text{I}\\;\\text{add}\\;\\text{another}\\;\\text{point,}}\\\\\n&amp;{y\\,=\\,0,\\,x\\,=\\,0}\\\\\n&amp;{\\text{Now}\\;\\text{there}\\;\\text{is}\\;\\text{a}\\;\\text{unique}\\;\\text{solution}\\;\\text{for}\\;a\\,\\text{and}\\;b}\\\\\n&amp;{}\t\n\\end{lalign*}&quot;,&quot;backgroundColor&quot;:&quot;#FFFFFF&quot;,&quot;aid&quot;:null,&quot;id&quot;:&quot;14&quot;,&quot;ts&quot;:1753756745327,&quot;cs&quot;:&quot;L72IIKDiUzu/CwZa4fgLbg==&quot;,&quot;size&quot;:{&quot;width&quot;:461.74019212598427,&quot;height&quot;:161.93959685039368}}" id="224" name="Google Shape;224;p27"/>
+          <p:cNvPr descr="{&quot;aid&quot;:null,&quot;font&quot;:{&quot;family&quot;:&quot;Arial&quot;,&quot;size&quot;:11.5,&quot;color&quot;:&quot;#000000&quot;},&quot;id&quot;:&quot;9&quot;,&quot;type&quot;:&quot;$$&quot;,&quot;backgroundColor&quot;:&quot;#FFFFFF&quot;,&quot;code&quot;:&quot;$$\\pdf{h}{y}=\\pdf{h}{g}\\pdf{g}{y}$$&quot;,&quot;backgroundColorModified&quot;:false,&quot;ts&quot;:1759687964827,&quot;cs&quot;:&quot;Qc8PJV17GmA9R5BlOgzUXQ==&quot;,&quot;size&quot;:{&quot;width&quot;:103.66666666666667,&quot;height&quot;:41.166666666666664}}" id="240" name="Google Shape;240;p27"/>
           <p:cNvPicPr preferRelativeResize="0"/>
           <p:nvPr/>
         </p:nvPicPr>
@@ -9607,8 +11274,8 @@
         </p:blipFill>
         <p:spPr>
           <a:xfrm>
-            <a:off x="442300" y="1940625"/>
-            <a:ext cx="4398075" cy="1542475"/>
+            <a:off x="1190795" y="3768729"/>
+            <a:ext cx="987425" cy="392113"/>
           </a:xfrm>
           <a:prstGeom prst="rect">
             <a:avLst/>
@@ -9619,16 +11286,24 @@
           </a:ln>
         </p:spPr>
       </p:pic>
-      <p:sp>
-        <p:nvSpPr>
-          <p:cNvPr id="225" name="Google Shape;225;p27"/>
-          <p:cNvSpPr txBox="1"/>
+      <p:pic>
+        <p:nvPicPr>
+          <p:cNvPr descr="{&quot;backgroundColor&quot;:&quot;#FFFFFF&quot;,&quot;code&quot;:&quot;$$\\pdf{g}{y}$$&quot;,&quot;id&quot;:&quot;11&quot;,&quot;backgroundColorModified&quot;:false,&quot;font&quot;:{&quot;family&quot;:&quot;Arial&quot;,&quot;size&quot;:10,&quot;color&quot;:&quot;#000000&quot;},&quot;type&quot;:&quot;$$&quot;,&quot;aid&quot;:null,&quot;ts&quot;:1759688055217,&quot;cs&quot;:&quot;7d3QjHgfedczDp+7xAJdCQ==&quot;,&quot;size&quot;:{&quot;width&quot;:19.91999999999999,&quot;height&quot;:36}}" id="241" name="Google Shape;241;p27"/>
+          <p:cNvPicPr preferRelativeResize="0"/>
           <p:nvPr/>
-        </p:nvSpPr>
-        <p:spPr>
-          <a:xfrm>
-            <a:off x="309975" y="3592425"/>
-            <a:ext cx="5932200" cy="1293000"/>
+        </p:nvPicPr>
+        <p:blipFill>
+          <a:blip r:embed="rId4">
+            <a:alphaModFix/>
+          </a:blip>
+          <a:stretch>
+            <a:fillRect/>
+          </a:stretch>
+        </p:blipFill>
+        <p:spPr>
+          <a:xfrm>
+            <a:off x="2911323" y="4066812"/>
+            <a:ext cx="189738" cy="342900"/>
           </a:xfrm>
           <a:prstGeom prst="rect">
             <a:avLst/>
@@ -9638,13 +11313,41 @@
             <a:noFill/>
           </a:ln>
         </p:spPr>
+      </p:pic>
+      <p:sp>
+        <p:nvSpPr>
+          <p:cNvPr id="242" name="Google Shape;242;p27"/>
+          <p:cNvSpPr/>
+          <p:nvPr/>
+        </p:nvSpPr>
+        <p:spPr>
+          <a:xfrm>
+            <a:off x="2337020" y="3793341"/>
+            <a:ext cx="437100" cy="342900"/>
+          </a:xfrm>
+          <a:prstGeom prst="rect">
+            <a:avLst/>
+          </a:prstGeom>
+          <a:solidFill>
+            <a:schemeClr val="lt2"/>
+          </a:solidFill>
+          <a:ln cap="flat" cmpd="sng" w="9525">
+            <a:solidFill>
+              <a:schemeClr val="dk2"/>
+            </a:solidFill>
+            <a:prstDash val="solid"/>
+            <a:round/>
+            <a:headEnd len="sm" w="sm" type="none"/>
+            <a:tailEnd len="sm" w="sm" type="none"/>
+          </a:ln>
+        </p:spPr>
         <p:txBody>
-          <a:bodyPr anchorCtr="0" anchor="t" bIns="91425" lIns="91425" spcFirstLastPara="1" rIns="91425" wrap="square" tIns="91425">
-            <a:spAutoFit/>
+          <a:bodyPr anchorCtr="0" anchor="ctr" bIns="91425" lIns="91425" spcFirstLastPara="1" rIns="91425" wrap="square" tIns="91425">
+            <a:noAutofit/>
           </a:bodyPr>
           <a:lstStyle/>
           <a:p>
-            <a:pPr indent="0" lvl="0" marL="0" rtl="0" algn="l">
+            <a:pPr indent="0" lvl="0" marL="0" rtl="0" algn="ctr">
               <a:spcBef>
                 <a:spcPts val="0"/>
               </a:spcBef>
@@ -9654,96 +11357,210 @@
               <a:buNone/>
             </a:pPr>
             <a:r>
-              <a:rPr lang="en" sz="1800">
-                <a:solidFill>
-                  <a:schemeClr val="dk2"/>
-                </a:solidFill>
-              </a:rPr>
-              <a:t>What if there are several points? Now, the best we can do is to find </a:t>
-            </a:r>
-            <a:r>
-              <a:rPr i="1" lang="en" sz="1800">
-                <a:solidFill>
-                  <a:schemeClr val="dk2"/>
-                </a:solidFill>
-              </a:rPr>
-              <a:t>a </a:t>
-            </a:r>
-            <a:r>
-              <a:rPr lang="en" sz="1800">
-                <a:solidFill>
-                  <a:schemeClr val="dk2"/>
-                </a:solidFill>
-              </a:rPr>
-              <a:t>and </a:t>
-            </a:r>
-            <a:r>
-              <a:rPr i="1" lang="en" sz="1800">
-                <a:solidFill>
-                  <a:schemeClr val="dk2"/>
-                </a:solidFill>
-              </a:rPr>
-              <a:t>b </a:t>
-            </a:r>
-            <a:r>
-              <a:rPr lang="en" sz="1800">
-                <a:solidFill>
-                  <a:schemeClr val="dk2"/>
-                </a:solidFill>
-              </a:rPr>
-              <a:t>that minimize some distance metric between the points and the line defined by </a:t>
-            </a:r>
-            <a:r>
-              <a:rPr i="1" lang="en" sz="1800">
-                <a:solidFill>
-                  <a:schemeClr val="dk2"/>
-                </a:solidFill>
-              </a:rPr>
-              <a:t>a </a:t>
-            </a:r>
-            <a:r>
-              <a:rPr lang="en" sz="1800">
-                <a:solidFill>
-                  <a:schemeClr val="dk2"/>
-                </a:solidFill>
-              </a:rPr>
-              <a:t>and </a:t>
-            </a:r>
-            <a:r>
-              <a:rPr i="1" lang="en" sz="1800">
-                <a:solidFill>
-                  <a:schemeClr val="dk2"/>
-                </a:solidFill>
-              </a:rPr>
-              <a:t>b</a:t>
-            </a:r>
-            <a:endParaRPr sz="1800">
-              <a:solidFill>
-                <a:schemeClr val="dk2"/>
-              </a:solidFill>
-            </a:endParaRPr>
-          </a:p>
-          <a:p>
-            <a:pPr indent="0" lvl="0" marL="0" rtl="0" algn="l">
-              <a:spcBef>
-                <a:spcPts val="0"/>
-              </a:spcBef>
-              <a:spcAft>
-                <a:spcPts val="0"/>
-              </a:spcAft>
-              <a:buNone/>
-            </a:pPr>
-            <a:r>
-              <a:t/>
-            </a:r>
-            <a:endParaRPr sz="1800">
-              <a:solidFill>
-                <a:schemeClr val="dk2"/>
-              </a:solidFill>
-            </a:endParaRPr>
+              <a:rPr lang="en"/>
+              <a:t>y</a:t>
+            </a:r>
+            <a:endParaRPr/>
           </a:p>
         </p:txBody>
       </p:sp>
+      <p:cxnSp>
+        <p:nvCxnSpPr>
+          <p:cNvPr id="243" name="Google Shape;243;p27"/>
+          <p:cNvCxnSpPr>
+            <a:stCxn id="242" idx="3"/>
+            <a:endCxn id="232" idx="1"/>
+          </p:cNvCxnSpPr>
+          <p:nvPr/>
+        </p:nvCxnSpPr>
+        <p:spPr>
+          <a:xfrm>
+            <a:off x="2774120" y="3964791"/>
+            <a:ext cx="464100" cy="0"/>
+          </a:xfrm>
+          <a:prstGeom prst="straightConnector1">
+            <a:avLst/>
+          </a:prstGeom>
+          <a:noFill/>
+          <a:ln cap="flat" cmpd="sng" w="9525">
+            <a:solidFill>
+              <a:schemeClr val="dk2"/>
+            </a:solidFill>
+            <a:prstDash val="solid"/>
+            <a:round/>
+            <a:headEnd len="med" w="med" type="none"/>
+            <a:tailEnd len="med" w="med" type="triangle"/>
+          </a:ln>
+        </p:spPr>
+      </p:cxnSp>
+      <p:pic>
+        <p:nvPicPr>
+          <p:cNvPr descr="{&quot;font&quot;:{&quot;size&quot;:11.5,&quot;family&quot;:&quot;Arial&quot;,&quot;color&quot;:&quot;#000000&quot;},&quot;backgroundColorModified&quot;:false,&quot;backgroundColor&quot;:&quot;#FFFFFF&quot;,&quot;id&quot;:&quot;9&quot;,&quot;code&quot;:&quot;$$\\pdf{h}{g}$$&quot;,&quot;type&quot;:&quot;$$&quot;,&quot;aid&quot;:null,&quot;ts&quot;:1759687993613,&quot;cs&quot;:&quot;dCXzNT7L6Cjy9szm1NfC2Q==&quot;,&quot;size&quot;:{&quot;width&quot;:24.333333333333332,&quot;height&quot;:41.166666666666664}}" id="244" name="Google Shape;244;p27"/>
+          <p:cNvPicPr preferRelativeResize="0"/>
+          <p:nvPr/>
+        </p:nvPicPr>
+        <p:blipFill>
+          <a:blip r:embed="rId5">
+            <a:alphaModFix/>
+          </a:blip>
+          <a:stretch>
+            <a:fillRect/>
+          </a:stretch>
+        </p:blipFill>
+        <p:spPr>
+          <a:xfrm>
+            <a:off x="4190295" y="3768729"/>
+            <a:ext cx="231775" cy="392113"/>
+          </a:xfrm>
+          <a:prstGeom prst="rect">
+            <a:avLst/>
+          </a:prstGeom>
+          <a:noFill/>
+          <a:ln>
+            <a:noFill/>
+          </a:ln>
+        </p:spPr>
+      </p:pic>
+      <p:pic>
+        <p:nvPicPr>
+          <p:cNvPr descr="{&quot;code&quot;:&quot;$$\\pdf{h}{f}$$&quot;,&quot;aid&quot;:null,&quot;backgroundColor&quot;:&quot;#FFFFFF&quot;,&quot;backgroundColorModified&quot;:false,&quot;id&quot;:&quot;9&quot;,&quot;type&quot;:&quot;$$&quot;,&quot;font&quot;:{&quot;family&quot;:&quot;Arial&quot;,&quot;size&quot;:11.5,&quot;color&quot;:&quot;#000000&quot;},&quot;ts&quot;:1759688077455,&quot;cs&quot;:&quot;Ru/TbM+nOZyykFFW/A2RKQ==&quot;,&quot;size&quot;:{&quot;width&quot;:24.333333333333332,&quot;height&quot;:41.166666666666664}}" id="245" name="Google Shape;245;p27"/>
+          <p:cNvPicPr preferRelativeResize="0"/>
+          <p:nvPr/>
+        </p:nvPicPr>
+        <p:blipFill>
+          <a:blip r:embed="rId6">
+            <a:alphaModFix/>
+          </a:blip>
+          <a:stretch>
+            <a:fillRect/>
+          </a:stretch>
+        </p:blipFill>
+        <p:spPr>
+          <a:xfrm>
+            <a:off x="4108345" y="2900604"/>
+            <a:ext cx="231775" cy="392113"/>
+          </a:xfrm>
+          <a:prstGeom prst="rect">
+            <a:avLst/>
+          </a:prstGeom>
+          <a:noFill/>
+          <a:ln>
+            <a:noFill/>
+          </a:ln>
+        </p:spPr>
+      </p:pic>
+      <p:pic>
+        <p:nvPicPr>
+          <p:cNvPr descr="{&quot;font&quot;:{&quot;family&quot;:&quot;Arial&quot;,&quot;color&quot;:&quot;#000000&quot;,&quot;size&quot;:10},&quot;code&quot;:&quot;$$\\pdf{h}{g}\\pdf{g}{x}$$&quot;,&quot;backgroundColorModified&quot;:false,&quot;type&quot;:&quot;$$&quot;,&quot;aid&quot;:null,&quot;backgroundColor&quot;:&quot;#FFFFFF&quot;,&quot;id&quot;:&quot;9&quot;,&quot;ts&quot;:1759688173091,&quot;cs&quot;:&quot;Pm59d0r0uGzPNNWgCgxrqQ==&quot;,&quot;size&quot;:{&quot;width&quot;:46.05521679790025,&quot;height&quot;:36.00002309711285}}" id="246" name="Google Shape;246;p27"/>
+          <p:cNvPicPr preferRelativeResize="0"/>
+          <p:nvPr/>
+        </p:nvPicPr>
+        <p:blipFill>
+          <a:blip r:embed="rId7">
+            <a:alphaModFix/>
+          </a:blip>
+          <a:stretch>
+            <a:fillRect/>
+          </a:stretch>
+        </p:blipFill>
+        <p:spPr>
+          <a:xfrm>
+            <a:off x="3046793" y="3348766"/>
+            <a:ext cx="438676" cy="342900"/>
+          </a:xfrm>
+          <a:prstGeom prst="rect">
+            <a:avLst/>
+          </a:prstGeom>
+          <a:noFill/>
+          <a:ln>
+            <a:noFill/>
+          </a:ln>
+        </p:spPr>
+      </p:pic>
+      <p:pic>
+        <p:nvPicPr>
+          <p:cNvPr descr="{&quot;code&quot;:&quot;$$\\pdf{h}{f}\\pdf{f}{x}$$&quot;,&quot;aid&quot;:null,&quot;backgroundColor&quot;:&quot;#FFFFFF&quot;,&quot;type&quot;:&quot;$$&quot;,&quot;font&quot;:{&quot;color&quot;:&quot;#000000&quot;,&quot;family&quot;:&quot;Arial&quot;,&quot;size&quot;:10},&quot;id&quot;:&quot;9&quot;,&quot;backgroundColorModified&quot;:false,&quot;ts&quot;:1759688199442,&quot;cs&quot;:&quot;iRyEckkOyXXlYqZQXm8qvQ==&quot;,&quot;size&quot;:{&quot;width&quot;:46.00000000000002,&quot;height&quot;:35.83333333333335}}" id="247" name="Google Shape;247;p27"/>
+          <p:cNvPicPr preferRelativeResize="0"/>
+          <p:nvPr/>
+        </p:nvPicPr>
+        <p:blipFill>
+          <a:blip r:embed="rId8">
+            <a:alphaModFix/>
+          </a:blip>
+          <a:stretch>
+            <a:fillRect/>
+          </a:stretch>
+        </p:blipFill>
+        <p:spPr>
+          <a:xfrm>
+            <a:off x="2831305" y="2747880"/>
+            <a:ext cx="438150" cy="341313"/>
+          </a:xfrm>
+          <a:prstGeom prst="rect">
+            <a:avLst/>
+          </a:prstGeom>
+          <a:noFill/>
+          <a:ln>
+            <a:noFill/>
+          </a:ln>
+        </p:spPr>
+      </p:pic>
+      <p:pic>
+        <p:nvPicPr>
+          <p:cNvPr descr="{&quot;backgroundColorModified&quot;:false,&quot;code&quot;:&quot;$$\\pdf{h}{x}=\\pdf{h}{g}\\pdf{g}{x}+\\pdf{h}{f}\\pdf{f}{x}$$&quot;,&quot;aid&quot;:null,&quot;type&quot;:&quot;$$&quot;,&quot;id&quot;:&quot;9&quot;,&quot;font&quot;:{&quot;family&quot;:&quot;Arial&quot;,&quot;size&quot;:11.5,&quot;color&quot;:&quot;#000000&quot;},&quot;backgroundColor&quot;:&quot;#FFFFFF&quot;,&quot;ts&quot;:1759688245069,&quot;cs&quot;:&quot;UjOpRCzbC4wKd4lYYnBDoQ==&quot;,&quot;size&quot;:{&quot;width&quot;:184,&quot;height&quot;:41.166666666666664}}" id="248" name="Google Shape;248;p27"/>
+          <p:cNvPicPr preferRelativeResize="0"/>
+          <p:nvPr/>
+        </p:nvPicPr>
+        <p:blipFill>
+          <a:blip r:embed="rId9">
+            <a:alphaModFix/>
+          </a:blip>
+          <a:stretch>
+            <a:fillRect/>
+          </a:stretch>
+        </p:blipFill>
+        <p:spPr>
+          <a:xfrm>
+            <a:off x="425620" y="2928688"/>
+            <a:ext cx="1752600" cy="392113"/>
+          </a:xfrm>
+          <a:prstGeom prst="rect">
+            <a:avLst/>
+          </a:prstGeom>
+          <a:noFill/>
+          <a:ln>
+            <a:noFill/>
+          </a:ln>
+        </p:spPr>
+      </p:pic>
+      <p:pic>
+        <p:nvPicPr>
+          <p:cNvPr descr="{&quot;id&quot;:&quot;17&quot;,&quot;backgroundColor&quot;:&quot;#FFFFFF&quot;,&quot;font&quot;:{&quot;family&quot;:&quot;Arial&quot;,&quot;color&quot;:&quot;#000000&quot;,&quot;size&quot;:12},&quot;type&quot;:&quot;gather*&quot;,&quot;aid&quot;:null,&quot;backgroundColorModified&quot;:false,&quot;code&quot;:&quot;\\begin{gather*}\n{\\text{Previously,}\\;y\\,=h\\left(x\\right)\\,\\text{was}\\;\\text{univariate..}\\;\\text{Now}\\;\\text{it}\\;\\text{is}\\;\\text{multivariate}}\\\\\n{y=h\\left(x,y\\right).\\,\\text{Denoting}\\;\\text{the}\\;\\text{vector}\\;\\left[x,y\\right]\\,\\text{as}\\;\\boldsymbol{v}}\\\\\n{\\diff{h}{\\boldsymbol{v}}=\\begin{bmatrix}\n{\\pdf{h}{x}}&amp;{\\pdf{h}{y}}\\\\\n\\end{bmatrix}^{T}}\t\n\\end{gather*}&quot;,&quot;ts&quot;:1760193375282,&quot;cs&quot;:&quot;5xVyaFs5xYessSsTMjKriQ==&quot;,&quot;size&quot;:{&quot;width&quot;:488,&quot;height&quot;:87.66666666666667}}" id="249" name="Google Shape;249;p27"/>
+          <p:cNvPicPr preferRelativeResize="0"/>
+          <p:nvPr/>
+        </p:nvPicPr>
+        <p:blipFill>
+          <a:blip r:embed="rId10">
+            <a:alphaModFix/>
+          </a:blip>
+          <a:stretch>
+            <a:fillRect/>
+          </a:stretch>
+        </p:blipFill>
+        <p:spPr>
+          <a:xfrm>
+            <a:off x="460975" y="1415275"/>
+            <a:ext cx="4648200" cy="835025"/>
+          </a:xfrm>
+          <a:prstGeom prst="rect">
+            <a:avLst/>
+          </a:prstGeom>
+          <a:noFill/>
+          <a:ln>
+            <a:noFill/>
+          </a:ln>
+        </p:spPr>
+      </p:pic>
     </p:spTree>
   </p:cSld>
   <p:clrMapOvr>
@@ -9757,7 +11574,7 @@
   <p:cSld>
     <p:spTree>
       <p:nvGrpSpPr>
-        <p:cNvPr id="229" name="Shape 229"/>
+        <p:cNvPr id="253" name="Shape 253"/>
         <p:cNvGrpSpPr/>
         <p:nvPr/>
       </p:nvGrpSpPr>
@@ -9771,7 +11588,7 @@
       </p:grpSpPr>
       <p:sp>
         <p:nvSpPr>
-          <p:cNvPr id="230" name="Google Shape;230;p28"/>
+          <p:cNvPr id="254" name="Google Shape;254;p28"/>
           <p:cNvSpPr txBox="1"/>
           <p:nvPr>
             <p:ph idx="4294967295" type="title"/>
@@ -9803,110 +11620,15 @@
             </a:pPr>
             <a:r>
               <a:rPr lang="en"/>
-              <a:t>Optimization Example</a:t>
+              <a:t>Linear case</a:t>
             </a:r>
             <a:endParaRPr/>
-          </a:p>
-        </p:txBody>
-      </p:sp>
-      <p:sp>
-        <p:nvSpPr>
-          <p:cNvPr id="231" name="Google Shape;231;p28"/>
-          <p:cNvSpPr txBox="1"/>
-          <p:nvPr/>
-        </p:nvSpPr>
-        <p:spPr>
-          <a:xfrm>
-            <a:off x="381450" y="806388"/>
-            <a:ext cx="3013800" cy="461700"/>
-          </a:xfrm>
-          <a:prstGeom prst="rect">
-            <a:avLst/>
-          </a:prstGeom>
-          <a:noFill/>
-          <a:ln>
-            <a:noFill/>
-          </a:ln>
-        </p:spPr>
-        <p:txBody>
-          <a:bodyPr anchorCtr="0" anchor="t" bIns="91425" lIns="91425" spcFirstLastPara="1" rIns="91425" wrap="square" tIns="91425">
-            <a:spAutoFit/>
-          </a:bodyPr>
-          <a:lstStyle/>
-          <a:p>
-            <a:pPr indent="0" lvl="0" marL="0" rtl="0" algn="l">
-              <a:spcBef>
-                <a:spcPts val="0"/>
-              </a:spcBef>
-              <a:spcAft>
-                <a:spcPts val="0"/>
-              </a:spcAft>
-              <a:buNone/>
-            </a:pPr>
-            <a:r>
-              <a:t/>
-            </a:r>
-            <a:endParaRPr sz="1800">
-              <a:solidFill>
-                <a:schemeClr val="dk2"/>
-              </a:solidFill>
-            </a:endParaRPr>
-          </a:p>
-        </p:txBody>
-      </p:sp>
-      <p:sp>
-        <p:nvSpPr>
-          <p:cNvPr id="232" name="Google Shape;232;p28"/>
-          <p:cNvSpPr txBox="1"/>
-          <p:nvPr/>
-        </p:nvSpPr>
-        <p:spPr>
-          <a:xfrm>
-            <a:off x="381450" y="759275"/>
-            <a:ext cx="3307200" cy="923400"/>
-          </a:xfrm>
-          <a:prstGeom prst="rect">
-            <a:avLst/>
-          </a:prstGeom>
-          <a:noFill/>
-          <a:ln>
-            <a:noFill/>
-          </a:ln>
-        </p:spPr>
-        <p:txBody>
-          <a:bodyPr anchorCtr="0" anchor="t" bIns="91425" lIns="91425" spcFirstLastPara="1" rIns="91425" wrap="square" tIns="91425">
-            <a:spAutoFit/>
-          </a:bodyPr>
-          <a:lstStyle/>
-          <a:p>
-            <a:pPr indent="0" lvl="0" marL="0" rtl="0" algn="l">
-              <a:spcBef>
-                <a:spcPts val="0"/>
-              </a:spcBef>
-              <a:spcAft>
-                <a:spcPts val="0"/>
-              </a:spcAft>
-              <a:buNone/>
-            </a:pPr>
-            <a:r>
-              <a:rPr lang="en" sz="1600">
-                <a:solidFill>
-                  <a:schemeClr val="dk2"/>
-                </a:solidFill>
-              </a:rPr>
-              <a:t>Let’s now use derivatives to solve a common optimization problem.. Linear regression</a:t>
-            </a:r>
-            <a:endParaRPr sz="1600">
-              <a:solidFill>
-                <a:schemeClr val="dk2"/>
-              </a:solidFill>
-            </a:endParaRPr>
           </a:p>
         </p:txBody>
       </p:sp>
       <p:pic>
         <p:nvPicPr>
-          <p:cNvPr id="233" name="Google Shape;233;p28"/>
+          <p:cNvPr descr="{&quot;type&quot;:&quot;lalign*&quot;,&quot;backgroundColor&quot;:&quot;#FFFFFF&quot;,&quot;code&quot;:&quot;\\begin{lalign*}\n&amp;{\\text{Let}\\;\\boldsymbol{x}\\,\\text{and}\\;\\boldsymbol{a}\\,\\text{be}\\;N\\times1\\,\\text{vectors}}\\\\\n&amp;{y=a^{T}x=a_{1}x_{1}+a_{2}x_{2}\\cdots a_{n}x_{n}}\\\\\n&amp;{\\pdf{y}{x_{i}}=a_{i}\\,\\therefore\\pdf{y}{\\boldsymbol{x}}=\\boldsymbol{a\\,}\\,N\\times1\\,\\text{vector}}\t\n\\end{lalign*}&quot;,&quot;backgroundColorModified&quot;:false,&quot;id&quot;:&quot;14&quot;,&quot;aid&quot;:null,&quot;font&quot;:{&quot;family&quot;:&quot;Arial&quot;,&quot;color&quot;:&quot;#000000&quot;,&quot;size&quot;:12},&quot;ts&quot;:1759690899809,&quot;cs&quot;:&quot;NAwmycti0QMIwDAha7kl9Q==&quot;,&quot;size&quot;:{&quot;width&quot;:279.5,&quot;height&quot;:92.5}}" id="255" name="Google Shape;255;p28"/>
           <p:cNvPicPr preferRelativeResize="0"/>
           <p:nvPr/>
         </p:nvPicPr>
@@ -9920,8 +11642,8 @@
         </p:blipFill>
         <p:spPr>
           <a:xfrm>
-            <a:off x="4400000" y="200800"/>
-            <a:ext cx="3672850" cy="4898399"/>
+            <a:off x="376450" y="946450"/>
+            <a:ext cx="3175050" cy="1050775"/>
           </a:xfrm>
           <a:prstGeom prst="rect">
             <a:avLst/>
@@ -9932,9 +11654,719 @@
           </a:ln>
         </p:spPr>
       </p:pic>
+      <p:sp>
+        <p:nvSpPr>
+          <p:cNvPr id="256" name="Google Shape;256;p28"/>
+          <p:cNvSpPr txBox="1"/>
+          <p:nvPr/>
+        </p:nvSpPr>
+        <p:spPr>
+          <a:xfrm>
+            <a:off x="463975" y="4627100"/>
+            <a:ext cx="3000000" cy="369300"/>
+          </a:xfrm>
+          <a:prstGeom prst="rect">
+            <a:avLst/>
+          </a:prstGeom>
+          <a:noFill/>
+          <a:ln>
+            <a:noFill/>
+          </a:ln>
+        </p:spPr>
+        <p:txBody>
+          <a:bodyPr anchorCtr="0" anchor="t" bIns="91425" lIns="91425" spcFirstLastPara="1" rIns="91425" wrap="square" tIns="91425">
+            <a:spAutoFit/>
+          </a:bodyPr>
+          <a:lstStyle/>
+          <a:p>
+            <a:pPr indent="0" lvl="0" marL="0" rtl="0" algn="l">
+              <a:spcBef>
+                <a:spcPts val="0"/>
+              </a:spcBef>
+              <a:spcAft>
+                <a:spcPts val="0"/>
+              </a:spcAft>
+              <a:buNone/>
+            </a:pPr>
+            <a:r>
+              <a:rPr lang="en" sz="1200">
+                <a:solidFill>
+                  <a:schemeClr val="dk2"/>
+                </a:solidFill>
+              </a:rPr>
+              <a:t>See: verify_partial_derivatives.py</a:t>
+            </a:r>
+            <a:endParaRPr/>
+          </a:p>
+        </p:txBody>
+      </p:sp>
+      <p:sp>
+        <p:nvSpPr>
+          <p:cNvPr id="257" name="Google Shape;257;p28"/>
+          <p:cNvSpPr txBox="1"/>
+          <p:nvPr/>
+        </p:nvSpPr>
+        <p:spPr>
+          <a:xfrm>
+            <a:off x="832795" y="2301616"/>
+            <a:ext cx="6747300" cy="738900"/>
+          </a:xfrm>
+          <a:prstGeom prst="rect">
+            <a:avLst/>
+          </a:prstGeom>
+          <a:noFill/>
+          <a:ln>
+            <a:noFill/>
+          </a:ln>
+        </p:spPr>
+        <p:txBody>
+          <a:bodyPr anchorCtr="0" anchor="t" bIns="91425" lIns="91425" spcFirstLastPara="1" rIns="91425" wrap="square" tIns="91425">
+            <a:spAutoFit/>
+          </a:bodyPr>
+          <a:lstStyle/>
+          <a:p>
+            <a:pPr indent="0" lvl="0" marL="0" rtl="0" algn="l">
+              <a:spcBef>
+                <a:spcPts val="0"/>
+              </a:spcBef>
+              <a:spcAft>
+                <a:spcPts val="0"/>
+              </a:spcAft>
+              <a:buNone/>
+            </a:pPr>
+            <a:r>
+              <a:t/>
+            </a:r>
+            <a:endParaRPr sz="1800">
+              <a:solidFill>
+                <a:schemeClr val="dk2"/>
+              </a:solidFill>
+            </a:endParaRPr>
+          </a:p>
+          <a:p>
+            <a:pPr indent="0" lvl="0" marL="457200" rtl="0" algn="l">
+              <a:spcBef>
+                <a:spcPts val="0"/>
+              </a:spcBef>
+              <a:spcAft>
+                <a:spcPts val="0"/>
+              </a:spcAft>
+              <a:buNone/>
+            </a:pPr>
+            <a:r>
+              <a:t/>
+            </a:r>
+            <a:endParaRPr sz="1800">
+              <a:solidFill>
+                <a:schemeClr val="dk2"/>
+              </a:solidFill>
+            </a:endParaRPr>
+          </a:p>
+        </p:txBody>
+      </p:sp>
+      <p:sp>
+        <p:nvSpPr>
+          <p:cNvPr id="258" name="Google Shape;258;p28"/>
+          <p:cNvSpPr/>
+          <p:nvPr/>
+        </p:nvSpPr>
+        <p:spPr>
+          <a:xfrm>
+            <a:off x="1565045" y="2774291"/>
+            <a:ext cx="437100" cy="342900"/>
+          </a:xfrm>
+          <a:prstGeom prst="rect">
+            <a:avLst/>
+          </a:prstGeom>
+          <a:solidFill>
+            <a:schemeClr val="lt2"/>
+          </a:solidFill>
+          <a:ln cap="flat" cmpd="sng" w="9525">
+            <a:solidFill>
+              <a:schemeClr val="dk2"/>
+            </a:solidFill>
+            <a:prstDash val="solid"/>
+            <a:round/>
+            <a:headEnd len="sm" w="sm" type="none"/>
+            <a:tailEnd len="sm" w="sm" type="none"/>
+          </a:ln>
+        </p:spPr>
+        <p:txBody>
+          <a:bodyPr anchorCtr="0" anchor="ctr" bIns="91425" lIns="91425" spcFirstLastPara="1" rIns="91425" wrap="square" tIns="91425">
+            <a:noAutofit/>
+          </a:bodyPr>
+          <a:lstStyle/>
+          <a:p>
+            <a:pPr indent="0" lvl="0" marL="0" rtl="0" algn="ctr">
+              <a:spcBef>
+                <a:spcPts val="0"/>
+              </a:spcBef>
+              <a:spcAft>
+                <a:spcPts val="0"/>
+              </a:spcAft>
+              <a:buNone/>
+            </a:pPr>
+            <a:r>
+              <a:rPr lang="en"/>
+              <a:t>x1</a:t>
+            </a:r>
+            <a:endParaRPr/>
+          </a:p>
+        </p:txBody>
+      </p:sp>
+      <p:sp>
+        <p:nvSpPr>
+          <p:cNvPr id="259" name="Google Shape;259;p28"/>
+          <p:cNvSpPr/>
+          <p:nvPr/>
+        </p:nvSpPr>
+        <p:spPr>
+          <a:xfrm>
+            <a:off x="2554750" y="2763050"/>
+            <a:ext cx="1403100" cy="365400"/>
+          </a:xfrm>
+          <a:prstGeom prst="rect">
+            <a:avLst/>
+          </a:prstGeom>
+          <a:solidFill>
+            <a:schemeClr val="lt2"/>
+          </a:solidFill>
+          <a:ln cap="flat" cmpd="sng" w="9525">
+            <a:solidFill>
+              <a:schemeClr val="dk2"/>
+            </a:solidFill>
+            <a:prstDash val="solid"/>
+            <a:round/>
+            <a:headEnd len="sm" w="sm" type="none"/>
+            <a:tailEnd len="sm" w="sm" type="none"/>
+          </a:ln>
+        </p:spPr>
+        <p:txBody>
+          <a:bodyPr anchorCtr="0" anchor="ctr" bIns="91425" lIns="91425" spcFirstLastPara="1" rIns="91425" wrap="square" tIns="91425">
+            <a:noAutofit/>
+          </a:bodyPr>
+          <a:lstStyle/>
+          <a:p>
+            <a:pPr indent="0" lvl="0" marL="0" rtl="0" algn="ctr">
+              <a:spcBef>
+                <a:spcPts val="0"/>
+              </a:spcBef>
+              <a:spcAft>
+                <a:spcPts val="0"/>
+              </a:spcAft>
+              <a:buNone/>
+            </a:pPr>
+            <a:r>
+              <a:rPr lang="en"/>
+              <a:t>f(x1)=a1 x1</a:t>
+            </a:r>
+            <a:endParaRPr/>
+          </a:p>
+        </p:txBody>
+      </p:sp>
+      <p:sp>
+        <p:nvSpPr>
+          <p:cNvPr id="260" name="Google Shape;260;p28"/>
+          <p:cNvSpPr/>
+          <p:nvPr/>
+        </p:nvSpPr>
+        <p:spPr>
+          <a:xfrm>
+            <a:off x="5139629" y="3271875"/>
+            <a:ext cx="2373600" cy="342900"/>
+          </a:xfrm>
+          <a:prstGeom prst="rect">
+            <a:avLst/>
+          </a:prstGeom>
+          <a:solidFill>
+            <a:schemeClr val="lt2"/>
+          </a:solidFill>
+          <a:ln cap="flat" cmpd="sng" w="9525">
+            <a:solidFill>
+              <a:schemeClr val="dk2"/>
+            </a:solidFill>
+            <a:prstDash val="solid"/>
+            <a:round/>
+            <a:headEnd len="sm" w="sm" type="none"/>
+            <a:tailEnd len="sm" w="sm" type="none"/>
+          </a:ln>
+        </p:spPr>
+        <p:txBody>
+          <a:bodyPr anchorCtr="0" anchor="ctr" bIns="91425" lIns="91425" spcFirstLastPara="1" rIns="91425" wrap="square" tIns="91425">
+            <a:noAutofit/>
+          </a:bodyPr>
+          <a:lstStyle/>
+          <a:p>
+            <a:pPr indent="0" lvl="0" marL="0" rtl="0" algn="ctr">
+              <a:spcBef>
+                <a:spcPts val="0"/>
+              </a:spcBef>
+              <a:spcAft>
+                <a:spcPts val="0"/>
+              </a:spcAft>
+              <a:buNone/>
+            </a:pPr>
+            <a:r>
+              <a:rPr lang="en"/>
+              <a:t>h=f(x1)+f(x2)... f(xn)</a:t>
+            </a:r>
+            <a:endParaRPr/>
+          </a:p>
+        </p:txBody>
+      </p:sp>
+      <p:sp>
+        <p:nvSpPr>
+          <p:cNvPr id="261" name="Google Shape;261;p28"/>
+          <p:cNvSpPr/>
+          <p:nvPr/>
+        </p:nvSpPr>
+        <p:spPr>
+          <a:xfrm>
+            <a:off x="7750245" y="3260641"/>
+            <a:ext cx="437100" cy="342900"/>
+          </a:xfrm>
+          <a:prstGeom prst="rect">
+            <a:avLst/>
+          </a:prstGeom>
+          <a:solidFill>
+            <a:schemeClr val="lt2"/>
+          </a:solidFill>
+          <a:ln cap="flat" cmpd="sng" w="9525">
+            <a:solidFill>
+              <a:schemeClr val="dk2"/>
+            </a:solidFill>
+            <a:prstDash val="solid"/>
+            <a:round/>
+            <a:headEnd len="sm" w="sm" type="none"/>
+            <a:tailEnd len="sm" w="sm" type="none"/>
+          </a:ln>
+        </p:spPr>
+        <p:txBody>
+          <a:bodyPr anchorCtr="0" anchor="ctr" bIns="91425" lIns="91425" spcFirstLastPara="1" rIns="91425" wrap="square" tIns="91425">
+            <a:noAutofit/>
+          </a:bodyPr>
+          <a:lstStyle/>
+          <a:p>
+            <a:pPr indent="0" lvl="0" marL="0" rtl="0" algn="ctr">
+              <a:spcBef>
+                <a:spcPts val="0"/>
+              </a:spcBef>
+              <a:spcAft>
+                <a:spcPts val="0"/>
+              </a:spcAft>
+              <a:buNone/>
+            </a:pPr>
+            <a:r>
+              <a:rPr lang="en"/>
+              <a:t>y</a:t>
+            </a:r>
+            <a:endParaRPr/>
+          </a:p>
+        </p:txBody>
+      </p:sp>
+      <p:cxnSp>
+        <p:nvCxnSpPr>
+          <p:cNvPr id="262" name="Google Shape;262;p28"/>
+          <p:cNvCxnSpPr>
+            <a:stCxn id="258" idx="3"/>
+            <a:endCxn id="259" idx="1"/>
+          </p:cNvCxnSpPr>
+          <p:nvPr/>
+        </p:nvCxnSpPr>
+        <p:spPr>
+          <a:xfrm>
+            <a:off x="2002145" y="2945741"/>
+            <a:ext cx="552600" cy="0"/>
+          </a:xfrm>
+          <a:prstGeom prst="straightConnector1">
+            <a:avLst/>
+          </a:prstGeom>
+          <a:noFill/>
+          <a:ln cap="flat" cmpd="sng" w="9525">
+            <a:solidFill>
+              <a:schemeClr val="dk2"/>
+            </a:solidFill>
+            <a:prstDash val="solid"/>
+            <a:round/>
+            <a:headEnd len="med" w="med" type="none"/>
+            <a:tailEnd len="med" w="med" type="triangle"/>
+          </a:ln>
+        </p:spPr>
+      </p:cxnSp>
+      <p:cxnSp>
+        <p:nvCxnSpPr>
+          <p:cNvPr id="263" name="Google Shape;263;p28"/>
+          <p:cNvCxnSpPr>
+            <a:stCxn id="259" idx="3"/>
+            <a:endCxn id="260" idx="1"/>
+          </p:cNvCxnSpPr>
+          <p:nvPr/>
+        </p:nvCxnSpPr>
+        <p:spPr>
+          <a:xfrm>
+            <a:off x="3957850" y="2945750"/>
+            <a:ext cx="1181700" cy="497700"/>
+          </a:xfrm>
+          <a:prstGeom prst="straightConnector1">
+            <a:avLst/>
+          </a:prstGeom>
+          <a:noFill/>
+          <a:ln cap="flat" cmpd="sng" w="9525">
+            <a:solidFill>
+              <a:schemeClr val="dk2"/>
+            </a:solidFill>
+            <a:prstDash val="solid"/>
+            <a:round/>
+            <a:headEnd len="med" w="med" type="none"/>
+            <a:tailEnd len="med" w="med" type="triangle"/>
+          </a:ln>
+        </p:spPr>
+      </p:cxnSp>
+      <p:cxnSp>
+        <p:nvCxnSpPr>
+          <p:cNvPr id="264" name="Google Shape;264;p28"/>
+          <p:cNvCxnSpPr>
+            <a:stCxn id="265" idx="3"/>
+            <a:endCxn id="260" idx="1"/>
+          </p:cNvCxnSpPr>
+          <p:nvPr/>
+        </p:nvCxnSpPr>
+        <p:spPr>
+          <a:xfrm flipH="1" rot="10800000">
+            <a:off x="3957850" y="3443225"/>
+            <a:ext cx="1181700" cy="525900"/>
+          </a:xfrm>
+          <a:prstGeom prst="straightConnector1">
+            <a:avLst/>
+          </a:prstGeom>
+          <a:noFill/>
+          <a:ln cap="flat" cmpd="sng" w="9525">
+            <a:solidFill>
+              <a:schemeClr val="dk2"/>
+            </a:solidFill>
+            <a:prstDash val="solid"/>
+            <a:round/>
+            <a:headEnd len="med" w="med" type="none"/>
+            <a:tailEnd len="med" w="med" type="triangle"/>
+          </a:ln>
+        </p:spPr>
+      </p:cxnSp>
+      <p:cxnSp>
+        <p:nvCxnSpPr>
+          <p:cNvPr id="266" name="Google Shape;266;p28"/>
+          <p:cNvCxnSpPr>
+            <a:stCxn id="260" idx="3"/>
+            <a:endCxn id="261" idx="1"/>
+          </p:cNvCxnSpPr>
+          <p:nvPr/>
+        </p:nvCxnSpPr>
+        <p:spPr>
+          <a:xfrm flipH="1" rot="10800000">
+            <a:off x="7513229" y="3432225"/>
+            <a:ext cx="237000" cy="11100"/>
+          </a:xfrm>
+          <a:prstGeom prst="straightConnector1">
+            <a:avLst/>
+          </a:prstGeom>
+          <a:noFill/>
+          <a:ln cap="flat" cmpd="sng" w="9525">
+            <a:solidFill>
+              <a:schemeClr val="dk2"/>
+            </a:solidFill>
+            <a:prstDash val="solid"/>
+            <a:round/>
+            <a:headEnd len="med" w="med" type="none"/>
+            <a:tailEnd len="med" w="med" type="triangle"/>
+          </a:ln>
+        </p:spPr>
+      </p:cxnSp>
+      <p:sp>
+        <p:nvSpPr>
+          <p:cNvPr id="267" name="Google Shape;267;p28"/>
+          <p:cNvSpPr/>
+          <p:nvPr/>
+        </p:nvSpPr>
+        <p:spPr>
+          <a:xfrm>
+            <a:off x="1565050" y="3834872"/>
+            <a:ext cx="437100" cy="266100"/>
+          </a:xfrm>
+          <a:prstGeom prst="rect">
+            <a:avLst/>
+          </a:prstGeom>
+          <a:solidFill>
+            <a:schemeClr val="lt2"/>
+          </a:solidFill>
+          <a:ln cap="flat" cmpd="sng" w="9525">
+            <a:solidFill>
+              <a:schemeClr val="dk2"/>
+            </a:solidFill>
+            <a:prstDash val="solid"/>
+            <a:round/>
+            <a:headEnd len="sm" w="sm" type="none"/>
+            <a:tailEnd len="sm" w="sm" type="none"/>
+          </a:ln>
+        </p:spPr>
+        <p:txBody>
+          <a:bodyPr anchorCtr="0" anchor="ctr" bIns="91425" lIns="91425" spcFirstLastPara="1" rIns="91425" wrap="square" tIns="91425">
+            <a:noAutofit/>
+          </a:bodyPr>
+          <a:lstStyle/>
+          <a:p>
+            <a:pPr indent="0" lvl="0" marL="0" rtl="0" algn="ctr">
+              <a:spcBef>
+                <a:spcPts val="0"/>
+              </a:spcBef>
+              <a:spcAft>
+                <a:spcPts val="0"/>
+              </a:spcAft>
+              <a:buNone/>
+            </a:pPr>
+            <a:r>
+              <a:rPr lang="en"/>
+              <a:t>xn</a:t>
+            </a:r>
+            <a:endParaRPr/>
+          </a:p>
+        </p:txBody>
+      </p:sp>
+      <p:cxnSp>
+        <p:nvCxnSpPr>
+          <p:cNvPr id="268" name="Google Shape;268;p28"/>
+          <p:cNvCxnSpPr>
+            <a:stCxn id="267" idx="3"/>
+            <a:endCxn id="265" idx="1"/>
+          </p:cNvCxnSpPr>
+          <p:nvPr/>
+        </p:nvCxnSpPr>
+        <p:spPr>
+          <a:xfrm>
+            <a:off x="2002150" y="3967922"/>
+            <a:ext cx="552600" cy="1200"/>
+          </a:xfrm>
+          <a:prstGeom prst="straightConnector1">
+            <a:avLst/>
+          </a:prstGeom>
+          <a:noFill/>
+          <a:ln cap="flat" cmpd="sng" w="9525">
+            <a:solidFill>
+              <a:schemeClr val="dk2"/>
+            </a:solidFill>
+            <a:prstDash val="solid"/>
+            <a:round/>
+            <a:headEnd len="med" w="med" type="none"/>
+            <a:tailEnd len="med" w="med" type="triangle"/>
+          </a:ln>
+        </p:spPr>
+      </p:cxnSp>
+      <p:sp>
+        <p:nvSpPr>
+          <p:cNvPr id="269" name="Google Shape;269;p28"/>
+          <p:cNvSpPr/>
+          <p:nvPr/>
+        </p:nvSpPr>
+        <p:spPr>
+          <a:xfrm>
+            <a:off x="1565045" y="3266254"/>
+            <a:ext cx="437100" cy="342900"/>
+          </a:xfrm>
+          <a:prstGeom prst="rect">
+            <a:avLst/>
+          </a:prstGeom>
+          <a:solidFill>
+            <a:schemeClr val="lt2"/>
+          </a:solidFill>
+          <a:ln cap="flat" cmpd="sng" w="9525">
+            <a:solidFill>
+              <a:schemeClr val="dk2"/>
+            </a:solidFill>
+            <a:prstDash val="solid"/>
+            <a:round/>
+            <a:headEnd len="sm" w="sm" type="none"/>
+            <a:tailEnd len="sm" w="sm" type="none"/>
+          </a:ln>
+        </p:spPr>
+        <p:txBody>
+          <a:bodyPr anchorCtr="0" anchor="ctr" bIns="91425" lIns="91425" spcFirstLastPara="1" rIns="91425" wrap="square" tIns="91425">
+            <a:noAutofit/>
+          </a:bodyPr>
+          <a:lstStyle/>
+          <a:p>
+            <a:pPr indent="0" lvl="0" marL="0" rtl="0" algn="ctr">
+              <a:spcBef>
+                <a:spcPts val="0"/>
+              </a:spcBef>
+              <a:spcAft>
+                <a:spcPts val="0"/>
+              </a:spcAft>
+              <a:buNone/>
+            </a:pPr>
+            <a:r>
+              <a:rPr lang="en"/>
+              <a:t>x2</a:t>
+            </a:r>
+            <a:endParaRPr/>
+          </a:p>
+        </p:txBody>
+      </p:sp>
+      <p:sp>
+        <p:nvSpPr>
+          <p:cNvPr id="270" name="Google Shape;270;p28"/>
+          <p:cNvSpPr/>
+          <p:nvPr/>
+        </p:nvSpPr>
+        <p:spPr>
+          <a:xfrm>
+            <a:off x="2554750" y="3260625"/>
+            <a:ext cx="1403100" cy="365400"/>
+          </a:xfrm>
+          <a:prstGeom prst="rect">
+            <a:avLst/>
+          </a:prstGeom>
+          <a:solidFill>
+            <a:schemeClr val="lt2"/>
+          </a:solidFill>
+          <a:ln cap="flat" cmpd="sng" w="9525">
+            <a:solidFill>
+              <a:schemeClr val="dk2"/>
+            </a:solidFill>
+            <a:prstDash val="solid"/>
+            <a:round/>
+            <a:headEnd len="sm" w="sm" type="none"/>
+            <a:tailEnd len="sm" w="sm" type="none"/>
+          </a:ln>
+        </p:spPr>
+        <p:txBody>
+          <a:bodyPr anchorCtr="0" anchor="ctr" bIns="91425" lIns="91425" spcFirstLastPara="1" rIns="91425" wrap="square" tIns="91425">
+            <a:noAutofit/>
+          </a:bodyPr>
+          <a:lstStyle/>
+          <a:p>
+            <a:pPr indent="0" lvl="0" marL="0" rtl="0" algn="ctr">
+              <a:spcBef>
+                <a:spcPts val="0"/>
+              </a:spcBef>
+              <a:spcAft>
+                <a:spcPts val="0"/>
+              </a:spcAft>
+              <a:buNone/>
+            </a:pPr>
+            <a:r>
+              <a:rPr lang="en"/>
+              <a:t>f(x2)=a2 x2</a:t>
+            </a:r>
+            <a:endParaRPr/>
+          </a:p>
+        </p:txBody>
+      </p:sp>
+      <p:cxnSp>
+        <p:nvCxnSpPr>
+          <p:cNvPr id="271" name="Google Shape;271;p28"/>
+          <p:cNvCxnSpPr/>
+          <p:nvPr/>
+        </p:nvCxnSpPr>
+        <p:spPr>
+          <a:xfrm>
+            <a:off x="2002145" y="3432091"/>
+            <a:ext cx="552600" cy="0"/>
+          </a:xfrm>
+          <a:prstGeom prst="straightConnector1">
+            <a:avLst/>
+          </a:prstGeom>
+          <a:noFill/>
+          <a:ln cap="flat" cmpd="sng" w="9525">
+            <a:solidFill>
+              <a:schemeClr val="dk2"/>
+            </a:solidFill>
+            <a:prstDash val="solid"/>
+            <a:round/>
+            <a:headEnd len="med" w="med" type="none"/>
+            <a:tailEnd len="med" w="med" type="triangle"/>
+          </a:ln>
+        </p:spPr>
+      </p:cxnSp>
+      <p:sp>
+        <p:nvSpPr>
+          <p:cNvPr id="265" name="Google Shape;265;p28"/>
+          <p:cNvSpPr/>
+          <p:nvPr/>
+        </p:nvSpPr>
+        <p:spPr>
+          <a:xfrm>
+            <a:off x="2554750" y="3786425"/>
+            <a:ext cx="1403100" cy="365400"/>
+          </a:xfrm>
+          <a:prstGeom prst="rect">
+            <a:avLst/>
+          </a:prstGeom>
+          <a:solidFill>
+            <a:schemeClr val="lt2"/>
+          </a:solidFill>
+          <a:ln cap="flat" cmpd="sng" w="9525">
+            <a:solidFill>
+              <a:schemeClr val="dk2"/>
+            </a:solidFill>
+            <a:prstDash val="solid"/>
+            <a:round/>
+            <a:headEnd len="sm" w="sm" type="none"/>
+            <a:tailEnd len="sm" w="sm" type="none"/>
+          </a:ln>
+        </p:spPr>
+        <p:txBody>
+          <a:bodyPr anchorCtr="0" anchor="ctr" bIns="91425" lIns="91425" spcFirstLastPara="1" rIns="91425" wrap="square" tIns="91425">
+            <a:noAutofit/>
+          </a:bodyPr>
+          <a:lstStyle/>
+          <a:p>
+            <a:pPr indent="0" lvl="0" marL="0" rtl="0" algn="ctr">
+              <a:spcBef>
+                <a:spcPts val="0"/>
+              </a:spcBef>
+              <a:spcAft>
+                <a:spcPts val="0"/>
+              </a:spcAft>
+              <a:buNone/>
+            </a:pPr>
+            <a:r>
+              <a:rPr lang="en"/>
+              <a:t>f(xn)=an xn</a:t>
+            </a:r>
+            <a:endParaRPr/>
+          </a:p>
+        </p:txBody>
+      </p:sp>
+      <p:cxnSp>
+        <p:nvCxnSpPr>
+          <p:cNvPr id="272" name="Google Shape;272;p28"/>
+          <p:cNvCxnSpPr>
+            <a:stCxn id="270" idx="3"/>
+            <a:endCxn id="260" idx="1"/>
+          </p:cNvCxnSpPr>
+          <p:nvPr/>
+        </p:nvCxnSpPr>
+        <p:spPr>
+          <a:xfrm>
+            <a:off x="3957850" y="3443325"/>
+            <a:ext cx="1181700" cy="0"/>
+          </a:xfrm>
+          <a:prstGeom prst="straightConnector1">
+            <a:avLst/>
+          </a:prstGeom>
+          <a:noFill/>
+          <a:ln cap="flat" cmpd="sng" w="9525">
+            <a:solidFill>
+              <a:schemeClr val="dk2"/>
+            </a:solidFill>
+            <a:prstDash val="solid"/>
+            <a:round/>
+            <a:headEnd len="med" w="med" type="none"/>
+            <a:tailEnd len="med" w="med" type="triangle"/>
+          </a:ln>
+        </p:spPr>
+      </p:cxnSp>
       <p:pic>
         <p:nvPicPr>
-          <p:cNvPr id="234" name="Google Shape;234;p28"/>
+          <p:cNvPr descr="{&quot;font&quot;:{&quot;size&quot;:11.5,&quot;color&quot;:&quot;#000000&quot;,&quot;family&quot;:&quot;Arial&quot;},&quot;aid&quot;:null,&quot;code&quot;:&quot;$$\\pdf{h}{f\\left(x_{1}\\right)}=1$$&quot;,&quot;backgroundColorModified&quot;:false,&quot;backgroundColor&quot;:&quot;#FFFFFF&quot;,&quot;type&quot;:&quot;$$&quot;,&quot;id&quot;:&quot;9&quot;,&quot;ts&quot;:1761617173849,&quot;cs&quot;:&quot;j+0vt0Ky4OmK0SKrWwe3lg==&quot;,&quot;size&quot;:{&quot;width&quot;:92.83333333333333,&quot;height&quot;:42.33333333333329}}" id="273" name="Google Shape;273;p28"/>
           <p:cNvPicPr preferRelativeResize="0"/>
           <p:nvPr/>
         </p:nvPicPr>
@@ -9948,8 +12380,8 @@
         </p:blipFill>
         <p:spPr>
           <a:xfrm>
-            <a:off x="137500" y="1712000"/>
-            <a:ext cx="4095201" cy="3028384"/>
+            <a:off x="4383695" y="2744139"/>
+            <a:ext cx="884238" cy="403225"/>
           </a:xfrm>
           <a:prstGeom prst="rect">
             <a:avLst/>
@@ -9960,59 +12392,9 @@
           </a:ln>
         </p:spPr>
       </p:pic>
-      <p:sp>
-        <p:nvSpPr>
-          <p:cNvPr id="235" name="Google Shape;235;p28"/>
-          <p:cNvSpPr txBox="1"/>
-          <p:nvPr/>
-        </p:nvSpPr>
-        <p:spPr>
-          <a:xfrm>
-            <a:off x="579775" y="4740375"/>
-            <a:ext cx="3000000" cy="400200"/>
-          </a:xfrm>
-          <a:prstGeom prst="rect">
-            <a:avLst/>
-          </a:prstGeom>
-          <a:noFill/>
-          <a:ln>
-            <a:noFill/>
-          </a:ln>
-        </p:spPr>
-        <p:txBody>
-          <a:bodyPr anchorCtr="0" anchor="t" bIns="91425" lIns="91425" spcFirstLastPara="1" rIns="91425" wrap="square" tIns="91425">
-            <a:spAutoFit/>
-          </a:bodyPr>
-          <a:lstStyle/>
-          <a:p>
-            <a:pPr indent="0" lvl="0" marL="0" rtl="0" algn="l">
-              <a:spcBef>
-                <a:spcPts val="0"/>
-              </a:spcBef>
-              <a:spcAft>
-                <a:spcPts val="0"/>
-              </a:spcAft>
-              <a:buNone/>
-            </a:pPr>
-            <a:r>
-              <a:rPr lang="en">
-                <a:solidFill>
-                  <a:schemeClr val="dk2"/>
-                </a:solidFill>
-              </a:rPr>
-              <a:t>Code: linear_regression.py</a:t>
-            </a:r>
-            <a:endParaRPr>
-              <a:solidFill>
-                <a:schemeClr val="dk2"/>
-              </a:solidFill>
-            </a:endParaRPr>
-          </a:p>
-        </p:txBody>
-      </p:sp>
       <p:pic>
         <p:nvPicPr>
-          <p:cNvPr descr="{&quot;backgroundColorModified&quot;:false,&quot;backgroundColor&quot;:&quot;#FFFFFF&quot;,&quot;aid&quot;:null,&quot;code&quot;:&quot;\\begin{lalign*}\n&amp;{y=\\left(ax+b\\right)^{n}}\\\\\n&amp;{\\frac{dy}{dx}=na\\left(ax+b\\right)^{n-1}}\t\n\\end{lalign*}&quot;,&quot;type&quot;:&quot;lalign*&quot;,&quot;font&quot;:{&quot;size&quot;:11,&quot;color&quot;:&quot;#000000&quot;,&quot;family&quot;:&quot;Arial&quot;},&quot;id&quot;:&quot;24&quot;,&quot;ts&quot;:1754743931563,&quot;cs&quot;:&quot;MCli5abPHyp2ixxnvyrq/Q==&quot;,&quot;size&quot;:{&quot;width&quot;:151.66666666666666,&quot;height&quot;:58.666666666666664}}" id="236" name="Google Shape;236;p28"/>
+          <p:cNvPr descr="{&quot;id&quot;:&quot;9&quot;,&quot;aid&quot;:null,&quot;backgroundColorModified&quot;:false,&quot;type&quot;:&quot;$$&quot;,&quot;backgroundColor&quot;:&quot;#FFFFFF&quot;,&quot;code&quot;:&quot;$$\\pdf{f}{x_{1}}=a_{1}$$&quot;,&quot;font&quot;:{&quot;color&quot;:&quot;#000000&quot;,&quot;size&quot;:11.5,&quot;family&quot;:&quot;Arial&quot;},&quot;ts&quot;:1761617216249,&quot;cs&quot;:&quot;q4GQG1MAMPzns3J1joLHuw==&quot;,&quot;size&quot;:{&quot;width&quot;:73.66666666666667,&quot;height&quot;:40.166666666666664}}" id="274" name="Google Shape;274;p28"/>
           <p:cNvPicPr preferRelativeResize="0"/>
           <p:nvPr/>
         </p:nvPicPr>
@@ -10026,8 +12408,8 @@
         </p:blipFill>
         <p:spPr>
           <a:xfrm>
-            <a:off x="7395275" y="1852075"/>
-            <a:ext cx="1444625" cy="558800"/>
+            <a:off x="2074502" y="2427301"/>
+            <a:ext cx="701675" cy="382588"/>
           </a:xfrm>
           <a:prstGeom prst="rect">
             <a:avLst/>
@@ -10038,32 +12420,6 @@
           </a:ln>
         </p:spPr>
       </p:pic>
-      <p:cxnSp>
-        <p:nvCxnSpPr>
-          <p:cNvPr id="237" name="Google Shape;237;p28"/>
-          <p:cNvCxnSpPr/>
-          <p:nvPr/>
-        </p:nvCxnSpPr>
-        <p:spPr>
-          <a:xfrm flipH="1">
-            <a:off x="6857900" y="2094350"/>
-            <a:ext cx="446700" cy="20700"/>
-          </a:xfrm>
-          <a:prstGeom prst="straightConnector1">
-            <a:avLst/>
-          </a:prstGeom>
-          <a:noFill/>
-          <a:ln cap="flat" cmpd="sng" w="9525">
-            <a:solidFill>
-              <a:schemeClr val="dk2"/>
-            </a:solidFill>
-            <a:prstDash val="solid"/>
-            <a:round/>
-            <a:headEnd len="med" w="med" type="none"/>
-            <a:tailEnd len="med" w="med" type="triangle"/>
-          </a:ln>
-        </p:spPr>
-      </p:cxnSp>
     </p:spTree>
   </p:cSld>
   <p:clrMapOvr>
@@ -10077,7 +12433,7 @@
   <p:cSld>
     <p:spTree>
       <p:nvGrpSpPr>
-        <p:cNvPr id="241" name="Shape 241"/>
+        <p:cNvPr id="278" name="Shape 278"/>
         <p:cNvGrpSpPr/>
         <p:nvPr/>
       </p:nvGrpSpPr>
@@ -10091,7 +12447,7 @@
       </p:grpSpPr>
       <p:sp>
         <p:nvSpPr>
-          <p:cNvPr id="242" name="Google Shape;242;p29"/>
+          <p:cNvPr id="279" name="Google Shape;279;p29"/>
           <p:cNvSpPr txBox="1"/>
           <p:nvPr>
             <p:ph idx="4294967295" type="title"/>
@@ -10099,7 +12455,7 @@
         </p:nvSpPr>
         <p:spPr>
           <a:xfrm>
-            <a:off x="259350" y="-61976"/>
+            <a:off x="259350" y="157250"/>
             <a:ext cx="8520600" cy="572700"/>
           </a:xfrm>
           <a:prstGeom prst="rect">
@@ -10123,114 +12479,15 @@
             </a:pPr>
             <a:r>
               <a:rPr lang="en"/>
-              <a:t>Homework problems</a:t>
+              <a:t>Let’s come back to the optimization problem</a:t>
             </a:r>
             <a:endParaRPr/>
-          </a:p>
-        </p:txBody>
-      </p:sp>
-      <p:sp>
-        <p:nvSpPr>
-          <p:cNvPr id="243" name="Google Shape;243;p29"/>
-          <p:cNvSpPr txBox="1"/>
-          <p:nvPr/>
-        </p:nvSpPr>
-        <p:spPr>
-          <a:xfrm>
-            <a:off x="381450" y="587161"/>
-            <a:ext cx="3013800" cy="461700"/>
-          </a:xfrm>
-          <a:prstGeom prst="rect">
-            <a:avLst/>
-          </a:prstGeom>
-          <a:noFill/>
-          <a:ln>
-            <a:noFill/>
-          </a:ln>
-        </p:spPr>
-        <p:txBody>
-          <a:bodyPr anchorCtr="0" anchor="t" bIns="91425" lIns="91425" spcFirstLastPara="1" rIns="91425" wrap="square" tIns="91425">
-            <a:spAutoFit/>
-          </a:bodyPr>
-          <a:lstStyle/>
-          <a:p>
-            <a:pPr indent="0" lvl="0" marL="0" rtl="0" algn="l">
-              <a:spcBef>
-                <a:spcPts val="0"/>
-              </a:spcBef>
-              <a:spcAft>
-                <a:spcPts val="0"/>
-              </a:spcAft>
-              <a:buNone/>
-            </a:pPr>
-            <a:r>
-              <a:t/>
-            </a:r>
-            <a:endParaRPr sz="1800">
-              <a:solidFill>
-                <a:schemeClr val="dk2"/>
-              </a:solidFill>
-            </a:endParaRPr>
-          </a:p>
-        </p:txBody>
-      </p:sp>
-      <p:sp>
-        <p:nvSpPr>
-          <p:cNvPr id="244" name="Google Shape;244;p29"/>
-          <p:cNvSpPr txBox="1"/>
-          <p:nvPr/>
-        </p:nvSpPr>
-        <p:spPr>
-          <a:xfrm>
-            <a:off x="367400" y="682099"/>
-            <a:ext cx="5932200" cy="646500"/>
-          </a:xfrm>
-          <a:prstGeom prst="rect">
-            <a:avLst/>
-          </a:prstGeom>
-          <a:noFill/>
-          <a:ln>
-            <a:noFill/>
-          </a:ln>
-        </p:spPr>
-        <p:txBody>
-          <a:bodyPr anchorCtr="0" anchor="t" bIns="91425" lIns="91425" spcFirstLastPara="1" rIns="91425" wrap="square" tIns="91425">
-            <a:spAutoFit/>
-          </a:bodyPr>
-          <a:lstStyle/>
-          <a:p>
-            <a:pPr indent="-323850" lvl="0" marL="457200" rtl="0" algn="l">
-              <a:spcBef>
-                <a:spcPts val="0"/>
-              </a:spcBef>
-              <a:spcAft>
-                <a:spcPts val="0"/>
-              </a:spcAft>
-              <a:buClr>
-                <a:schemeClr val="dk2"/>
-              </a:buClr>
-              <a:buSzPts val="1500"/>
-              <a:buAutoNum type="arabicPeriod"/>
-            </a:pPr>
-            <a:r>
-              <a:rPr lang="en" sz="1500">
-                <a:solidFill>
-                  <a:schemeClr val="dk2"/>
-                </a:solidFill>
-              </a:rPr>
-              <a:t>Following slide 12, and verify_partial_derivates.py, calculate following derivatives and verify numerically</a:t>
-            </a:r>
-            <a:endParaRPr sz="1500">
-              <a:solidFill>
-                <a:schemeClr val="dk2"/>
-              </a:solidFill>
-            </a:endParaRPr>
           </a:p>
         </p:txBody>
       </p:sp>
       <p:pic>
         <p:nvPicPr>
-          <p:cNvPr descr="{&quot;aid&quot;:null,&quot;code&quot;:&quot;\\begin{lalign*}\n&amp;{f=x^{2},\\,g=\\exp\\left(x\\right),\\,h=fg}\\\\\n&amp;{\\text{Calculate}\\;h_{x}=\\diff{h}{x}}\\\\\n&amp;{f=x^{2},\\,g=xy+1,h=f/g\\,}\\\\\n&amp;{\\text{Calculate}\\;h_{x},\\,h_{y}}\t\n\\end{lalign*}&quot;,&quot;backgroundColorModified&quot;:false,&quot;type&quot;:&quot;lalign*&quot;,&quot;id&quot;:&quot;13&quot;,&quot;font&quot;:{&quot;family&quot;:&quot;Arial&quot;,&quot;size&quot;:12,&quot;color&quot;:&quot;#000000&quot;},&quot;backgroundColor&quot;:&quot;#FFFFFF&quot;,&quot;ts&quot;:1759690112382,&quot;cs&quot;:&quot;uNh7qRnTKuF30vt9nBVOQg==&quot;,&quot;size&quot;:{&quot;width&quot;:224,&quot;height&quot;:118}}" id="245" name="Google Shape;245;p29"/>
+          <p:cNvPr descr="{&quot;backgroundColorModified&quot;:false,&quot;id&quot;:&quot;9&quot;,&quot;backgroundColor&quot;:&quot;#FFFFFF&quot;,&quot;aid&quot;:null,&quot;font&quot;:{&quot;family&quot;:&quot;Arial&quot;,&quot;size&quot;:16,&quot;color&quot;:&quot;#595959&quot;},&quot;type&quot;:&quot;lalign*&quot;,&quot;code&quot;:&quot;\\begin{lalign*}\n&amp;{\\text{If}\\;y=f\\left(x\\right),\\;}\\\\\n&amp;{\\text{find}\\;f\\,\\text{that}\\;\\text{minimizes}\\;\\text{L(y)}}\t\n\\end{lalign*}&quot;,&quot;ts&quot;:1753561656433,&quot;cs&quot;:&quot;yTReRyOOxMTbp80idXCI2Q==&quot;,&quot;size&quot;:{&quot;width&quot;:281.25,&quot;height&quot;:57.75000000000002}}" id="280" name="Google Shape;280;p29"/>
           <p:cNvPicPr preferRelativeResize="0"/>
           <p:nvPr/>
         </p:nvPicPr>
@@ -10244,8 +12501,8 @@
         </p:blipFill>
         <p:spPr>
           <a:xfrm>
-            <a:off x="943425" y="1328599"/>
-            <a:ext cx="2133600" cy="1123950"/>
+            <a:off x="364484" y="988025"/>
+            <a:ext cx="2678906" cy="550069"/>
           </a:xfrm>
           <a:prstGeom prst="rect">
             <a:avLst/>
@@ -10256,16 +12513,109 @@
           </a:ln>
         </p:spPr>
       </p:pic>
-      <p:sp>
-        <p:nvSpPr>
-          <p:cNvPr id="246" name="Google Shape;246;p29"/>
+      <p:pic>
+        <p:nvPicPr>
+          <p:cNvPr descr="{&quot;font&quot;:{&quot;size&quot;:24,&quot;family&quot;:&quot;Arial&quot;,&quot;color&quot;:&quot;#000000&quot;},&quot;aid&quot;:null,&quot;backgroundColorModified&quot;:false,&quot;code&quot;:&quot;\\begin{lalign*}\n&amp;{\\text{Let's}\\;\\text{consider}\\;\\text{a}\\;\\text{simple}\\;\\text{function}\\;\\text{}}\\\\\n&amp;{y=ax+b}\\\\\n&amp;{\\text{Here,}\\;a\\;\\text{and}\\;b\\,\\text{are}\\;\\text{the}\\;\\text{function}\\;\\text{parameters}}\\\\\n&amp;{x\\,\\text{is}\\;\\text{the}\\;\\text{indepedent}\\;\\text{variable}}\\\\\n&amp;{y\\,\\text{is}\\;\\text{the}\\;\\text{dependent}\\;\\text{variable}}\\\\\n&amp;{\\text{There}\\;\\text{are}\\;\\text{two}\\;\\text{types}\\;\\text{of}\\;\\text{problems}\\;\\text{we}\\;\\text{can}\\;\\text{pose}}\\\\\n&amp;{1.\\,\\text{Solve}\\;\\text{for}\\;x:\\,\\text{For}\\;\\text{a}\\;\\text{given}\\;\\text{y,}\\;a\\,\\text{and}\\;b,\\,\\text{find}\\;x}\\\\\n&amp;{2.\\,\\text{Given}\\;\\text{some}\\;x\\,\\text{and}\\;y,\\,\\text{find}\\;a\\,\\text{and}\\;b}\t\n\\end{lalign*}&quot;,&quot;backgroundColor&quot;:&quot;#FFFFFF&quot;,&quot;id&quot;:&quot;12&quot;,&quot;type&quot;:&quot;lalign*&quot;,&quot;ts&quot;:1753756039838,&quot;cs&quot;:&quot;unEBo9Ze5PUYjDHHVFcaEw==&quot;,&quot;size&quot;:{&quot;width&quot;:725.5,&quot;height&quot;:376}}" id="281" name="Google Shape;281;p29"/>
+          <p:cNvPicPr preferRelativeResize="0"/>
+          <p:nvPr/>
+        </p:nvPicPr>
+        <p:blipFill>
+          <a:blip r:embed="rId4">
+            <a:alphaModFix/>
+          </a:blip>
+          <a:stretch>
+            <a:fillRect/>
+          </a:stretch>
+        </p:blipFill>
+        <p:spPr>
+          <a:xfrm>
+            <a:off x="299975" y="1736375"/>
+            <a:ext cx="5161925" cy="2675225"/>
+          </a:xfrm>
+          <a:prstGeom prst="rect">
+            <a:avLst/>
+          </a:prstGeom>
+          <a:noFill/>
+          <a:ln>
+            <a:noFill/>
+          </a:ln>
+        </p:spPr>
+      </p:pic>
+    </p:spTree>
+  </p:cSld>
+  <p:clrMapOvr>
+    <a:masterClrMapping/>
+  </p:clrMapOvr>
+</p:sld>
+</file>
+
+<file path=ppt/slides/slide18.xml><?xml version="1.0" encoding="utf-8"?>
+<p:sld xmlns:a="http://schemas.openxmlformats.org/drawingml/2006/main" xmlns:r="http://schemas.openxmlformats.org/officeDocument/2006/relationships" xmlns:mc="http://schemas.openxmlformats.org/markup-compatibility/2006" xmlns:mv="urn:schemas-microsoft-com:mac:vml" xmlns:p="http://schemas.openxmlformats.org/presentationml/2006/main" xmlns:c="http://schemas.openxmlformats.org/drawingml/2006/chart" xmlns:dgm="http://schemas.openxmlformats.org/drawingml/2006/diagram" xmlns:o="urn:schemas-microsoft-com:office:office" xmlns:v="urn:schemas-microsoft-com:vml" xmlns:pvml="urn:schemas-microsoft-com:office:powerpoint" xmlns:com="http://schemas.openxmlformats.org/drawingml/2006/compatibility" xmlns:p14="http://schemas.microsoft.com/office/powerpoint/2010/main" xmlns:p15="http://schemas.microsoft.com/office/powerpoint/2012/main" xmlns:ahyp="http://schemas.microsoft.com/office/drawing/2018/hyperlinkcolor">
+  <p:cSld>
+    <p:spTree>
+      <p:nvGrpSpPr>
+        <p:cNvPr id="285" name="Shape 285"/>
+        <p:cNvGrpSpPr/>
+        <p:nvPr/>
+      </p:nvGrpSpPr>
+      <p:grpSpPr>
+        <a:xfrm>
+          <a:off x="0" y="0"/>
+          <a:ext cx="0" cy="0"/>
+          <a:chOff x="0" y="0"/>
+          <a:chExt cx="0" cy="0"/>
+        </a:xfrm>
+      </p:grpSpPr>
+      <p:sp>
+        <p:nvSpPr>
+          <p:cNvPr id="286" name="Google Shape;286;p30"/>
+          <p:cNvSpPr txBox="1"/>
+          <p:nvPr>
+            <p:ph idx="4294967295" type="title"/>
+          </p:nvPr>
+        </p:nvSpPr>
+        <p:spPr>
+          <a:xfrm>
+            <a:off x="259350" y="157250"/>
+            <a:ext cx="8520600" cy="572700"/>
+          </a:xfrm>
+          <a:prstGeom prst="rect">
+            <a:avLst/>
+          </a:prstGeom>
+        </p:spPr>
+        <p:txBody>
+          <a:bodyPr anchorCtr="0" anchor="t" bIns="91425" lIns="91425" spcFirstLastPara="1" rIns="91425" wrap="square" tIns="91425">
+            <a:normAutofit fontScale="90000"/>
+          </a:bodyPr>
+          <a:lstStyle/>
+          <a:p>
+            <a:pPr indent="0" lvl="0" marL="0" rtl="0" algn="l">
+              <a:spcBef>
+                <a:spcPts val="0"/>
+              </a:spcBef>
+              <a:spcAft>
+                <a:spcPts val="0"/>
+              </a:spcAft>
+              <a:buNone/>
+            </a:pPr>
+            <a:r>
+              <a:rPr lang="en"/>
+              <a:t>Let’s come back to the optimization problem</a:t>
+            </a:r>
+            <a:endParaRPr/>
+          </a:p>
+        </p:txBody>
+      </p:sp>
+      <p:sp>
+        <p:nvSpPr>
+          <p:cNvPr id="287" name="Google Shape;287;p30"/>
           <p:cNvSpPr txBox="1"/>
           <p:nvPr/>
         </p:nvSpPr>
         <p:spPr>
           <a:xfrm>
-            <a:off x="436650" y="2610999"/>
-            <a:ext cx="5932200" cy="646500"/>
+            <a:off x="367400" y="901325"/>
+            <a:ext cx="5932200" cy="461700"/>
           </a:xfrm>
           <a:prstGeom prst="rect">
             <a:avLst/>
@@ -10291,14 +12641,14 @@
               <a:buNone/>
             </a:pPr>
             <a:r>
-              <a:rPr lang="en" sz="1500">
+              <a:rPr lang="en" sz="1800">
                 <a:solidFill>
                   <a:schemeClr val="dk2"/>
                 </a:solidFill>
               </a:rPr>
-              <a:t>2. Run part 2 of verify_partial_derivatives.py. Make sure you can follow the code and see how it implements the math in Slide 14</a:t>
-            </a:r>
-            <a:endParaRPr sz="1500">
+              <a:t>Optimization deals with problem 2.  </a:t>
+            </a:r>
+            <a:endParaRPr sz="1800">
               <a:solidFill>
                 <a:schemeClr val="dk2"/>
               </a:solidFill>
@@ -10308,14 +12658,14 @@
       </p:sp>
       <p:sp>
         <p:nvSpPr>
-          <p:cNvPr id="247" name="Google Shape;247;p29"/>
+          <p:cNvPr id="288" name="Google Shape;288;p30"/>
           <p:cNvSpPr txBox="1"/>
           <p:nvPr/>
         </p:nvSpPr>
         <p:spPr>
           <a:xfrm>
-            <a:off x="436650" y="3322824"/>
-            <a:ext cx="5932200" cy="1477500"/>
+            <a:off x="367400" y="1382625"/>
+            <a:ext cx="5932200" cy="738900"/>
           </a:xfrm>
           <a:prstGeom prst="rect">
             <a:avLst/>
@@ -10341,76 +12691,513 @@
               <a:buNone/>
             </a:pPr>
             <a:r>
+              <a:rPr lang="en" sz="1800">
+                <a:solidFill>
+                  <a:schemeClr val="dk2"/>
+                </a:solidFill>
+              </a:rPr>
+              <a:t>Let’s consider an example </a:t>
+            </a:r>
+            <a:endParaRPr sz="1800">
+              <a:solidFill>
+                <a:schemeClr val="dk2"/>
+              </a:solidFill>
+            </a:endParaRPr>
+          </a:p>
+          <a:p>
+            <a:pPr indent="0" lvl="0" marL="0" rtl="0" algn="l">
+              <a:spcBef>
+                <a:spcPts val="0"/>
+              </a:spcBef>
+              <a:spcAft>
+                <a:spcPts val="0"/>
+              </a:spcAft>
+              <a:buNone/>
+            </a:pPr>
+            <a:r>
+              <a:t/>
+            </a:r>
+            <a:endParaRPr sz="1800">
+              <a:solidFill>
+                <a:schemeClr val="dk2"/>
+              </a:solidFill>
+            </a:endParaRPr>
+          </a:p>
+        </p:txBody>
+      </p:sp>
+      <p:pic>
+        <p:nvPicPr>
+          <p:cNvPr descr="{&quot;type&quot;:&quot;lalign*&quot;,&quot;font&quot;:{&quot;color&quot;:&quot;#000000&quot;,&quot;family&quot;:&quot;Arial&quot;,&quot;size&quot;:13.5},&quot;backgroundColorModified&quot;:false,&quot;code&quot;:&quot;\\begin{lalign*}\n&amp;{y=ax+b}\\\\\n&amp;{\\text{say}\\;y=1,\\,x\\,=2}\\\\\n&amp;{\\text{There}\\;\\text{are}\\;\\text{infinite}\\;\\text{number}\\;\\text{of}\\;\\text{solutions}\\;\\text{for}\\;a\\,\\text{and}\\;b}\\\\\n&amp;{\\text{Now}\\;\\text{if}\\;\\text{I}\\;\\text{add}\\;\\text{another}\\;\\text{point,}}\\\\\n&amp;{y\\,=\\,0,\\,x\\,=\\,0}\\\\\n&amp;{\\text{Now}\\;\\text{there}\\;\\text{is}\\;\\text{a}\\;\\text{unique}\\;\\text{solution}\\;\\text{for}\\;a\\,\\text{and}\\;b}\\\\\n&amp;{}\t\n\\end{lalign*}&quot;,&quot;backgroundColor&quot;:&quot;#FFFFFF&quot;,&quot;aid&quot;:null,&quot;id&quot;:&quot;14&quot;,&quot;ts&quot;:1753756745327,&quot;cs&quot;:&quot;L72IIKDiUzu/CwZa4fgLbg==&quot;,&quot;size&quot;:{&quot;width&quot;:461.74019212598427,&quot;height&quot;:161.93959685039368}}" id="289" name="Google Shape;289;p30"/>
+          <p:cNvPicPr preferRelativeResize="0"/>
+          <p:nvPr/>
+        </p:nvPicPr>
+        <p:blipFill>
+          <a:blip r:embed="rId3">
+            <a:alphaModFix/>
+          </a:blip>
+          <a:stretch>
+            <a:fillRect/>
+          </a:stretch>
+        </p:blipFill>
+        <p:spPr>
+          <a:xfrm>
+            <a:off x="442300" y="1940625"/>
+            <a:ext cx="4398075" cy="1542475"/>
+          </a:xfrm>
+          <a:prstGeom prst="rect">
+            <a:avLst/>
+          </a:prstGeom>
+          <a:noFill/>
+          <a:ln>
+            <a:noFill/>
+          </a:ln>
+        </p:spPr>
+      </p:pic>
+      <p:sp>
+        <p:nvSpPr>
+          <p:cNvPr id="290" name="Google Shape;290;p30"/>
+          <p:cNvSpPr txBox="1"/>
+          <p:nvPr/>
+        </p:nvSpPr>
+        <p:spPr>
+          <a:xfrm>
+            <a:off x="309975" y="3592425"/>
+            <a:ext cx="5932200" cy="1293000"/>
+          </a:xfrm>
+          <a:prstGeom prst="rect">
+            <a:avLst/>
+          </a:prstGeom>
+          <a:noFill/>
+          <a:ln>
+            <a:noFill/>
+          </a:ln>
+        </p:spPr>
+        <p:txBody>
+          <a:bodyPr anchorCtr="0" anchor="t" bIns="91425" lIns="91425" spcFirstLastPara="1" rIns="91425" wrap="square" tIns="91425">
+            <a:spAutoFit/>
+          </a:bodyPr>
+          <a:lstStyle/>
+          <a:p>
+            <a:pPr indent="0" lvl="0" marL="0" rtl="0" algn="l">
+              <a:spcBef>
+                <a:spcPts val="0"/>
+              </a:spcBef>
+              <a:spcAft>
+                <a:spcPts val="0"/>
+              </a:spcAft>
+              <a:buNone/>
+            </a:pPr>
+            <a:r>
+              <a:rPr lang="en" sz="1800">
+                <a:solidFill>
+                  <a:schemeClr val="dk2"/>
+                </a:solidFill>
+              </a:rPr>
+              <a:t>What if there are several points? Now, the best we can do is to find </a:t>
+            </a:r>
+            <a:r>
+              <a:rPr i="1" lang="en" sz="1800">
+                <a:solidFill>
+                  <a:schemeClr val="dk2"/>
+                </a:solidFill>
+              </a:rPr>
+              <a:t>a </a:t>
+            </a:r>
+            <a:r>
+              <a:rPr lang="en" sz="1800">
+                <a:solidFill>
+                  <a:schemeClr val="dk2"/>
+                </a:solidFill>
+              </a:rPr>
+              <a:t>and </a:t>
+            </a:r>
+            <a:r>
+              <a:rPr i="1" lang="en" sz="1800">
+                <a:solidFill>
+                  <a:schemeClr val="dk2"/>
+                </a:solidFill>
+              </a:rPr>
+              <a:t>b </a:t>
+            </a:r>
+            <a:r>
+              <a:rPr lang="en" sz="1800">
+                <a:solidFill>
+                  <a:schemeClr val="dk2"/>
+                </a:solidFill>
+              </a:rPr>
+              <a:t>that minimize some distance metric between the points and the line defined by </a:t>
+            </a:r>
+            <a:r>
+              <a:rPr i="1" lang="en" sz="1800">
+                <a:solidFill>
+                  <a:schemeClr val="dk2"/>
+                </a:solidFill>
+              </a:rPr>
+              <a:t>a </a:t>
+            </a:r>
+            <a:r>
+              <a:rPr lang="en" sz="1800">
+                <a:solidFill>
+                  <a:schemeClr val="dk2"/>
+                </a:solidFill>
+              </a:rPr>
+              <a:t>and </a:t>
+            </a:r>
+            <a:r>
+              <a:rPr i="1" lang="en" sz="1800">
+                <a:solidFill>
+                  <a:schemeClr val="dk2"/>
+                </a:solidFill>
+              </a:rPr>
+              <a:t>b</a:t>
+            </a:r>
+            <a:endParaRPr sz="1800">
+              <a:solidFill>
+                <a:schemeClr val="dk2"/>
+              </a:solidFill>
+            </a:endParaRPr>
+          </a:p>
+          <a:p>
+            <a:pPr indent="0" lvl="0" marL="0" rtl="0" algn="l">
+              <a:spcBef>
+                <a:spcPts val="0"/>
+              </a:spcBef>
+              <a:spcAft>
+                <a:spcPts val="0"/>
+              </a:spcAft>
+              <a:buNone/>
+            </a:pPr>
+            <a:r>
+              <a:t/>
+            </a:r>
+            <a:endParaRPr sz="1800">
+              <a:solidFill>
+                <a:schemeClr val="dk2"/>
+              </a:solidFill>
+            </a:endParaRPr>
+          </a:p>
+        </p:txBody>
+      </p:sp>
+    </p:spTree>
+  </p:cSld>
+  <p:clrMapOvr>
+    <a:masterClrMapping/>
+  </p:clrMapOvr>
+</p:sld>
+</file>
+
+<file path=ppt/slides/slide19.xml><?xml version="1.0" encoding="utf-8"?>
+<p:sld xmlns:a="http://schemas.openxmlformats.org/drawingml/2006/main" xmlns:r="http://schemas.openxmlformats.org/officeDocument/2006/relationships" xmlns:mc="http://schemas.openxmlformats.org/markup-compatibility/2006" xmlns:mv="urn:schemas-microsoft-com:mac:vml" xmlns:p="http://schemas.openxmlformats.org/presentationml/2006/main" xmlns:c="http://schemas.openxmlformats.org/drawingml/2006/chart" xmlns:dgm="http://schemas.openxmlformats.org/drawingml/2006/diagram" xmlns:o="urn:schemas-microsoft-com:office:office" xmlns:v="urn:schemas-microsoft-com:vml" xmlns:pvml="urn:schemas-microsoft-com:office:powerpoint" xmlns:com="http://schemas.openxmlformats.org/drawingml/2006/compatibility" xmlns:p14="http://schemas.microsoft.com/office/powerpoint/2010/main" xmlns:p15="http://schemas.microsoft.com/office/powerpoint/2012/main" xmlns:ahyp="http://schemas.microsoft.com/office/drawing/2018/hyperlinkcolor">
+  <p:cSld>
+    <p:spTree>
+      <p:nvGrpSpPr>
+        <p:cNvPr id="294" name="Shape 294"/>
+        <p:cNvGrpSpPr/>
+        <p:nvPr/>
+      </p:nvGrpSpPr>
+      <p:grpSpPr>
+        <a:xfrm>
+          <a:off x="0" y="0"/>
+          <a:ext cx="0" cy="0"/>
+          <a:chOff x="0" y="0"/>
+          <a:chExt cx="0" cy="0"/>
+        </a:xfrm>
+      </p:grpSpPr>
+      <p:sp>
+        <p:nvSpPr>
+          <p:cNvPr id="295" name="Google Shape;295;p31"/>
+          <p:cNvSpPr txBox="1"/>
+          <p:nvPr>
+            <p:ph idx="4294967295" type="title"/>
+          </p:nvPr>
+        </p:nvSpPr>
+        <p:spPr>
+          <a:xfrm>
+            <a:off x="259350" y="157250"/>
+            <a:ext cx="8520600" cy="572700"/>
+          </a:xfrm>
+          <a:prstGeom prst="rect">
+            <a:avLst/>
+          </a:prstGeom>
+        </p:spPr>
+        <p:txBody>
+          <a:bodyPr anchorCtr="0" anchor="t" bIns="91425" lIns="91425" spcFirstLastPara="1" rIns="91425" wrap="square" tIns="91425">
+            <a:normAutofit fontScale="90000"/>
+          </a:bodyPr>
+          <a:lstStyle/>
+          <a:p>
+            <a:pPr indent="0" lvl="0" marL="0" rtl="0" algn="l">
+              <a:spcBef>
+                <a:spcPts val="0"/>
+              </a:spcBef>
+              <a:spcAft>
+                <a:spcPts val="0"/>
+              </a:spcAft>
+              <a:buNone/>
+            </a:pPr>
+            <a:r>
+              <a:rPr lang="en"/>
+              <a:t>Optimization Example</a:t>
+            </a:r>
+            <a:endParaRPr/>
+          </a:p>
+        </p:txBody>
+      </p:sp>
+      <p:sp>
+        <p:nvSpPr>
+          <p:cNvPr id="296" name="Google Shape;296;p31"/>
+          <p:cNvSpPr txBox="1"/>
+          <p:nvPr/>
+        </p:nvSpPr>
+        <p:spPr>
+          <a:xfrm>
+            <a:off x="381450" y="806388"/>
+            <a:ext cx="3013800" cy="461700"/>
+          </a:xfrm>
+          <a:prstGeom prst="rect">
+            <a:avLst/>
+          </a:prstGeom>
+          <a:noFill/>
+          <a:ln>
+            <a:noFill/>
+          </a:ln>
+        </p:spPr>
+        <p:txBody>
+          <a:bodyPr anchorCtr="0" anchor="t" bIns="91425" lIns="91425" spcFirstLastPara="1" rIns="91425" wrap="square" tIns="91425">
+            <a:spAutoFit/>
+          </a:bodyPr>
+          <a:lstStyle/>
+          <a:p>
+            <a:pPr indent="0" lvl="0" marL="0" rtl="0" algn="l">
+              <a:spcBef>
+                <a:spcPts val="0"/>
+              </a:spcBef>
+              <a:spcAft>
+                <a:spcPts val="0"/>
+              </a:spcAft>
+              <a:buNone/>
+            </a:pPr>
+            <a:r>
+              <a:t/>
+            </a:r>
+            <a:endParaRPr sz="1800">
+              <a:solidFill>
+                <a:schemeClr val="dk2"/>
+              </a:solidFill>
+            </a:endParaRPr>
+          </a:p>
+        </p:txBody>
+      </p:sp>
+      <p:sp>
+        <p:nvSpPr>
+          <p:cNvPr id="297" name="Google Shape;297;p31"/>
+          <p:cNvSpPr txBox="1"/>
+          <p:nvPr/>
+        </p:nvSpPr>
+        <p:spPr>
+          <a:xfrm>
+            <a:off x="381450" y="759275"/>
+            <a:ext cx="3307200" cy="923400"/>
+          </a:xfrm>
+          <a:prstGeom prst="rect">
+            <a:avLst/>
+          </a:prstGeom>
+          <a:noFill/>
+          <a:ln>
+            <a:noFill/>
+          </a:ln>
+        </p:spPr>
+        <p:txBody>
+          <a:bodyPr anchorCtr="0" anchor="t" bIns="91425" lIns="91425" spcFirstLastPara="1" rIns="91425" wrap="square" tIns="91425">
+            <a:spAutoFit/>
+          </a:bodyPr>
+          <a:lstStyle/>
+          <a:p>
+            <a:pPr indent="0" lvl="0" marL="0" rtl="0" algn="l">
+              <a:spcBef>
+                <a:spcPts val="0"/>
+              </a:spcBef>
+              <a:spcAft>
+                <a:spcPts val="0"/>
+              </a:spcAft>
+              <a:buNone/>
+            </a:pPr>
+            <a:r>
+              <a:rPr lang="en" sz="1600">
+                <a:solidFill>
+                  <a:schemeClr val="dk2"/>
+                </a:solidFill>
+              </a:rPr>
+              <a:t>Let’s now use derivatives to solve a common optimization problem.. Linear regression</a:t>
+            </a:r>
+            <a:endParaRPr sz="1600">
+              <a:solidFill>
+                <a:schemeClr val="dk2"/>
+              </a:solidFill>
+            </a:endParaRPr>
+          </a:p>
+        </p:txBody>
+      </p:sp>
+      <p:pic>
+        <p:nvPicPr>
+          <p:cNvPr id="298" name="Google Shape;298;p31"/>
+          <p:cNvPicPr preferRelativeResize="0"/>
+          <p:nvPr/>
+        </p:nvPicPr>
+        <p:blipFill>
+          <a:blip r:embed="rId3">
+            <a:alphaModFix/>
+          </a:blip>
+          <a:stretch>
+            <a:fillRect/>
+          </a:stretch>
+        </p:blipFill>
+        <p:spPr>
+          <a:xfrm>
+            <a:off x="4400000" y="200800"/>
+            <a:ext cx="3672850" cy="4898399"/>
+          </a:xfrm>
+          <a:prstGeom prst="rect">
+            <a:avLst/>
+          </a:prstGeom>
+          <a:noFill/>
+          <a:ln>
+            <a:noFill/>
+          </a:ln>
+        </p:spPr>
+      </p:pic>
+      <p:pic>
+        <p:nvPicPr>
+          <p:cNvPr id="299" name="Google Shape;299;p31"/>
+          <p:cNvPicPr preferRelativeResize="0"/>
+          <p:nvPr/>
+        </p:nvPicPr>
+        <p:blipFill>
+          <a:blip r:embed="rId4">
+            <a:alphaModFix/>
+          </a:blip>
+          <a:stretch>
+            <a:fillRect/>
+          </a:stretch>
+        </p:blipFill>
+        <p:spPr>
+          <a:xfrm>
+            <a:off x="137500" y="1712000"/>
+            <a:ext cx="4095201" cy="3028384"/>
+          </a:xfrm>
+          <a:prstGeom prst="rect">
+            <a:avLst/>
+          </a:prstGeom>
+          <a:noFill/>
+          <a:ln>
+            <a:noFill/>
+          </a:ln>
+        </p:spPr>
+      </p:pic>
+      <p:sp>
+        <p:nvSpPr>
+          <p:cNvPr id="300" name="Google Shape;300;p31"/>
+          <p:cNvSpPr txBox="1"/>
+          <p:nvPr/>
+        </p:nvSpPr>
+        <p:spPr>
+          <a:xfrm>
+            <a:off x="579775" y="4740375"/>
+            <a:ext cx="3000000" cy="400200"/>
+          </a:xfrm>
+          <a:prstGeom prst="rect">
+            <a:avLst/>
+          </a:prstGeom>
+          <a:noFill/>
+          <a:ln>
+            <a:noFill/>
+          </a:ln>
+        </p:spPr>
+        <p:txBody>
+          <a:bodyPr anchorCtr="0" anchor="t" bIns="91425" lIns="91425" spcFirstLastPara="1" rIns="91425" wrap="square" tIns="91425">
+            <a:spAutoFit/>
+          </a:bodyPr>
+          <a:lstStyle/>
+          <a:p>
+            <a:pPr indent="0" lvl="0" marL="0" rtl="0" algn="l">
+              <a:spcBef>
+                <a:spcPts val="0"/>
+              </a:spcBef>
+              <a:spcAft>
+                <a:spcPts val="0"/>
+              </a:spcAft>
+              <a:buNone/>
+            </a:pPr>
+            <a:r>
               <a:rPr lang="en">
                 <a:solidFill>
                   <a:schemeClr val="dk2"/>
                 </a:solidFill>
               </a:rPr>
-              <a:t>3</a:t>
-            </a:r>
-            <a:r>
-              <a:rPr lang="en">
-                <a:solidFill>
-                  <a:schemeClr val="dk2"/>
-                </a:solidFill>
-              </a:rPr>
-              <a:t>. Following linear_regression.py, generate points along y=xsin(x) and fit a line. What do you observe</a:t>
-            </a:r>
-            <a:br>
-              <a:rPr lang="en">
-                <a:solidFill>
-                  <a:schemeClr val="dk2"/>
-                </a:solidFill>
-              </a:rPr>
-            </a:br>
+              <a:t>Code: linear_regression.py</a:t>
+            </a:r>
             <a:endParaRPr>
               <a:solidFill>
                 <a:schemeClr val="dk2"/>
               </a:solidFill>
             </a:endParaRPr>
           </a:p>
-          <a:p>
-            <a:pPr indent="0" lvl="0" marL="0" rtl="0" algn="l">
-              <a:spcBef>
-                <a:spcPts val="0"/>
-              </a:spcBef>
-              <a:spcAft>
-                <a:spcPts val="0"/>
-              </a:spcAft>
-              <a:buNone/>
-            </a:pPr>
-            <a:r>
-              <a:rPr lang="en">
-                <a:solidFill>
-                  <a:schemeClr val="dk2"/>
-                </a:solidFill>
-              </a:rPr>
-              <a:t>4. For some reason, we want the intercept </a:t>
-            </a:r>
-            <a:r>
-              <a:rPr i="1" lang="en">
-                <a:solidFill>
-                  <a:schemeClr val="dk2"/>
-                </a:solidFill>
-              </a:rPr>
-              <a:t>b</a:t>
-            </a:r>
-            <a:r>
-              <a:rPr lang="en">
-                <a:solidFill>
-                  <a:schemeClr val="dk2"/>
-                </a:solidFill>
-              </a:rPr>
-              <a:t> to remain small. How would add this constraint to the regression problem? Solve for optimal values of a and b with this constraint</a:t>
-            </a:r>
-            <a:endParaRPr>
-              <a:solidFill>
-                <a:schemeClr val="dk2"/>
-              </a:solidFill>
-            </a:endParaRPr>
-          </a:p>
         </p:txBody>
       </p:sp>
+      <p:pic>
+        <p:nvPicPr>
+          <p:cNvPr descr="{&quot;backgroundColorModified&quot;:false,&quot;backgroundColor&quot;:&quot;#FFFFFF&quot;,&quot;aid&quot;:null,&quot;code&quot;:&quot;\\begin{lalign*}\n&amp;{y=\\left(ax+b\\right)^{n}}\\\\\n&amp;{\\frac{dy}{dx}=na\\left(ax+b\\right)^{n-1}}\t\n\\end{lalign*}&quot;,&quot;type&quot;:&quot;lalign*&quot;,&quot;font&quot;:{&quot;size&quot;:11,&quot;color&quot;:&quot;#000000&quot;,&quot;family&quot;:&quot;Arial&quot;},&quot;id&quot;:&quot;24&quot;,&quot;ts&quot;:1754743931563,&quot;cs&quot;:&quot;MCli5abPHyp2ixxnvyrq/Q==&quot;,&quot;size&quot;:{&quot;width&quot;:151.66666666666666,&quot;height&quot;:58.666666666666664}}" id="301" name="Google Shape;301;p31"/>
+          <p:cNvPicPr preferRelativeResize="0"/>
+          <p:nvPr/>
+        </p:nvPicPr>
+        <p:blipFill>
+          <a:blip r:embed="rId5">
+            <a:alphaModFix/>
+          </a:blip>
+          <a:stretch>
+            <a:fillRect/>
+          </a:stretch>
+        </p:blipFill>
+        <p:spPr>
+          <a:xfrm>
+            <a:off x="7395275" y="1852075"/>
+            <a:ext cx="1444625" cy="558800"/>
+          </a:xfrm>
+          <a:prstGeom prst="rect">
+            <a:avLst/>
+          </a:prstGeom>
+          <a:noFill/>
+          <a:ln>
+            <a:noFill/>
+          </a:ln>
+        </p:spPr>
+      </p:pic>
+      <p:cxnSp>
+        <p:nvCxnSpPr>
+          <p:cNvPr id="302" name="Google Shape;302;p31"/>
+          <p:cNvCxnSpPr/>
+          <p:nvPr/>
+        </p:nvCxnSpPr>
+        <p:spPr>
+          <a:xfrm flipH="1">
+            <a:off x="6857900" y="2094350"/>
+            <a:ext cx="446700" cy="20700"/>
+          </a:xfrm>
+          <a:prstGeom prst="straightConnector1">
+            <a:avLst/>
+          </a:prstGeom>
+          <a:noFill/>
+          <a:ln cap="flat" cmpd="sng" w="9525">
+            <a:solidFill>
+              <a:schemeClr val="dk2"/>
+            </a:solidFill>
+            <a:prstDash val="solid"/>
+            <a:round/>
+            <a:headEnd len="med" w="med" type="none"/>
+            <a:tailEnd len="med" w="med" type="triangle"/>
+          </a:ln>
+        </p:spPr>
+      </p:cxnSp>
     </p:spTree>
   </p:cSld>
   <p:clrMapOvr>
@@ -10485,7 +13272,7 @@
         <p:spPr>
           <a:xfrm>
             <a:off x="389250" y="1234150"/>
-            <a:ext cx="7841700" cy="3232500"/>
+            <a:ext cx="7841700" cy="2678100"/>
           </a:xfrm>
           <a:prstGeom prst="rect">
             <a:avLst/>
@@ -10654,7 +13441,7 @@
                   <a:schemeClr val="dk2"/>
                 </a:solidFill>
               </a:rPr>
-              <a:t>, Sections 1.1, 1.2, 1.3, 2.1, 2.2. Do some of the exercises (1.4), 2.1, 2.2</a:t>
+              <a:t>, Sections 1.1, 1.2, 1.3, 2.1.1. </a:t>
             </a:r>
             <a:endParaRPr sz="1800">
               <a:solidFill>
@@ -10662,6 +13449,266 @@
               </a:solidFill>
             </a:endParaRPr>
           </a:p>
+        </p:txBody>
+      </p:sp>
+    </p:spTree>
+  </p:cSld>
+  <p:clrMapOvr>
+    <a:masterClrMapping/>
+  </p:clrMapOvr>
+</p:sld>
+</file>
+
+<file path=ppt/slides/slide20.xml><?xml version="1.0" encoding="utf-8"?>
+<p:sld xmlns:a="http://schemas.openxmlformats.org/drawingml/2006/main" xmlns:r="http://schemas.openxmlformats.org/officeDocument/2006/relationships" xmlns:mc="http://schemas.openxmlformats.org/markup-compatibility/2006" xmlns:mv="urn:schemas-microsoft-com:mac:vml" xmlns:p="http://schemas.openxmlformats.org/presentationml/2006/main" xmlns:c="http://schemas.openxmlformats.org/drawingml/2006/chart" xmlns:dgm="http://schemas.openxmlformats.org/drawingml/2006/diagram" xmlns:o="urn:schemas-microsoft-com:office:office" xmlns:v="urn:schemas-microsoft-com:vml" xmlns:pvml="urn:schemas-microsoft-com:office:powerpoint" xmlns:com="http://schemas.openxmlformats.org/drawingml/2006/compatibility" xmlns:p14="http://schemas.microsoft.com/office/powerpoint/2010/main" xmlns:p15="http://schemas.microsoft.com/office/powerpoint/2012/main" xmlns:ahyp="http://schemas.microsoft.com/office/drawing/2018/hyperlinkcolor">
+  <p:cSld>
+    <p:spTree>
+      <p:nvGrpSpPr>
+        <p:cNvPr id="306" name="Shape 306"/>
+        <p:cNvGrpSpPr/>
+        <p:nvPr/>
+      </p:nvGrpSpPr>
+      <p:grpSpPr>
+        <a:xfrm>
+          <a:off x="0" y="0"/>
+          <a:ext cx="0" cy="0"/>
+          <a:chOff x="0" y="0"/>
+          <a:chExt cx="0" cy="0"/>
+        </a:xfrm>
+      </p:grpSpPr>
+      <p:sp>
+        <p:nvSpPr>
+          <p:cNvPr id="307" name="Google Shape;307;p32"/>
+          <p:cNvSpPr txBox="1"/>
+          <p:nvPr>
+            <p:ph idx="4294967295" type="title"/>
+          </p:nvPr>
+        </p:nvSpPr>
+        <p:spPr>
+          <a:xfrm>
+            <a:off x="259350" y="-61976"/>
+            <a:ext cx="8520600" cy="572700"/>
+          </a:xfrm>
+          <a:prstGeom prst="rect">
+            <a:avLst/>
+          </a:prstGeom>
+        </p:spPr>
+        <p:txBody>
+          <a:bodyPr anchorCtr="0" anchor="t" bIns="91425" lIns="91425" spcFirstLastPara="1" rIns="91425" wrap="square" tIns="91425">
+            <a:normAutofit fontScale="90000"/>
+          </a:bodyPr>
+          <a:lstStyle/>
+          <a:p>
+            <a:pPr indent="0" lvl="0" marL="0" rtl="0" algn="l">
+              <a:spcBef>
+                <a:spcPts val="0"/>
+              </a:spcBef>
+              <a:spcAft>
+                <a:spcPts val="0"/>
+              </a:spcAft>
+              <a:buNone/>
+            </a:pPr>
+            <a:r>
+              <a:rPr lang="en"/>
+              <a:t>Homework problems</a:t>
+            </a:r>
+            <a:endParaRPr/>
+          </a:p>
+        </p:txBody>
+      </p:sp>
+      <p:sp>
+        <p:nvSpPr>
+          <p:cNvPr id="308" name="Google Shape;308;p32"/>
+          <p:cNvSpPr txBox="1"/>
+          <p:nvPr/>
+        </p:nvSpPr>
+        <p:spPr>
+          <a:xfrm>
+            <a:off x="381450" y="587161"/>
+            <a:ext cx="3013800" cy="461700"/>
+          </a:xfrm>
+          <a:prstGeom prst="rect">
+            <a:avLst/>
+          </a:prstGeom>
+          <a:noFill/>
+          <a:ln>
+            <a:noFill/>
+          </a:ln>
+        </p:spPr>
+        <p:txBody>
+          <a:bodyPr anchorCtr="0" anchor="t" bIns="91425" lIns="91425" spcFirstLastPara="1" rIns="91425" wrap="square" tIns="91425">
+            <a:spAutoFit/>
+          </a:bodyPr>
+          <a:lstStyle/>
+          <a:p>
+            <a:pPr indent="0" lvl="0" marL="0" rtl="0" algn="l">
+              <a:spcBef>
+                <a:spcPts val="0"/>
+              </a:spcBef>
+              <a:spcAft>
+                <a:spcPts val="0"/>
+              </a:spcAft>
+              <a:buNone/>
+            </a:pPr>
+            <a:r>
+              <a:t/>
+            </a:r>
+            <a:endParaRPr sz="1800">
+              <a:solidFill>
+                <a:schemeClr val="dk2"/>
+              </a:solidFill>
+            </a:endParaRPr>
+          </a:p>
+        </p:txBody>
+      </p:sp>
+      <p:sp>
+        <p:nvSpPr>
+          <p:cNvPr id="309" name="Google Shape;309;p32"/>
+          <p:cNvSpPr txBox="1"/>
+          <p:nvPr/>
+        </p:nvSpPr>
+        <p:spPr>
+          <a:xfrm>
+            <a:off x="367400" y="682099"/>
+            <a:ext cx="5932200" cy="646500"/>
+          </a:xfrm>
+          <a:prstGeom prst="rect">
+            <a:avLst/>
+          </a:prstGeom>
+          <a:noFill/>
+          <a:ln>
+            <a:noFill/>
+          </a:ln>
+        </p:spPr>
+        <p:txBody>
+          <a:bodyPr anchorCtr="0" anchor="t" bIns="91425" lIns="91425" spcFirstLastPara="1" rIns="91425" wrap="square" tIns="91425">
+            <a:spAutoFit/>
+          </a:bodyPr>
+          <a:lstStyle/>
+          <a:p>
+            <a:pPr indent="-323850" lvl="0" marL="457200" rtl="0" algn="l">
+              <a:spcBef>
+                <a:spcPts val="0"/>
+              </a:spcBef>
+              <a:spcAft>
+                <a:spcPts val="0"/>
+              </a:spcAft>
+              <a:buClr>
+                <a:schemeClr val="dk2"/>
+              </a:buClr>
+              <a:buSzPts val="1500"/>
+              <a:buAutoNum type="arabicPeriod"/>
+            </a:pPr>
+            <a:r>
+              <a:rPr lang="en" sz="1500">
+                <a:solidFill>
+                  <a:schemeClr val="dk2"/>
+                </a:solidFill>
+              </a:rPr>
+              <a:t>Following slide 15, and verify_partial_derivates.py, calculate following derivatives and verify numerically</a:t>
+            </a:r>
+            <a:endParaRPr sz="1500">
+              <a:solidFill>
+                <a:schemeClr val="dk2"/>
+              </a:solidFill>
+            </a:endParaRPr>
+          </a:p>
+        </p:txBody>
+      </p:sp>
+      <p:pic>
+        <p:nvPicPr>
+          <p:cNvPr descr="{&quot;aid&quot;:null,&quot;code&quot;:&quot;\\begin{lalign*}\n&amp;{f=x^{2},\\,g=\\exp\\left(x\\right),\\,h=fg}\\\\\n&amp;{\\text{Calculate}\\;h_{x}=\\diff{h}{x}}\\\\\n&amp;{f=x^{2},\\,g=xy+1,h=f/g\\,}\\\\\n&amp;{\\text{Calculate}\\;h_{x},\\,h_{y}}\t\n\\end{lalign*}&quot;,&quot;backgroundColorModified&quot;:false,&quot;type&quot;:&quot;lalign*&quot;,&quot;id&quot;:&quot;13&quot;,&quot;font&quot;:{&quot;family&quot;:&quot;Arial&quot;,&quot;size&quot;:12,&quot;color&quot;:&quot;#000000&quot;},&quot;backgroundColor&quot;:&quot;#FFFFFF&quot;,&quot;ts&quot;:1759690112382,&quot;cs&quot;:&quot;uNh7qRnTKuF30vt9nBVOQg==&quot;,&quot;size&quot;:{&quot;width&quot;:224,&quot;height&quot;:118}}" id="310" name="Google Shape;310;p32"/>
+          <p:cNvPicPr preferRelativeResize="0"/>
+          <p:nvPr/>
+        </p:nvPicPr>
+        <p:blipFill>
+          <a:blip r:embed="rId3">
+            <a:alphaModFix/>
+          </a:blip>
+          <a:stretch>
+            <a:fillRect/>
+          </a:stretch>
+        </p:blipFill>
+        <p:spPr>
+          <a:xfrm>
+            <a:off x="943425" y="1328599"/>
+            <a:ext cx="2133600" cy="1123950"/>
+          </a:xfrm>
+          <a:prstGeom prst="rect">
+            <a:avLst/>
+          </a:prstGeom>
+          <a:noFill/>
+          <a:ln>
+            <a:noFill/>
+          </a:ln>
+        </p:spPr>
+      </p:pic>
+      <p:sp>
+        <p:nvSpPr>
+          <p:cNvPr id="311" name="Google Shape;311;p32"/>
+          <p:cNvSpPr txBox="1"/>
+          <p:nvPr/>
+        </p:nvSpPr>
+        <p:spPr>
+          <a:xfrm>
+            <a:off x="381450" y="2571750"/>
+            <a:ext cx="7276200" cy="2662800"/>
+          </a:xfrm>
+          <a:prstGeom prst="rect">
+            <a:avLst/>
+          </a:prstGeom>
+          <a:noFill/>
+          <a:ln>
+            <a:noFill/>
+          </a:ln>
+        </p:spPr>
+        <p:txBody>
+          <a:bodyPr anchorCtr="0" anchor="t" bIns="91425" lIns="91425" spcFirstLastPara="1" rIns="91425" wrap="square" tIns="91425">
+            <a:spAutoFit/>
+          </a:bodyPr>
+          <a:lstStyle/>
+          <a:p>
+            <a:pPr indent="-323850" lvl="0" marL="457200" rtl="0" algn="l">
+              <a:spcBef>
+                <a:spcPts val="0"/>
+              </a:spcBef>
+              <a:spcAft>
+                <a:spcPts val="0"/>
+              </a:spcAft>
+              <a:buSzPts val="1500"/>
+              <a:buAutoNum type="arabicPeriod"/>
+            </a:pPr>
+            <a:r>
+              <a:rPr lang="en" sz="1500">
+                <a:solidFill>
+                  <a:schemeClr val="dk2"/>
+                </a:solidFill>
+              </a:rPr>
+              <a:t>All problems in Exercises section 1.4 of </a:t>
+            </a:r>
+            <a:r>
+              <a:rPr lang="en" sz="1500" u="sng">
+                <a:solidFill>
+                  <a:schemeClr val="hlink"/>
+                </a:solidFill>
+                <a:hlinkClick r:id="rId4"/>
+              </a:rPr>
+              <a:t>Matrix Calculus</a:t>
+            </a:r>
+            <a:r>
+              <a:rPr lang="en" sz="1500">
+                <a:solidFill>
+                  <a:schemeClr val="dk2"/>
+                </a:solidFill>
+              </a:rPr>
+              <a:t> </a:t>
+            </a:r>
+            <a:endParaRPr sz="1500">
+              <a:solidFill>
+                <a:schemeClr val="dk2"/>
+              </a:solidFill>
+            </a:endParaRPr>
+          </a:p>
           <a:p>
             <a:pPr indent="0" lvl="0" marL="457200" rtl="0" algn="l">
               <a:spcBef>
@@ -10675,7 +13722,150 @@
             <a:r>
               <a:t/>
             </a:r>
-            <a:endParaRPr sz="1800">
+            <a:endParaRPr sz="1500">
+              <a:solidFill>
+                <a:schemeClr val="dk2"/>
+              </a:solidFill>
+            </a:endParaRPr>
+          </a:p>
+          <a:p>
+            <a:pPr indent="-323850" lvl="0" marL="457200" rtl="0" algn="l">
+              <a:spcBef>
+                <a:spcPts val="0"/>
+              </a:spcBef>
+              <a:spcAft>
+                <a:spcPts val="0"/>
+              </a:spcAft>
+              <a:buClr>
+                <a:schemeClr val="dk2"/>
+              </a:buClr>
+              <a:buSzPts val="1500"/>
+              <a:buAutoNum type="arabicPeriod"/>
+            </a:pPr>
+            <a:r>
+              <a:rPr lang="en" sz="1500">
+                <a:solidFill>
+                  <a:schemeClr val="dk2"/>
+                </a:solidFill>
+              </a:rPr>
+              <a:t>Run part 2 of verify_partial_derivatives.py. Make sure you can follow the code and see how it implements the math in Slide 14</a:t>
+            </a:r>
+            <a:endParaRPr sz="1500">
+              <a:solidFill>
+                <a:schemeClr val="dk2"/>
+              </a:solidFill>
+            </a:endParaRPr>
+          </a:p>
+          <a:p>
+            <a:pPr indent="-323850" lvl="0" marL="457200" rtl="0" algn="l">
+              <a:spcBef>
+                <a:spcPts val="0"/>
+              </a:spcBef>
+              <a:spcAft>
+                <a:spcPts val="0"/>
+              </a:spcAft>
+              <a:buClr>
+                <a:schemeClr val="dk2"/>
+              </a:buClr>
+              <a:buSzPts val="1500"/>
+              <a:buAutoNum type="arabicPeriod"/>
+            </a:pPr>
+            <a:r>
+              <a:rPr lang="en">
+                <a:solidFill>
+                  <a:schemeClr val="dk2"/>
+                </a:solidFill>
+              </a:rPr>
+              <a:t>Following linear_regression.py, generate points along y=xsin(x) and fit a line. What do you observe</a:t>
+            </a:r>
+            <a:endParaRPr>
+              <a:solidFill>
+                <a:schemeClr val="dk2"/>
+              </a:solidFill>
+            </a:endParaRPr>
+          </a:p>
+          <a:p>
+            <a:pPr indent="-317500" lvl="0" marL="457200" rtl="0" algn="l">
+              <a:spcBef>
+                <a:spcPts val="0"/>
+              </a:spcBef>
+              <a:spcAft>
+                <a:spcPts val="0"/>
+              </a:spcAft>
+              <a:buClr>
+                <a:schemeClr val="dk2"/>
+              </a:buClr>
+              <a:buSzPts val="1400"/>
+              <a:buAutoNum type="arabicPeriod"/>
+            </a:pPr>
+            <a:r>
+              <a:rPr lang="en">
+                <a:solidFill>
+                  <a:schemeClr val="dk2"/>
+                </a:solidFill>
+              </a:rPr>
+              <a:t>For some reason, we want the intercept </a:t>
+            </a:r>
+            <a:r>
+              <a:rPr i="1" lang="en">
+                <a:solidFill>
+                  <a:schemeClr val="dk2"/>
+                </a:solidFill>
+              </a:rPr>
+              <a:t>b</a:t>
+            </a:r>
+            <a:r>
+              <a:rPr lang="en">
+                <a:solidFill>
+                  <a:schemeClr val="dk2"/>
+                </a:solidFill>
+              </a:rPr>
+              <a:t> to remain small. How would add this constraint to the regression problem? Solve for optimal values of a and b with this constraint</a:t>
+            </a:r>
+            <a:endParaRPr>
+              <a:solidFill>
+                <a:schemeClr val="dk2"/>
+              </a:solidFill>
+            </a:endParaRPr>
+          </a:p>
+          <a:p>
+            <a:pPr indent="0" lvl="0" marL="0" rtl="0" algn="l">
+              <a:spcBef>
+                <a:spcPts val="0"/>
+              </a:spcBef>
+              <a:spcAft>
+                <a:spcPts val="0"/>
+              </a:spcAft>
+              <a:buNone/>
+            </a:pPr>
+            <a:r>
+              <a:t/>
+            </a:r>
+            <a:endParaRPr sz="1500">
+              <a:solidFill>
+                <a:schemeClr val="dk2"/>
+              </a:solidFill>
+            </a:endParaRPr>
+          </a:p>
+          <a:p>
+            <a:pPr indent="0" lvl="0" marL="0" rtl="0" algn="l">
+              <a:spcBef>
+                <a:spcPts val="0"/>
+              </a:spcBef>
+              <a:spcAft>
+                <a:spcPts val="0"/>
+              </a:spcAft>
+              <a:buNone/>
+            </a:pPr>
+            <a:r>
+              <a:rPr lang="en" sz="1500">
+                <a:solidFill>
+                  <a:schemeClr val="dk2"/>
+                </a:solidFill>
+              </a:rPr>
+              <a:t>. </a:t>
+            </a:r>
+            <a:endParaRPr sz="1500">
               <a:solidFill>
                 <a:schemeClr val="dk2"/>
               </a:solidFill>
@@ -11513,7 +14703,7 @@
                   <a:schemeClr val="dk2"/>
                 </a:solidFill>
               </a:rPr>
-              <a:t>verify_partial_derivatives.py</a:t>
+              <a:t>See: verify_partial_derivatives.py</a:t>
             </a:r>
             <a:endParaRPr sz="1200">
               <a:solidFill>
@@ -11850,7 +15040,7 @@
         <p:spPr>
           <a:xfrm>
             <a:off x="311700" y="445025"/>
-            <a:ext cx="3009300" cy="572700"/>
+            <a:ext cx="5995500" cy="572700"/>
           </a:xfrm>
           <a:prstGeom prst="rect">
             <a:avLst/>
@@ -12073,7 +15263,7 @@
         </p:blipFill>
         <p:spPr>
           <a:xfrm>
-            <a:off x="3386125" y="904800"/>
+            <a:off x="3353275" y="1237300"/>
             <a:ext cx="5757863" cy="3090863"/>
           </a:xfrm>
           <a:prstGeom prst="rect">
@@ -12270,6 +15460,56 @@
           </a:ln>
         </p:spPr>
       </p:pic>
+      <p:sp>
+        <p:nvSpPr>
+          <p:cNvPr id="113" name="Google Shape;113;p20"/>
+          <p:cNvSpPr txBox="1"/>
+          <p:nvPr/>
+        </p:nvSpPr>
+        <p:spPr>
+          <a:xfrm>
+            <a:off x="0" y="4708275"/>
+            <a:ext cx="4559700" cy="369300"/>
+          </a:xfrm>
+          <a:prstGeom prst="rect">
+            <a:avLst/>
+          </a:prstGeom>
+          <a:noFill/>
+          <a:ln>
+            <a:noFill/>
+          </a:ln>
+        </p:spPr>
+        <p:txBody>
+          <a:bodyPr anchorCtr="0" anchor="t" bIns="91425" lIns="91425" spcFirstLastPara="1" rIns="91425" wrap="square" tIns="91425">
+            <a:spAutoFit/>
+          </a:bodyPr>
+          <a:lstStyle/>
+          <a:p>
+            <a:pPr indent="0" lvl="0" marL="0" rtl="0" algn="l">
+              <a:spcBef>
+                <a:spcPts val="0"/>
+              </a:spcBef>
+              <a:spcAft>
+                <a:spcPts val="0"/>
+              </a:spcAft>
+              <a:buNone/>
+            </a:pPr>
+            <a:r>
+              <a:rPr lang="en" sz="1200">
+                <a:solidFill>
+                  <a:schemeClr val="dk2"/>
+                </a:solidFill>
+              </a:rPr>
+              <a:t>See: direction_derivatives.py</a:t>
+            </a:r>
+            <a:endParaRPr sz="1200">
+              <a:solidFill>
+                <a:schemeClr val="dk2"/>
+              </a:solidFill>
+            </a:endParaRPr>
+          </a:p>
+        </p:txBody>
+      </p:sp>
     </p:spTree>
   </p:cSld>
   <p:clrMapOvr>
@@ -12283,7 +15523,7 @@
   <p:cSld>
     <p:spTree>
       <p:nvGrpSpPr>
-        <p:cNvPr id="116" name="Shape 116"/>
+        <p:cNvPr id="117" name="Shape 117"/>
         <p:cNvGrpSpPr/>
         <p:nvPr/>
       </p:nvGrpSpPr>
@@ -12297,7 +15537,7 @@
       </p:grpSpPr>
       <p:sp>
         <p:nvSpPr>
-          <p:cNvPr id="117" name="Google Shape;117;p21"/>
+          <p:cNvPr id="118" name="Google Shape;118;p21"/>
           <p:cNvSpPr txBox="1"/>
           <p:nvPr>
             <p:ph idx="4294967295" type="title"/>
@@ -12306,7 +15546,7 @@
         <p:spPr>
           <a:xfrm>
             <a:off x="311700" y="445025"/>
-            <a:ext cx="8520600" cy="572700"/>
+            <a:ext cx="6865200" cy="572700"/>
           </a:xfrm>
           <a:prstGeom prst="rect">
             <a:avLst/>
@@ -12329,7 +15569,7 @@
             </a:pPr>
             <a:r>
               <a:rPr lang="en"/>
-              <a:t>Partial Derivatives: Chain Rule</a:t>
+              <a:t>Hessian Matrix</a:t>
             </a:r>
             <a:endParaRPr/>
           </a:p>
@@ -12337,7 +15577,7 @@
       </p:sp>
       <p:sp>
         <p:nvSpPr>
-          <p:cNvPr id="118" name="Google Shape;118;p21"/>
+          <p:cNvPr id="119" name="Google Shape;119;p21"/>
           <p:cNvSpPr txBox="1"/>
           <p:nvPr/>
         </p:nvSpPr>
@@ -12399,9 +15639,59 @@
           </a:p>
         </p:txBody>
       </p:sp>
+      <p:sp>
+        <p:nvSpPr>
+          <p:cNvPr id="120" name="Google Shape;120;p21"/>
+          <p:cNvSpPr txBox="1"/>
+          <p:nvPr/>
+        </p:nvSpPr>
+        <p:spPr>
+          <a:xfrm>
+            <a:off x="418875" y="1128425"/>
+            <a:ext cx="7388700" cy="384900"/>
+          </a:xfrm>
+          <a:prstGeom prst="rect">
+            <a:avLst/>
+          </a:prstGeom>
+          <a:noFill/>
+          <a:ln>
+            <a:noFill/>
+          </a:ln>
+        </p:spPr>
+        <p:txBody>
+          <a:bodyPr anchorCtr="0" anchor="t" bIns="91425" lIns="91425" spcFirstLastPara="1" rIns="91425" wrap="square" tIns="91425">
+            <a:spAutoFit/>
+          </a:bodyPr>
+          <a:lstStyle/>
+          <a:p>
+            <a:pPr indent="0" lvl="0" marL="0" rtl="0" algn="l">
+              <a:spcBef>
+                <a:spcPts val="0"/>
+              </a:spcBef>
+              <a:spcAft>
+                <a:spcPts val="0"/>
+              </a:spcAft>
+              <a:buNone/>
+            </a:pPr>
+            <a:r>
+              <a:rPr lang="en" sz="1300">
+                <a:solidFill>
+                  <a:schemeClr val="dk2"/>
+                </a:solidFill>
+              </a:rPr>
+              <a:t>Hessian matrix is a matrix of second derivatives. </a:t>
+            </a:r>
+            <a:endParaRPr sz="1300">
+              <a:solidFill>
+                <a:schemeClr val="dk2"/>
+              </a:solidFill>
+            </a:endParaRPr>
+          </a:p>
+        </p:txBody>
+      </p:sp>
       <p:pic>
         <p:nvPicPr>
-          <p:cNvPr descr="{&quot;type&quot;:&quot;lalign*&quot;,&quot;backgroundColorModified&quot;:false,&quot;id&quot;:&quot;6&quot;,&quot;font&quot;:{&quot;color&quot;:&quot;#000000&quot;,&quot;size&quot;:12,&quot;family&quot;:&quot;Arial&quot;},&quot;code&quot;:&quot;\\begin{lalign*}\n&amp;{\\text{Recall}\\;\\text{chain}\\;\\text{rule}\\;\\text{in}\\;\\text{one}\\;\\text{dimension:}}\\\\\n&amp;{h\\left(x\\right)=f\\left(g\\left(x\\right)\\right)}\\\\\n&amp;{\\diff{h}{x}=\\diff{g}{x}\\diff{f}{g},\\,eg.,\\,h\\left(x\\right)=\\sin\\left(\\log_{}\\left(x\\right)\\right),\\,h^{\\prime}\\left(x\\right)=\\cos\\left(\\log_{}\\left(x\\right)\\right)/x}\\\\\n&amp;{\\text{This}\\;\\text{can}\\;\\text{be}\\;\\text{thought}\\;\\text{of}\\;\\text{a}\\text{s}\\;\\text{a}\\;\\text{graph}}\\\\\n&amp;{g\\to f\\to h}\t\n\\end{lalign*}&quot;,&quot;backgroundColor&quot;:&quot;#FFFFFF&quot;,&quot;aid&quot;:null,&quot;ts&quot;:1759617508681,&quot;cs&quot;:&quot;aARgiuTPqfv9QbSFG55aeA==&quot;,&quot;size&quot;:{&quot;width&quot;:518.5,&quot;height&quot;:138.5}}" id="119" name="Google Shape;119;p21"/>
+          <p:cNvPr descr="{&quot;aid&quot;:null,&quot;type&quot;:&quot;lalign*&quot;,&quot;font&quot;:{&quot;size&quot;:10,&quot;family&quot;:&quot;Arial&quot;,&quot;color&quot;:&quot;#000000&quot;},&quot;id&quot;:&quot;15&quot;,&quot;code&quot;:&quot;\\begin{lalign*}\n&amp;{\\text{if}\\;f\\left(x\\right)=\\begin{pmatrix}\n{x_{1}}\\\\\n{x_{2}}\\\\\n{x_{3}}\\\\\n\\end{pmatrix}}\\\\\n&amp;{\\text{Then,}\\;\\diff{f}{x}=\\nabla f=\\begin{pmatrix}\n{\\pdf{f}{x_{1}}}\\\\\n{\\pdf{f}{x_{2}}}\\\\\n{\\pdf{f}{x_{3}}}\\\\\n\\end{pmatrix}}\\\\\n&amp;{\\text{And}\\,\\frac{\\dd ^{2}f}{\\dd ^{2}x}=H=\\begin{pmatrix}\n{\\pdf{f}{x_{1}^{}}\\pdf{f}{x_{1}^{}}}&amp;{\\pdf{f}{x_{1}^{}}\\pdf{f}{x_{2}^{}}}&amp;{\\pdf{f}{x_{1}^{}}\\pdf{f}{x_{3}^{}}}\\\\\n{\\pdf{f}{x_{2}^{}}\\pdf{f}{x_{1}^{}}}&amp;{\\pdf{f}{x_{2}^{}}\\pdf{f}{x_{2}^{}}}&amp;{\\pdf{f}{x_{2}^{}}\\pdf{f}{x_{3}^{}}}\\\\\n{\\pdf{f}{x_{3}^{}}\\pdf{f}{x_{1}^{}}}&amp;{\\pdf{f}{x_{3}^{}}\\pdf{f}{x_{2}^{}}}&amp;{\\pdf{f}{x_{3}^{}}\\pdf{f}{x_{3}^{}}}\\\\\n\\end{pmatrix}}\t\n\\end{lalign*}&quot;,&quot;backgroundColor&quot;:&quot;#FFFFFF&quot;,&quot;backgroundColorModified&quot;:false,&quot;ts&quot;:1759975179259,&quot;cs&quot;:&quot;U4n/H9DmU+aT6mE6beIRPQ==&quot;,&quot;size&quot;:{&quot;width&quot;:318.25,&quot;height&quot;:234.75}}" id="121" name="Google Shape;121;p21"/>
           <p:cNvPicPr preferRelativeResize="0"/>
           <p:nvPr/>
         </p:nvPicPr>
@@ -12415,8 +15705,8 @@
         </p:blipFill>
         <p:spPr>
           <a:xfrm>
-            <a:off x="427375" y="1162825"/>
-            <a:ext cx="4938713" cy="1319213"/>
+            <a:off x="520831" y="1901725"/>
+            <a:ext cx="3031331" cy="2235994"/>
           </a:xfrm>
           <a:prstGeom prst="rect">
             <a:avLst/>
@@ -12427,472 +15717,9 @@
           </a:ln>
         </p:spPr>
       </p:pic>
-      <p:sp>
-        <p:nvSpPr>
-          <p:cNvPr id="120" name="Google Shape;120;p21"/>
-          <p:cNvSpPr txBox="1"/>
-          <p:nvPr/>
-        </p:nvSpPr>
-        <p:spPr>
-          <a:xfrm>
-            <a:off x="165800" y="2571750"/>
-            <a:ext cx="7137900" cy="585000"/>
-          </a:xfrm>
-          <a:prstGeom prst="rect">
-            <a:avLst/>
-          </a:prstGeom>
-          <a:noFill/>
-          <a:ln>
-            <a:noFill/>
-          </a:ln>
-        </p:spPr>
-        <p:txBody>
-          <a:bodyPr anchorCtr="0" anchor="t" bIns="91425" lIns="91425" spcFirstLastPara="1" rIns="91425" wrap="square" tIns="91425">
-            <a:spAutoFit/>
-          </a:bodyPr>
-          <a:lstStyle/>
-          <a:p>
-            <a:pPr indent="0" lvl="0" marL="0" rtl="0" algn="l">
-              <a:spcBef>
-                <a:spcPts val="0"/>
-              </a:spcBef>
-              <a:spcAft>
-                <a:spcPts val="0"/>
-              </a:spcAft>
-              <a:buNone/>
-            </a:pPr>
-            <a:r>
-              <a:rPr lang="en" sz="1300">
-                <a:solidFill>
-                  <a:schemeClr val="dk2"/>
-                </a:solidFill>
-              </a:rPr>
-              <a:t>    We can generalize this as follows:</a:t>
-            </a:r>
-            <a:endParaRPr sz="1300">
-              <a:solidFill>
-                <a:schemeClr val="dk2"/>
-              </a:solidFill>
-            </a:endParaRPr>
-          </a:p>
-          <a:p>
-            <a:pPr indent="0" lvl="0" marL="0" rtl="0" algn="l">
-              <a:spcBef>
-                <a:spcPts val="0"/>
-              </a:spcBef>
-              <a:spcAft>
-                <a:spcPts val="0"/>
-              </a:spcAft>
-              <a:buNone/>
-            </a:pPr>
-            <a:r>
-              <a:t/>
-            </a:r>
-            <a:endParaRPr sz="1300">
-              <a:solidFill>
-                <a:schemeClr val="dk2"/>
-              </a:solidFill>
-            </a:endParaRPr>
-          </a:p>
-        </p:txBody>
-      </p:sp>
-      <p:sp>
-        <p:nvSpPr>
-          <p:cNvPr id="121" name="Google Shape;121;p21"/>
-          <p:cNvSpPr/>
-          <p:nvPr/>
-        </p:nvSpPr>
-        <p:spPr>
-          <a:xfrm>
-            <a:off x="951550" y="3499300"/>
-            <a:ext cx="437100" cy="342900"/>
-          </a:xfrm>
-          <a:prstGeom prst="rect">
-            <a:avLst/>
-          </a:prstGeom>
-          <a:solidFill>
-            <a:schemeClr val="lt2"/>
-          </a:solidFill>
-          <a:ln cap="flat" cmpd="sng" w="9525">
-            <a:solidFill>
-              <a:schemeClr val="dk2"/>
-            </a:solidFill>
-            <a:prstDash val="solid"/>
-            <a:round/>
-            <a:headEnd len="sm" w="sm" type="none"/>
-            <a:tailEnd len="sm" w="sm" type="none"/>
-          </a:ln>
-        </p:spPr>
-        <p:txBody>
-          <a:bodyPr anchorCtr="0" anchor="ctr" bIns="91425" lIns="91425" spcFirstLastPara="1" rIns="91425" wrap="square" tIns="91425">
-            <a:noAutofit/>
-          </a:bodyPr>
-          <a:lstStyle/>
-          <a:p>
-            <a:pPr indent="0" lvl="0" marL="0" rtl="0" algn="ctr">
-              <a:spcBef>
-                <a:spcPts val="0"/>
-              </a:spcBef>
-              <a:spcAft>
-                <a:spcPts val="0"/>
-              </a:spcAft>
-              <a:buNone/>
-            </a:pPr>
-            <a:r>
-              <a:rPr lang="en"/>
-              <a:t>x</a:t>
-            </a:r>
-            <a:endParaRPr/>
-          </a:p>
-        </p:txBody>
-      </p:sp>
-      <p:sp>
-        <p:nvSpPr>
-          <p:cNvPr id="122" name="Google Shape;122;p21"/>
-          <p:cNvSpPr/>
-          <p:nvPr/>
-        </p:nvSpPr>
-        <p:spPr>
-          <a:xfrm>
-            <a:off x="1849750" y="3094475"/>
-            <a:ext cx="542100" cy="342900"/>
-          </a:xfrm>
-          <a:prstGeom prst="rect">
-            <a:avLst/>
-          </a:prstGeom>
-          <a:solidFill>
-            <a:schemeClr val="lt2"/>
-          </a:solidFill>
-          <a:ln cap="flat" cmpd="sng" w="9525">
-            <a:solidFill>
-              <a:schemeClr val="dk2"/>
-            </a:solidFill>
-            <a:prstDash val="solid"/>
-            <a:round/>
-            <a:headEnd len="sm" w="sm" type="none"/>
-            <a:tailEnd len="sm" w="sm" type="none"/>
-          </a:ln>
-        </p:spPr>
-        <p:txBody>
-          <a:bodyPr anchorCtr="0" anchor="ctr" bIns="91425" lIns="91425" spcFirstLastPara="1" rIns="91425" wrap="square" tIns="91425">
-            <a:noAutofit/>
-          </a:bodyPr>
-          <a:lstStyle/>
-          <a:p>
-            <a:pPr indent="0" lvl="0" marL="0" rtl="0" algn="ctr">
-              <a:spcBef>
-                <a:spcPts val="0"/>
-              </a:spcBef>
-              <a:spcAft>
-                <a:spcPts val="0"/>
-              </a:spcAft>
-              <a:buNone/>
-            </a:pPr>
-            <a:r>
-              <a:rPr lang="en"/>
-              <a:t>f(x)</a:t>
-            </a:r>
-            <a:endParaRPr/>
-          </a:p>
-        </p:txBody>
-      </p:sp>
-      <p:sp>
-        <p:nvSpPr>
-          <p:cNvPr id="123" name="Google Shape;123;p21"/>
-          <p:cNvSpPr/>
-          <p:nvPr/>
-        </p:nvSpPr>
-        <p:spPr>
-          <a:xfrm>
-            <a:off x="1849750" y="3906950"/>
-            <a:ext cx="542100" cy="342900"/>
-          </a:xfrm>
-          <a:prstGeom prst="rect">
-            <a:avLst/>
-          </a:prstGeom>
-          <a:solidFill>
-            <a:schemeClr val="lt2"/>
-          </a:solidFill>
-          <a:ln cap="flat" cmpd="sng" w="9525">
-            <a:solidFill>
-              <a:schemeClr val="dk2"/>
-            </a:solidFill>
-            <a:prstDash val="solid"/>
-            <a:round/>
-            <a:headEnd len="sm" w="sm" type="none"/>
-            <a:tailEnd len="sm" w="sm" type="none"/>
-          </a:ln>
-        </p:spPr>
-        <p:txBody>
-          <a:bodyPr anchorCtr="0" anchor="ctr" bIns="91425" lIns="91425" spcFirstLastPara="1" rIns="91425" wrap="square" tIns="91425">
-            <a:noAutofit/>
-          </a:bodyPr>
-          <a:lstStyle/>
-          <a:p>
-            <a:pPr indent="0" lvl="0" marL="0" rtl="0" algn="ctr">
-              <a:spcBef>
-                <a:spcPts val="0"/>
-              </a:spcBef>
-              <a:spcAft>
-                <a:spcPts val="0"/>
-              </a:spcAft>
-              <a:buNone/>
-            </a:pPr>
-            <a:r>
-              <a:rPr lang="en"/>
-              <a:t>g(x)</a:t>
-            </a:r>
-            <a:endParaRPr/>
-          </a:p>
-        </p:txBody>
-      </p:sp>
-      <p:sp>
-        <p:nvSpPr>
-          <p:cNvPr id="124" name="Google Shape;124;p21"/>
-          <p:cNvSpPr/>
-          <p:nvPr/>
-        </p:nvSpPr>
-        <p:spPr>
-          <a:xfrm>
-            <a:off x="2945125" y="3465100"/>
-            <a:ext cx="1238400" cy="342900"/>
-          </a:xfrm>
-          <a:prstGeom prst="rect">
-            <a:avLst/>
-          </a:prstGeom>
-          <a:solidFill>
-            <a:schemeClr val="lt2"/>
-          </a:solidFill>
-          <a:ln cap="flat" cmpd="sng" w="9525">
-            <a:solidFill>
-              <a:schemeClr val="dk2"/>
-            </a:solidFill>
-            <a:prstDash val="solid"/>
-            <a:round/>
-            <a:headEnd len="sm" w="sm" type="none"/>
-            <a:tailEnd len="sm" w="sm" type="none"/>
-          </a:ln>
-        </p:spPr>
-        <p:txBody>
-          <a:bodyPr anchorCtr="0" anchor="ctr" bIns="91425" lIns="91425" spcFirstLastPara="1" rIns="91425" wrap="square" tIns="91425">
-            <a:noAutofit/>
-          </a:bodyPr>
-          <a:lstStyle/>
-          <a:p>
-            <a:pPr indent="0" lvl="0" marL="0" rtl="0" algn="ctr">
-              <a:spcBef>
-                <a:spcPts val="0"/>
-              </a:spcBef>
-              <a:spcAft>
-                <a:spcPts val="0"/>
-              </a:spcAft>
-              <a:buNone/>
-            </a:pPr>
-            <a:r>
-              <a:rPr lang="en"/>
-              <a:t>h(f(x), g(x))</a:t>
-            </a:r>
-            <a:endParaRPr/>
-          </a:p>
-        </p:txBody>
-      </p:sp>
-      <p:sp>
-        <p:nvSpPr>
-          <p:cNvPr id="125" name="Google Shape;125;p21"/>
-          <p:cNvSpPr/>
-          <p:nvPr/>
-        </p:nvSpPr>
-        <p:spPr>
-          <a:xfrm>
-            <a:off x="4652950" y="3465100"/>
-            <a:ext cx="437100" cy="342900"/>
-          </a:xfrm>
-          <a:prstGeom prst="rect">
-            <a:avLst/>
-          </a:prstGeom>
-          <a:solidFill>
-            <a:schemeClr val="lt2"/>
-          </a:solidFill>
-          <a:ln cap="flat" cmpd="sng" w="9525">
-            <a:solidFill>
-              <a:schemeClr val="dk2"/>
-            </a:solidFill>
-            <a:prstDash val="solid"/>
-            <a:round/>
-            <a:headEnd len="sm" w="sm" type="none"/>
-            <a:tailEnd len="sm" w="sm" type="none"/>
-          </a:ln>
-        </p:spPr>
-        <p:txBody>
-          <a:bodyPr anchorCtr="0" anchor="ctr" bIns="91425" lIns="91425" spcFirstLastPara="1" rIns="91425" wrap="square" tIns="91425">
-            <a:noAutofit/>
-          </a:bodyPr>
-          <a:lstStyle/>
-          <a:p>
-            <a:pPr indent="0" lvl="0" marL="0" rtl="0" algn="ctr">
-              <a:spcBef>
-                <a:spcPts val="0"/>
-              </a:spcBef>
-              <a:spcAft>
-                <a:spcPts val="0"/>
-              </a:spcAft>
-              <a:buNone/>
-            </a:pPr>
-            <a:r>
-              <a:rPr lang="en"/>
-              <a:t>y</a:t>
-            </a:r>
-            <a:endParaRPr/>
-          </a:p>
-        </p:txBody>
-      </p:sp>
-      <p:cxnSp>
-        <p:nvCxnSpPr>
-          <p:cNvPr id="126" name="Google Shape;126;p21"/>
-          <p:cNvCxnSpPr>
-            <a:stCxn id="121" idx="3"/>
-            <a:endCxn id="122" idx="1"/>
-          </p:cNvCxnSpPr>
-          <p:nvPr/>
-        </p:nvCxnSpPr>
-        <p:spPr>
-          <a:xfrm flipH="1" rot="10800000">
-            <a:off x="1388650" y="3266050"/>
-            <a:ext cx="461100" cy="404700"/>
-          </a:xfrm>
-          <a:prstGeom prst="straightConnector1">
-            <a:avLst/>
-          </a:prstGeom>
-          <a:noFill/>
-          <a:ln cap="flat" cmpd="sng" w="9525">
-            <a:solidFill>
-              <a:schemeClr val="dk2"/>
-            </a:solidFill>
-            <a:prstDash val="solid"/>
-            <a:round/>
-            <a:headEnd len="med" w="med" type="none"/>
-            <a:tailEnd len="med" w="med" type="triangle"/>
-          </a:ln>
-        </p:spPr>
-      </p:cxnSp>
-      <p:cxnSp>
-        <p:nvCxnSpPr>
-          <p:cNvPr id="127" name="Google Shape;127;p21"/>
-          <p:cNvCxnSpPr>
-            <a:stCxn id="121" idx="3"/>
-            <a:endCxn id="123" idx="1"/>
-          </p:cNvCxnSpPr>
-          <p:nvPr/>
-        </p:nvCxnSpPr>
-        <p:spPr>
-          <a:xfrm>
-            <a:off x="1388650" y="3670750"/>
-            <a:ext cx="461100" cy="407700"/>
-          </a:xfrm>
-          <a:prstGeom prst="straightConnector1">
-            <a:avLst/>
-          </a:prstGeom>
-          <a:noFill/>
-          <a:ln cap="flat" cmpd="sng" w="9525">
-            <a:solidFill>
-              <a:schemeClr val="dk2"/>
-            </a:solidFill>
-            <a:prstDash val="solid"/>
-            <a:round/>
-            <a:headEnd len="med" w="med" type="none"/>
-            <a:tailEnd len="med" w="med" type="triangle"/>
-          </a:ln>
-        </p:spPr>
-      </p:cxnSp>
-      <p:cxnSp>
-        <p:nvCxnSpPr>
-          <p:cNvPr id="128" name="Google Shape;128;p21"/>
-          <p:cNvCxnSpPr>
-            <a:stCxn id="122" idx="3"/>
-          </p:cNvCxnSpPr>
-          <p:nvPr/>
-        </p:nvCxnSpPr>
-        <p:spPr>
-          <a:xfrm>
-            <a:off x="2391850" y="3265925"/>
-            <a:ext cx="553200" cy="365400"/>
-          </a:xfrm>
-          <a:prstGeom prst="straightConnector1">
-            <a:avLst/>
-          </a:prstGeom>
-          <a:noFill/>
-          <a:ln cap="flat" cmpd="sng" w="9525">
-            <a:solidFill>
-              <a:schemeClr val="dk2"/>
-            </a:solidFill>
-            <a:prstDash val="solid"/>
-            <a:round/>
-            <a:headEnd len="med" w="med" type="none"/>
-            <a:tailEnd len="med" w="med" type="triangle"/>
-          </a:ln>
-        </p:spPr>
-      </p:cxnSp>
-      <p:cxnSp>
-        <p:nvCxnSpPr>
-          <p:cNvPr id="129" name="Google Shape;129;p21"/>
-          <p:cNvCxnSpPr>
-            <a:stCxn id="123" idx="3"/>
-            <a:endCxn id="124" idx="1"/>
-          </p:cNvCxnSpPr>
-          <p:nvPr/>
-        </p:nvCxnSpPr>
-        <p:spPr>
-          <a:xfrm flipH="1" rot="10800000">
-            <a:off x="2391850" y="3636500"/>
-            <a:ext cx="553200" cy="441900"/>
-          </a:xfrm>
-          <a:prstGeom prst="straightConnector1">
-            <a:avLst/>
-          </a:prstGeom>
-          <a:noFill/>
-          <a:ln cap="flat" cmpd="sng" w="9525">
-            <a:solidFill>
-              <a:schemeClr val="dk2"/>
-            </a:solidFill>
-            <a:prstDash val="solid"/>
-            <a:round/>
-            <a:headEnd len="med" w="med" type="none"/>
-            <a:tailEnd len="med" w="med" type="triangle"/>
-          </a:ln>
-        </p:spPr>
-      </p:cxnSp>
-      <p:cxnSp>
-        <p:nvCxnSpPr>
-          <p:cNvPr id="130" name="Google Shape;130;p21"/>
-          <p:cNvCxnSpPr>
-            <a:stCxn id="124" idx="3"/>
-            <a:endCxn id="125" idx="1"/>
-          </p:cNvCxnSpPr>
-          <p:nvPr/>
-        </p:nvCxnSpPr>
-        <p:spPr>
-          <a:xfrm>
-            <a:off x="4183525" y="3636550"/>
-            <a:ext cx="469500" cy="0"/>
-          </a:xfrm>
-          <a:prstGeom prst="straightConnector1">
-            <a:avLst/>
-          </a:prstGeom>
-          <a:noFill/>
-          <a:ln cap="flat" cmpd="sng" w="9525">
-            <a:solidFill>
-              <a:schemeClr val="dk2"/>
-            </a:solidFill>
-            <a:prstDash val="solid"/>
-            <a:round/>
-            <a:headEnd len="med" w="med" type="none"/>
-            <a:tailEnd len="med" w="med" type="triangle"/>
-          </a:ln>
-        </p:spPr>
-      </p:cxnSp>
       <p:pic>
         <p:nvPicPr>
-          <p:cNvPr descr="{&quot;code&quot;:&quot;$$\\pdf{h}{f}$$&quot;,&quot;font&quot;:{&quot;family&quot;:&quot;Arial&quot;,&quot;size&quot;:14,&quot;color&quot;:&quot;#000000&quot;},&quot;backgroundColorModified&quot;:false,&quot;backgroundColor&quot;:&quot;#EEEEEE&quot;,&quot;aid&quot;:null,&quot;type&quot;:&quot;$$&quot;,&quot;id&quot;:&quot;8&quot;,&quot;ts&quot;:1759676254594,&quot;cs&quot;:&quot;ORmG5BsYHePJNC5t1yPhjA==&quot;,&quot;size&quot;:{&quot;width&quot;:29.666666666666668,&quot;height&quot;:50}}" id="131" name="Google Shape;131;p21"/>
+          <p:cNvPr descr="{&quot;backgroundColorModified&quot;:false,&quot;type&quot;:&quot;gather*&quot;,&quot;backgroundColor&quot;:&quot;#FFFFFF&quot;,&quot;aid&quot;:null,&quot;font&quot;:{&quot;size&quot;:12,&quot;family&quot;:&quot;Arial&quot;,&quot;color&quot;:&quot;#000000&quot;},&quot;code&quot;:&quot;\\begin{gather*}\n{\\text{Example:}}\\\\\n{\\text{Let}\\;f\\left(x,y\\right)=e^{xy}}\\\\\n{\\pdf{f}{x}=ye^{xy},\\,\\pdf{f}{y}=xe^{xy}}\\\\\n{\\pdf{f}{y}\\pdf{f}{x}=e^{xy}+xye^{xy},\\,\\pdf{f}{x}\\pdf{f}{y}=e^{xy}+xye^{xy}}\\\\\n{\\pdf{f}{x}\\pdf{f}{x}=y^{2}e^{xy},\\,\\pdf{f}{y}\\pdf{f}{y}=x^{2}e^{xy}}\\\\\n{\\text{so,}}\\\\\n{H=\\begin{pmatrix}\n{y^{2}e^{xy}}&amp;{e^{xy}+xye^{xy}}\\\\\n{e^{xy}+xye^{xy}}&amp;{x^{2}e^{xy}}\\\\\n\\end{pmatrix}}\t\n\\end{gather*}&quot;,&quot;id&quot;:&quot;16&quot;,&quot;ts&quot;:1759976230168,&quot;cs&quot;:&quot;KAzQA94LjW+Eaq2LUdxZow==&quot;,&quot;size&quot;:{&quot;width&quot;:360,&quot;height&quot;:265}}" id="122" name="Google Shape;122;p21"/>
           <p:cNvPicPr preferRelativeResize="0"/>
           <p:nvPr/>
         </p:nvPicPr>
@@ -12906,8 +15733,8 @@
         </p:blipFill>
         <p:spPr>
           <a:xfrm>
-            <a:off x="2705000" y="2915450"/>
-            <a:ext cx="240122" cy="404700"/>
+            <a:off x="4619500" y="1624025"/>
+            <a:ext cx="3429000" cy="2524125"/>
           </a:xfrm>
           <a:prstGeom prst="rect">
             <a:avLst/>
@@ -12918,346 +15745,6 @@
           </a:ln>
         </p:spPr>
       </p:pic>
-      <p:pic>
-        <p:nvPicPr>
-          <p:cNvPr descr="{&quot;aid&quot;:null,&quot;font&quot;:{&quot;color&quot;:&quot;#000000&quot;,&quot;size&quot;:14,&quot;family&quot;:&quot;Arial&quot;},&quot;backgroundColorModified&quot;:false,&quot;backgroundColor&quot;:&quot;#FFFFFF&quot;,&quot;type&quot;:&quot;$$&quot;,&quot;code&quot;:&quot;$$\\pdf{h}{g}$$&quot;,&quot;id&quot;:&quot;9&quot;,&quot;ts&quot;:1759676276679,&quot;cs&quot;:&quot;EjUf1W/u9vfVIoywd6dHiQ==&quot;,&quot;size&quot;:{&quot;width&quot;:29.666666666666668,&quot;height&quot;:50}}" id="132" name="Google Shape;132;p21"/>
-          <p:cNvPicPr preferRelativeResize="0"/>
-          <p:nvPr/>
-        </p:nvPicPr>
-        <p:blipFill>
-          <a:blip r:embed="rId5">
-            <a:alphaModFix/>
-          </a:blip>
-          <a:stretch>
-            <a:fillRect/>
-          </a:stretch>
-        </p:blipFill>
-        <p:spPr>
-          <a:xfrm>
-            <a:off x="2750300" y="3927550"/>
-            <a:ext cx="240125" cy="404705"/>
-          </a:xfrm>
-          <a:prstGeom prst="rect">
-            <a:avLst/>
-          </a:prstGeom>
-          <a:noFill/>
-          <a:ln>
-            <a:noFill/>
-          </a:ln>
-        </p:spPr>
-      </p:pic>
-      <p:pic>
-        <p:nvPicPr>
-          <p:cNvPr descr="{&quot;aid&quot;:null,&quot;id&quot;:&quot;10&quot;,&quot;font&quot;:{&quot;size&quot;:14,&quot;color&quot;:&quot;#000000&quot;,&quot;family&quot;:&quot;Arial&quot;},&quot;type&quot;:&quot;$$&quot;,&quot;code&quot;:&quot;$$\\diff{f}{x}$$&quot;,&quot;backgroundColorModified&quot;:false,&quot;backgroundColor&quot;:&quot;#FFFFFF&quot;,&quot;ts&quot;:1759676328967,&quot;cs&quot;:&quot;uXDGP/K8g8GdIRDV2NTuuA==&quot;,&quot;size&quot;:{&quot;width&quot;:29.333333333333332,&quot;height&quot;:45.5}}" id="133" name="Google Shape;133;p21"/>
-          <p:cNvPicPr preferRelativeResize="0"/>
-          <p:nvPr/>
-        </p:nvPicPr>
-        <p:blipFill>
-          <a:blip r:embed="rId6">
-            <a:alphaModFix/>
-          </a:blip>
-          <a:stretch>
-            <a:fillRect/>
-          </a:stretch>
-        </p:blipFill>
-        <p:spPr>
-          <a:xfrm>
-            <a:off x="1368363" y="2986051"/>
-            <a:ext cx="240125" cy="372477"/>
-          </a:xfrm>
-          <a:prstGeom prst="rect">
-            <a:avLst/>
-          </a:prstGeom>
-          <a:noFill/>
-          <a:ln>
-            <a:noFill/>
-          </a:ln>
-        </p:spPr>
-      </p:pic>
-      <p:pic>
-        <p:nvPicPr>
-          <p:cNvPr descr="{&quot;type&quot;:&quot;$$&quot;,&quot;aid&quot;:null,&quot;backgroundColorModified&quot;:false,&quot;backgroundColor&quot;:&quot;#FFFFFF&quot;,&quot;code&quot;:&quot;$$\\diff{g}{x}$$&quot;,&quot;font&quot;:{&quot;color&quot;:&quot;#000000&quot;,&quot;size&quot;:18,&quot;family&quot;:&quot;Arial&quot;},&quot;id&quot;:&quot;11&quot;,&quot;ts&quot;:1759676375776,&quot;cs&quot;:&quot;AvAEUwZie6D8hX1WI6IPRg==&quot;,&quot;size&quot;:{&quot;width&quot;:37.666666666666664,&quot;height&quot;:58.333333333333336}}" id="134" name="Google Shape;134;p21"/>
-          <p:cNvPicPr preferRelativeResize="0"/>
-          <p:nvPr/>
-        </p:nvPicPr>
-        <p:blipFill>
-          <a:blip r:embed="rId7">
-            <a:alphaModFix/>
-          </a:blip>
-          <a:stretch>
-            <a:fillRect/>
-          </a:stretch>
-        </p:blipFill>
-        <p:spPr>
-          <a:xfrm>
-            <a:off x="1297225" y="3982975"/>
-            <a:ext cx="279400" cy="432708"/>
-          </a:xfrm>
-          <a:prstGeom prst="rect">
-            <a:avLst/>
-          </a:prstGeom>
-          <a:noFill/>
-          <a:ln>
-            <a:noFill/>
-          </a:ln>
-        </p:spPr>
-      </p:pic>
-      <p:cxnSp>
-        <p:nvCxnSpPr>
-          <p:cNvPr id="135" name="Google Shape;135;p21"/>
-          <p:cNvCxnSpPr/>
-          <p:nvPr/>
-        </p:nvCxnSpPr>
-        <p:spPr>
-          <a:xfrm flipH="1">
-            <a:off x="1388975" y="3182900"/>
-            <a:ext cx="449100" cy="393600"/>
-          </a:xfrm>
-          <a:prstGeom prst="straightConnector1">
-            <a:avLst/>
-          </a:prstGeom>
-          <a:noFill/>
-          <a:ln cap="flat" cmpd="sng" w="9525">
-            <a:solidFill>
-              <a:schemeClr val="dk2"/>
-            </a:solidFill>
-            <a:prstDash val="dash"/>
-            <a:round/>
-            <a:headEnd len="med" w="med" type="none"/>
-            <a:tailEnd len="med" w="med" type="triangle"/>
-          </a:ln>
-        </p:spPr>
-      </p:cxnSp>
-      <p:cxnSp>
-        <p:nvCxnSpPr>
-          <p:cNvPr id="136" name="Google Shape;136;p21"/>
-          <p:cNvCxnSpPr/>
-          <p:nvPr/>
-        </p:nvCxnSpPr>
-        <p:spPr>
-          <a:xfrm rot="10800000">
-            <a:off x="1400475" y="3759450"/>
-            <a:ext cx="447900" cy="401700"/>
-          </a:xfrm>
-          <a:prstGeom prst="straightConnector1">
-            <a:avLst/>
-          </a:prstGeom>
-          <a:noFill/>
-          <a:ln cap="flat" cmpd="sng" w="9525">
-            <a:solidFill>
-              <a:schemeClr val="dk2"/>
-            </a:solidFill>
-            <a:prstDash val="dash"/>
-            <a:round/>
-            <a:headEnd len="med" w="med" type="none"/>
-            <a:tailEnd len="med" w="med" type="triangle"/>
-          </a:ln>
-        </p:spPr>
-      </p:cxnSp>
-      <p:cxnSp>
-        <p:nvCxnSpPr>
-          <p:cNvPr id="137" name="Google Shape;137;p21"/>
-          <p:cNvCxnSpPr/>
-          <p:nvPr/>
-        </p:nvCxnSpPr>
-        <p:spPr>
-          <a:xfrm rot="10800000">
-            <a:off x="2389025" y="3172700"/>
-            <a:ext cx="545700" cy="360300"/>
-          </a:xfrm>
-          <a:prstGeom prst="straightConnector1">
-            <a:avLst/>
-          </a:prstGeom>
-          <a:noFill/>
-          <a:ln cap="flat" cmpd="sng" w="9525">
-            <a:solidFill>
-              <a:schemeClr val="dk2"/>
-            </a:solidFill>
-            <a:prstDash val="dash"/>
-            <a:round/>
-            <a:headEnd len="med" w="med" type="none"/>
-            <a:tailEnd len="med" w="med" type="triangle"/>
-          </a:ln>
-        </p:spPr>
-      </p:cxnSp>
-      <p:cxnSp>
-        <p:nvCxnSpPr>
-          <p:cNvPr id="138" name="Google Shape;138;p21"/>
-          <p:cNvCxnSpPr/>
-          <p:nvPr/>
-        </p:nvCxnSpPr>
-        <p:spPr>
-          <a:xfrm flipH="1">
-            <a:off x="2399275" y="3728650"/>
-            <a:ext cx="540600" cy="442800"/>
-          </a:xfrm>
-          <a:prstGeom prst="straightConnector1">
-            <a:avLst/>
-          </a:prstGeom>
-          <a:noFill/>
-          <a:ln cap="flat" cmpd="sng" w="9525">
-            <a:solidFill>
-              <a:schemeClr val="dk2"/>
-            </a:solidFill>
-            <a:prstDash val="dash"/>
-            <a:round/>
-            <a:headEnd len="med" w="med" type="none"/>
-            <a:tailEnd len="med" w="med" type="triangle"/>
-          </a:ln>
-        </p:spPr>
-      </p:cxnSp>
-      <p:cxnSp>
-        <p:nvCxnSpPr>
-          <p:cNvPr id="139" name="Google Shape;139;p21"/>
-          <p:cNvCxnSpPr/>
-          <p:nvPr/>
-        </p:nvCxnSpPr>
-        <p:spPr>
-          <a:xfrm>
-            <a:off x="5744075" y="3460913"/>
-            <a:ext cx="363900" cy="0"/>
-          </a:xfrm>
-          <a:prstGeom prst="straightConnector1">
-            <a:avLst/>
-          </a:prstGeom>
-          <a:noFill/>
-          <a:ln cap="flat" cmpd="sng" w="9525">
-            <a:solidFill>
-              <a:schemeClr val="dk2"/>
-            </a:solidFill>
-            <a:prstDash val="dash"/>
-            <a:round/>
-            <a:headEnd len="med" w="med" type="none"/>
-            <a:tailEnd len="med" w="med" type="triangle"/>
-          </a:ln>
-        </p:spPr>
-      </p:cxnSp>
-      <p:sp>
-        <p:nvSpPr>
-          <p:cNvPr id="140" name="Google Shape;140;p21"/>
-          <p:cNvSpPr txBox="1"/>
-          <p:nvPr/>
-        </p:nvSpPr>
-        <p:spPr>
-          <a:xfrm>
-            <a:off x="5967558" y="3256175"/>
-            <a:ext cx="1744800" cy="384900"/>
-          </a:xfrm>
-          <a:prstGeom prst="rect">
-            <a:avLst/>
-          </a:prstGeom>
-          <a:noFill/>
-          <a:ln>
-            <a:noFill/>
-          </a:ln>
-        </p:spPr>
-        <p:txBody>
-          <a:bodyPr anchorCtr="0" anchor="t" bIns="91425" lIns="91425" spcFirstLastPara="1" rIns="91425" wrap="square" tIns="91425">
-            <a:spAutoFit/>
-          </a:bodyPr>
-          <a:lstStyle/>
-          <a:p>
-            <a:pPr indent="0" lvl="0" marL="0" rtl="0" algn="l">
-              <a:spcBef>
-                <a:spcPts val="0"/>
-              </a:spcBef>
-              <a:spcAft>
-                <a:spcPts val="0"/>
-              </a:spcAft>
-              <a:buNone/>
-            </a:pPr>
-            <a:r>
-              <a:rPr lang="en" sz="1300">
-                <a:solidFill>
-                  <a:schemeClr val="dk2"/>
-                </a:solidFill>
-              </a:rPr>
-              <a:t>    Backward pass</a:t>
-            </a:r>
-            <a:endParaRPr sz="1300">
-              <a:solidFill>
-                <a:schemeClr val="dk2"/>
-              </a:solidFill>
-            </a:endParaRPr>
-          </a:p>
-        </p:txBody>
-      </p:sp>
-      <p:cxnSp>
-        <p:nvCxnSpPr>
-          <p:cNvPr id="141" name="Google Shape;141;p21"/>
-          <p:cNvCxnSpPr/>
-          <p:nvPr/>
-        </p:nvCxnSpPr>
-        <p:spPr>
-          <a:xfrm>
-            <a:off x="5744075" y="3796838"/>
-            <a:ext cx="365400" cy="0"/>
-          </a:xfrm>
-          <a:prstGeom prst="straightConnector1">
-            <a:avLst/>
-          </a:prstGeom>
-          <a:noFill/>
-          <a:ln cap="flat" cmpd="sng" w="9525">
-            <a:solidFill>
-              <a:schemeClr val="dk2"/>
-            </a:solidFill>
-            <a:prstDash val="solid"/>
-            <a:round/>
-            <a:headEnd len="med" w="med" type="none"/>
-            <a:tailEnd len="med" w="med" type="triangle"/>
-          </a:ln>
-        </p:spPr>
-      </p:cxnSp>
-      <p:sp>
-        <p:nvSpPr>
-          <p:cNvPr id="142" name="Google Shape;142;p21"/>
-          <p:cNvSpPr txBox="1"/>
-          <p:nvPr/>
-        </p:nvSpPr>
-        <p:spPr>
-          <a:xfrm>
-            <a:off x="5999008" y="3604400"/>
-            <a:ext cx="1744800" cy="384900"/>
-          </a:xfrm>
-          <a:prstGeom prst="rect">
-            <a:avLst/>
-          </a:prstGeom>
-          <a:noFill/>
-          <a:ln>
-            <a:noFill/>
-          </a:ln>
-        </p:spPr>
-        <p:txBody>
-          <a:bodyPr anchorCtr="0" anchor="t" bIns="91425" lIns="91425" spcFirstLastPara="1" rIns="91425" wrap="square" tIns="91425">
-            <a:spAutoFit/>
-          </a:bodyPr>
-          <a:lstStyle/>
-          <a:p>
-            <a:pPr indent="0" lvl="0" marL="0" rtl="0" algn="l">
-              <a:spcBef>
-                <a:spcPts val="0"/>
-              </a:spcBef>
-              <a:spcAft>
-                <a:spcPts val="0"/>
-              </a:spcAft>
-              <a:buNone/>
-            </a:pPr>
-            <a:r>
-              <a:rPr lang="en" sz="1300">
-                <a:solidFill>
-                  <a:schemeClr val="dk2"/>
-                </a:solidFill>
-              </a:rPr>
-              <a:t>    Forward Pass</a:t>
-            </a:r>
-            <a:endParaRPr sz="1300">
-              <a:solidFill>
-                <a:schemeClr val="dk2"/>
-              </a:solidFill>
-            </a:endParaRPr>
-          </a:p>
-        </p:txBody>
-      </p:sp>
     </p:spTree>
   </p:cSld>
   <p:clrMapOvr>
@@ -13267,6 +15754,285 @@
 </file>
 
 <file path=ppt/theme/theme1.xml><?xml version="1.0" encoding="utf-8"?>
+<a:theme xmlns:a="http://schemas.openxmlformats.org/drawingml/2006/main" xmlns:r="http://schemas.openxmlformats.org/officeDocument/2006/relationships">
+  <a:themeElements>
+    <a:clrScheme name="Default">
+      <a:dk1>
+        <a:srgbClr val="000000"/>
+      </a:dk1>
+      <a:lt1>
+        <a:srgbClr val="FFFFFF"/>
+      </a:lt1>
+      <a:dk2>
+        <a:srgbClr val="158158"/>
+      </a:dk2>
+      <a:lt2>
+        <a:srgbClr val="F3F3F3"/>
+      </a:lt2>
+      <a:accent1>
+        <a:srgbClr val="058DC7"/>
+      </a:accent1>
+      <a:accent2>
+        <a:srgbClr val="50B432"/>
+      </a:accent2>
+      <a:accent3>
+        <a:srgbClr val="ED561B"/>
+      </a:accent3>
+      <a:accent4>
+        <a:srgbClr val="EDEF00"/>
+      </a:accent4>
+      <a:accent5>
+        <a:srgbClr val="24CBE5"/>
+      </a:accent5>
+      <a:accent6>
+        <a:srgbClr val="64E572"/>
+      </a:accent6>
+      <a:hlink>
+        <a:srgbClr val="2200CC"/>
+      </a:hlink>
+      <a:folHlink>
+        <a:srgbClr val="551A8B"/>
+      </a:folHlink>
+    </a:clrScheme>
+    <a:fontScheme name="Office">
+      <a:majorFont>
+        <a:latin typeface="Arial"/>
+        <a:ea typeface=""/>
+        <a:cs typeface=""/>
+        <a:font script="Jpan" typeface="ＭＳ Ｐゴシック"/>
+        <a:font script="Hang" typeface="맑은 고딕"/>
+        <a:font script="Hans" typeface="宋体"/>
+        <a:font script="Hant" typeface="新細明體"/>
+        <a:font script="Arab" typeface="Times New Roman"/>
+        <a:font script="Hebr" typeface="Times New Roman"/>
+        <a:font script="Thai" typeface="Angsana New"/>
+        <a:font script="Ethi" typeface="Nyala"/>
+        <a:font script="Beng" typeface="Vrinda"/>
+        <a:font script="Gujr" typeface="Shruti"/>
+        <a:font script="Khmr" typeface="MoolBoran"/>
+        <a:font script="Knda" typeface="Tunga"/>
+        <a:font script="Guru" typeface="Raavi"/>
+        <a:font script="Cans" typeface="Euphemia"/>
+        <a:font script="Cher" typeface="Plantagenet Cherokee"/>
+        <a:font script="Yiii" typeface="Microsoft Yi Baiti"/>
+        <a:font script="Tibt" typeface="Microsoft Himalaya"/>
+        <a:font script="Thaa" typeface="MV Boli"/>
+        <a:font script="Deva" typeface="Mangal"/>
+        <a:font script="Telu" typeface="Gautami"/>
+        <a:font script="Taml" typeface="Latha"/>
+        <a:font script="Syrc" typeface="Estrangelo Edessa"/>
+        <a:font script="Orya" typeface="Kalinga"/>
+        <a:font script="Mlym" typeface="Kartika"/>
+        <a:font script="Laoo" typeface="DokChampa"/>
+        <a:font script="Sinh" typeface="Iskoola Pota"/>
+        <a:font script="Mong" typeface="Mongolian Baiti"/>
+        <a:font script="Viet" typeface="Times New Roman"/>
+        <a:font script="Uigh" typeface="Microsoft Uighur"/>
+        <a:font script="Geor" typeface="Sylfaen"/>
+      </a:majorFont>
+      <a:minorFont>
+        <a:latin typeface="Arial"/>
+        <a:ea typeface=""/>
+        <a:cs typeface=""/>
+        <a:font script="Jpan" typeface="ＭＳ Ｐゴシック"/>
+        <a:font script="Hang" typeface="맑은 고딕"/>
+        <a:font script="Hans" typeface="宋体"/>
+        <a:font script="Hant" typeface="新細明體"/>
+        <a:font script="Arab" typeface="Arial"/>
+        <a:font script="Hebr" typeface="Arial"/>
+        <a:font script="Thai" typeface="Cordia New"/>
+        <a:font script="Ethi" typeface="Nyala"/>
+        <a:font script="Beng" typeface="Vrinda"/>
+        <a:font script="Gujr" typeface="Shruti"/>
+        <a:font script="Khmr" typeface="DaunPenh"/>
+        <a:font script="Knda" typeface="Tunga"/>
+        <a:font script="Guru" typeface="Raavi"/>
+        <a:font script="Cans" typeface="Euphemia"/>
+        <a:font script="Cher" typeface="Plantagenet Cherokee"/>
+        <a:font script="Yiii" typeface="Microsoft Yi Baiti"/>
+        <a:font script="Tibt" typeface="Microsoft Himalaya"/>
+        <a:font script="Thaa" typeface="MV Boli"/>
+        <a:font script="Deva" typeface="Mangal"/>
+        <a:font script="Telu" typeface="Gautami"/>
+        <a:font script="Taml" typeface="Latha"/>
+        <a:font script="Syrc" typeface="Estrangelo Edessa"/>
+        <a:font script="Orya" typeface="Kalinga"/>
+        <a:font script="Mlym" typeface="Kartika"/>
+        <a:font script="Laoo" typeface="DokChampa"/>
+        <a:font script="Sinh" typeface="Iskoola Pota"/>
+        <a:font script="Mong" typeface="Mongolian Baiti"/>
+        <a:font script="Viet" typeface="Arial"/>
+        <a:font script="Uigh" typeface="Microsoft Uighur"/>
+        <a:font script="Geor" typeface="Sylfaen"/>
+      </a:minorFont>
+    </a:fontScheme>
+    <a:fmtScheme name="Office">
+      <a:fillStyleLst>
+        <a:solidFill>
+          <a:schemeClr val="phClr"/>
+        </a:solidFill>
+        <a:gradFill rotWithShape="1">
+          <a:gsLst>
+            <a:gs pos="0">
+              <a:schemeClr val="phClr">
+                <a:tint val="50000"/>
+                <a:satMod val="300000"/>
+              </a:schemeClr>
+            </a:gs>
+            <a:gs pos="35000">
+              <a:schemeClr val="phClr">
+                <a:tint val="37000"/>
+                <a:satMod val="300000"/>
+              </a:schemeClr>
+            </a:gs>
+            <a:gs pos="100000">
+              <a:schemeClr val="phClr">
+                <a:tint val="15000"/>
+                <a:satMod val="350000"/>
+              </a:schemeClr>
+            </a:gs>
+          </a:gsLst>
+          <a:lin ang="16200000" scaled="1"/>
+        </a:gradFill>
+        <a:gradFill rotWithShape="1">
+          <a:gsLst>
+            <a:gs pos="0">
+              <a:schemeClr val="phClr">
+                <a:tint val="100000"/>
+                <a:shade val="100000"/>
+                <a:satMod val="130000"/>
+              </a:schemeClr>
+            </a:gs>
+            <a:gs pos="100000">
+              <a:schemeClr val="phClr">
+                <a:tint val="50000"/>
+                <a:shade val="100000"/>
+                <a:satMod val="350000"/>
+              </a:schemeClr>
+            </a:gs>
+          </a:gsLst>
+          <a:lin ang="16200000" scaled="0"/>
+        </a:gradFill>
+      </a:fillStyleLst>
+      <a:lnStyleLst>
+        <a:ln w="9525" cap="flat" cmpd="sng" algn="ctr">
+          <a:solidFill>
+            <a:schemeClr val="phClr">
+              <a:shade val="95000"/>
+              <a:satMod val="105000"/>
+            </a:schemeClr>
+          </a:solidFill>
+          <a:prstDash val="solid"/>
+        </a:ln>
+        <a:ln w="25400" cap="flat" cmpd="sng" algn="ctr">
+          <a:solidFill>
+            <a:schemeClr val="phClr"/>
+          </a:solidFill>
+          <a:prstDash val="solid"/>
+        </a:ln>
+        <a:ln w="38100" cap="flat" cmpd="sng" algn="ctr">
+          <a:solidFill>
+            <a:schemeClr val="phClr"/>
+          </a:solidFill>
+          <a:prstDash val="solid"/>
+        </a:ln>
+      </a:lnStyleLst>
+      <a:effectStyleLst>
+        <a:effectStyle>
+          <a:effectLst>
+            <a:outerShdw blurRad="40000" dist="20000" dir="5400000" rotWithShape="0">
+              <a:srgbClr val="000000">
+                <a:alpha val="38000"/>
+              </a:srgbClr>
+            </a:outerShdw>
+          </a:effectLst>
+        </a:effectStyle>
+        <a:effectStyle>
+          <a:effectLst>
+            <a:outerShdw blurRad="40000" dist="23000" dir="5400000" rotWithShape="0">
+              <a:srgbClr val="000000">
+                <a:alpha val="35000"/>
+              </a:srgbClr>
+            </a:outerShdw>
+          </a:effectLst>
+        </a:effectStyle>
+        <a:effectStyle>
+          <a:effectLst>
+            <a:outerShdw blurRad="40000" dist="23000" dir="5400000" rotWithShape="0">
+              <a:srgbClr val="000000">
+                <a:alpha val="35000"/>
+              </a:srgbClr>
+            </a:outerShdw>
+          </a:effectLst>
+          <a:scene3d>
+            <a:camera prst="orthographicFront">
+              <a:rot lat="0" lon="0" rev="0"/>
+            </a:camera>
+            <a:lightRig rig="threePt" dir="t">
+              <a:rot lat="0" lon="0" rev="1200000"/>
+            </a:lightRig>
+          </a:scene3d>
+          <a:sp3d>
+            <a:bevelT w="63500" h="25400"/>
+          </a:sp3d>
+        </a:effectStyle>
+      </a:effectStyleLst>
+      <a:bgFillStyleLst>
+        <a:solidFill>
+          <a:schemeClr val="phClr"/>
+        </a:solidFill>
+        <a:gradFill rotWithShape="1">
+          <a:gsLst>
+            <a:gs pos="0">
+              <a:schemeClr val="phClr">
+                <a:tint val="40000"/>
+                <a:satMod val="350000"/>
+              </a:schemeClr>
+            </a:gs>
+            <a:gs pos="40000">
+              <a:schemeClr val="phClr">
+                <a:tint val="45000"/>
+                <a:shade val="99000"/>
+                <a:satMod val="350000"/>
+              </a:schemeClr>
+            </a:gs>
+            <a:gs pos="100000">
+              <a:schemeClr val="phClr">
+                <a:shade val="20000"/>
+                <a:satMod val="255000"/>
+              </a:schemeClr>
+            </a:gs>
+          </a:gsLst>
+          <a:path path="circle">
+            <a:fillToRect l="50000" t="-80000" r="50000" b="180000"/>
+          </a:path>
+        </a:gradFill>
+        <a:gradFill rotWithShape="1">
+          <a:gsLst>
+            <a:gs pos="0">
+              <a:schemeClr val="phClr">
+                <a:tint val="80000"/>
+                <a:satMod val="300000"/>
+              </a:schemeClr>
+            </a:gs>
+            <a:gs pos="100000">
+              <a:schemeClr val="phClr">
+                <a:shade val="30000"/>
+                <a:satMod val="200000"/>
+              </a:schemeClr>
+            </a:gs>
+          </a:gsLst>
+          <a:path path="circle">
+            <a:fillToRect l="50000" t="50000" r="50000" b="50000"/>
+          </a:path>
+        </a:gradFill>
+      </a:bgFillStyleLst>
+    </a:fmtScheme>
+  </a:themeElements>
+</a:theme>
+</file>
+
+<file path=ppt/theme/theme2.xml><?xml version="1.0" encoding="utf-8"?>
 <a:theme xmlns:a="http://schemas.openxmlformats.org/drawingml/2006/main" xmlns:r="http://schemas.openxmlformats.org/officeDocument/2006/relationships" name="Simple Light">
   <a:themeElements>
     <a:clrScheme name="Simple Light">
@@ -13543,283 +16309,4 @@
     </a:fmtScheme>
   </a:themeElements>
 </a:theme>
-</file>
-
-<file path=ppt/theme/theme2.xml><?xml version="1.0" encoding="utf-8"?>
-<a:theme xmlns:a="http://schemas.openxmlformats.org/drawingml/2006/main" xmlns:r="http://schemas.openxmlformats.org/officeDocument/2006/relationships">
-  <a:themeElements>
-    <a:clrScheme name="Default">
-      <a:dk1>
-        <a:srgbClr val="000000"/>
-      </a:dk1>
-      <a:lt1>
-        <a:srgbClr val="FFFFFF"/>
-      </a:lt1>
-      <a:dk2>
-        <a:srgbClr val="158158"/>
-      </a:dk2>
-      <a:lt2>
-        <a:srgbClr val="F3F3F3"/>
-      </a:lt2>
-      <a:accent1>
-        <a:srgbClr val="058DC7"/>
-      </a:accent1>
-      <a:accent2>
-        <a:srgbClr val="50B432"/>
-      </a:accent2>
-      <a:accent3>
-        <a:srgbClr val="ED561B"/>
-      </a:accent3>
-      <a:accent4>
-        <a:srgbClr val="EDEF00"/>
-      </a:accent4>
-      <a:accent5>
-        <a:srgbClr val="24CBE5"/>
-      </a:accent5>
-      <a:accent6>
-        <a:srgbClr val="64E572"/>
-      </a:accent6>
-      <a:hlink>
-        <a:srgbClr val="2200CC"/>
-      </a:hlink>
-      <a:folHlink>
-        <a:srgbClr val="551A8B"/>
-      </a:folHlink>
-    </a:clrScheme>
-    <a:fontScheme name="Office">
-      <a:majorFont>
-        <a:latin typeface="Arial"/>
-        <a:ea typeface=""/>
-        <a:cs typeface=""/>
-        <a:font script="Jpan" typeface="ＭＳ Ｐゴシック"/>
-        <a:font script="Hang" typeface="맑은 고딕"/>
-        <a:font script="Hans" typeface="宋体"/>
-        <a:font script="Hant" typeface="新細明體"/>
-        <a:font script="Arab" typeface="Times New Roman"/>
-        <a:font script="Hebr" typeface="Times New Roman"/>
-        <a:font script="Thai" typeface="Angsana New"/>
-        <a:font script="Ethi" typeface="Nyala"/>
-        <a:font script="Beng" typeface="Vrinda"/>
-        <a:font script="Gujr" typeface="Shruti"/>
-        <a:font script="Khmr" typeface="MoolBoran"/>
-        <a:font script="Knda" typeface="Tunga"/>
-        <a:font script="Guru" typeface="Raavi"/>
-        <a:font script="Cans" typeface="Euphemia"/>
-        <a:font script="Cher" typeface="Plantagenet Cherokee"/>
-        <a:font script="Yiii" typeface="Microsoft Yi Baiti"/>
-        <a:font script="Tibt" typeface="Microsoft Himalaya"/>
-        <a:font script="Thaa" typeface="MV Boli"/>
-        <a:font script="Deva" typeface="Mangal"/>
-        <a:font script="Telu" typeface="Gautami"/>
-        <a:font script="Taml" typeface="Latha"/>
-        <a:font script="Syrc" typeface="Estrangelo Edessa"/>
-        <a:font script="Orya" typeface="Kalinga"/>
-        <a:font script="Mlym" typeface="Kartika"/>
-        <a:font script="Laoo" typeface="DokChampa"/>
-        <a:font script="Sinh" typeface="Iskoola Pota"/>
-        <a:font script="Mong" typeface="Mongolian Baiti"/>
-        <a:font script="Viet" typeface="Times New Roman"/>
-        <a:font script="Uigh" typeface="Microsoft Uighur"/>
-        <a:font script="Geor" typeface="Sylfaen"/>
-      </a:majorFont>
-      <a:minorFont>
-        <a:latin typeface="Arial"/>
-        <a:ea typeface=""/>
-        <a:cs typeface=""/>
-        <a:font script="Jpan" typeface="ＭＳ Ｐゴシック"/>
-        <a:font script="Hang" typeface="맑은 고딕"/>
-        <a:font script="Hans" typeface="宋体"/>
-        <a:font script="Hant" typeface="新細明體"/>
-        <a:font script="Arab" typeface="Arial"/>
-        <a:font script="Hebr" typeface="Arial"/>
-        <a:font script="Thai" typeface="Cordia New"/>
-        <a:font script="Ethi" typeface="Nyala"/>
-        <a:font script="Beng" typeface="Vrinda"/>
-        <a:font script="Gujr" typeface="Shruti"/>
-        <a:font script="Khmr" typeface="DaunPenh"/>
-        <a:font script="Knda" typeface="Tunga"/>
-        <a:font script="Guru" typeface="Raavi"/>
-        <a:font script="Cans" typeface="Euphemia"/>
-        <a:font script="Cher" typeface="Plantagenet Cherokee"/>
-        <a:font script="Yiii" typeface="Microsoft Yi Baiti"/>
-        <a:font script="Tibt" typeface="Microsoft Himalaya"/>
-        <a:font script="Thaa" typeface="MV Boli"/>
-        <a:font script="Deva" typeface="Mangal"/>
-        <a:font script="Telu" typeface="Gautami"/>
-        <a:font script="Taml" typeface="Latha"/>
-        <a:font script="Syrc" typeface="Estrangelo Edessa"/>
-        <a:font script="Orya" typeface="Kalinga"/>
-        <a:font script="Mlym" typeface="Kartika"/>
-        <a:font script="Laoo" typeface="DokChampa"/>
-        <a:font script="Sinh" typeface="Iskoola Pota"/>
-        <a:font script="Mong" typeface="Mongolian Baiti"/>
-        <a:font script="Viet" typeface="Arial"/>
-        <a:font script="Uigh" typeface="Microsoft Uighur"/>
-        <a:font script="Geor" typeface="Sylfaen"/>
-      </a:minorFont>
-    </a:fontScheme>
-    <a:fmtScheme name="Office">
-      <a:fillStyleLst>
-        <a:solidFill>
-          <a:schemeClr val="phClr"/>
-        </a:solidFill>
-        <a:gradFill rotWithShape="1">
-          <a:gsLst>
-            <a:gs pos="0">
-              <a:schemeClr val="phClr">
-                <a:tint val="50000"/>
-                <a:satMod val="300000"/>
-              </a:schemeClr>
-            </a:gs>
-            <a:gs pos="35000">
-              <a:schemeClr val="phClr">
-                <a:tint val="37000"/>
-                <a:satMod val="300000"/>
-              </a:schemeClr>
-            </a:gs>
-            <a:gs pos="100000">
-              <a:schemeClr val="phClr">
-                <a:tint val="15000"/>
-                <a:satMod val="350000"/>
-              </a:schemeClr>
-            </a:gs>
-          </a:gsLst>
-          <a:lin ang="16200000" scaled="1"/>
-        </a:gradFill>
-        <a:gradFill rotWithShape="1">
-          <a:gsLst>
-            <a:gs pos="0">
-              <a:schemeClr val="phClr">
-                <a:tint val="100000"/>
-                <a:shade val="100000"/>
-                <a:satMod val="130000"/>
-              </a:schemeClr>
-            </a:gs>
-            <a:gs pos="100000">
-              <a:schemeClr val="phClr">
-                <a:tint val="50000"/>
-                <a:shade val="100000"/>
-                <a:satMod val="350000"/>
-              </a:schemeClr>
-            </a:gs>
-          </a:gsLst>
-          <a:lin ang="16200000" scaled="0"/>
-        </a:gradFill>
-      </a:fillStyleLst>
-      <a:lnStyleLst>
-        <a:ln w="9525" cap="flat" cmpd="sng" algn="ctr">
-          <a:solidFill>
-            <a:schemeClr val="phClr">
-              <a:shade val="95000"/>
-              <a:satMod val="105000"/>
-            </a:schemeClr>
-          </a:solidFill>
-          <a:prstDash val="solid"/>
-        </a:ln>
-        <a:ln w="25400" cap="flat" cmpd="sng" algn="ctr">
-          <a:solidFill>
-            <a:schemeClr val="phClr"/>
-          </a:solidFill>
-          <a:prstDash val="solid"/>
-        </a:ln>
-        <a:ln w="38100" cap="flat" cmpd="sng" algn="ctr">
-          <a:solidFill>
-            <a:schemeClr val="phClr"/>
-          </a:solidFill>
-          <a:prstDash val="solid"/>
-        </a:ln>
-      </a:lnStyleLst>
-      <a:effectStyleLst>
-        <a:effectStyle>
-          <a:effectLst>
-            <a:outerShdw blurRad="40000" dist="20000" dir="5400000" rotWithShape="0">
-              <a:srgbClr val="000000">
-                <a:alpha val="38000"/>
-              </a:srgbClr>
-            </a:outerShdw>
-          </a:effectLst>
-        </a:effectStyle>
-        <a:effectStyle>
-          <a:effectLst>
-            <a:outerShdw blurRad="40000" dist="23000" dir="5400000" rotWithShape="0">
-              <a:srgbClr val="000000">
-                <a:alpha val="35000"/>
-              </a:srgbClr>
-            </a:outerShdw>
-          </a:effectLst>
-        </a:effectStyle>
-        <a:effectStyle>
-          <a:effectLst>
-            <a:outerShdw blurRad="40000" dist="23000" dir="5400000" rotWithShape="0">
-              <a:srgbClr val="000000">
-                <a:alpha val="35000"/>
-              </a:srgbClr>
-            </a:outerShdw>
-          </a:effectLst>
-          <a:scene3d>
-            <a:camera prst="orthographicFront">
-              <a:rot lat="0" lon="0" rev="0"/>
-            </a:camera>
-            <a:lightRig rig="threePt" dir="t">
-              <a:rot lat="0" lon="0" rev="1200000"/>
-            </a:lightRig>
-          </a:scene3d>
-          <a:sp3d>
-            <a:bevelT w="63500" h="25400"/>
-          </a:sp3d>
-        </a:effectStyle>
-      </a:effectStyleLst>
-      <a:bgFillStyleLst>
-        <a:solidFill>
-          <a:schemeClr val="phClr"/>
-        </a:solidFill>
-        <a:gradFill rotWithShape="1">
-          <a:gsLst>
-            <a:gs pos="0">
-              <a:schemeClr val="phClr">
-                <a:tint val="40000"/>
-                <a:satMod val="350000"/>
-              </a:schemeClr>
-            </a:gs>
-            <a:gs pos="40000">
-              <a:schemeClr val="phClr">
-                <a:tint val="45000"/>
-                <a:shade val="99000"/>
-                <a:satMod val="350000"/>
-              </a:schemeClr>
-            </a:gs>
-            <a:gs pos="100000">
-              <a:schemeClr val="phClr">
-                <a:shade val="20000"/>
-                <a:satMod val="255000"/>
-              </a:schemeClr>
-            </a:gs>
-          </a:gsLst>
-          <a:path path="circle">
-            <a:fillToRect l="50000" t="-80000" r="50000" b="180000"/>
-          </a:path>
-        </a:gradFill>
-        <a:gradFill rotWithShape="1">
-          <a:gsLst>
-            <a:gs pos="0">
-              <a:schemeClr val="phClr">
-                <a:tint val="80000"/>
-                <a:satMod val="300000"/>
-              </a:schemeClr>
-            </a:gs>
-            <a:gs pos="100000">
-              <a:schemeClr val="phClr">
-                <a:shade val="30000"/>
-                <a:satMod val="200000"/>
-              </a:schemeClr>
-            </a:gs>
-          </a:gsLst>
-          <a:path path="circle">
-            <a:fillToRect l="50000" t="50000" r="50000" b="50000"/>
-          </a:path>
-        </a:gradFill>
-      </a:bgFillStyleLst>
-    </a:fmtScheme>
-  </a:themeElements>
-</a:theme>
 </file>